--- a/Archiv/PackageProcess_Labelmachine.pptx
+++ b/Archiv/PackageProcess_Labelmachine.pptx
@@ -5,12 +5,13 @@
     <p:sldMasterId id="2147483648" r:id="rId1"/>
   </p:sldMasterIdLst>
   <p:sldIdLst>
-    <p:sldId id="262" r:id="rId2"/>
-    <p:sldId id="258" r:id="rId3"/>
-    <p:sldId id="261" r:id="rId4"/>
-    <p:sldId id="257" r:id="rId5"/>
-    <p:sldId id="263" r:id="rId6"/>
-    <p:sldId id="264" r:id="rId7"/>
+    <p:sldId id="265" r:id="rId2"/>
+    <p:sldId id="262" r:id="rId3"/>
+    <p:sldId id="258" r:id="rId4"/>
+    <p:sldId id="261" r:id="rId5"/>
+    <p:sldId id="257" r:id="rId6"/>
+    <p:sldId id="263" r:id="rId7"/>
+    <p:sldId id="264" r:id="rId8"/>
   </p:sldIdLst>
   <p:sldSz cx="12192000" cy="6858000"/>
   <p:notesSz cx="6858000" cy="9144000"/>
@@ -264,7 +265,7 @@
           <a:p>
             <a:fld id="{7E064887-1312-4A4A-8E43-383F23D240A8}" type="datetimeFigureOut">
               <a:rPr lang="de-DE" smtClean="0"/>
-              <a:t>04. Mrz. 2026</a:t>
+              <a:t>05. Mrz. 2026</a:t>
             </a:fld>
             <a:endParaRPr lang="de-DE"/>
           </a:p>
@@ -462,7 +463,7 @@
           <a:p>
             <a:fld id="{7E064887-1312-4A4A-8E43-383F23D240A8}" type="datetimeFigureOut">
               <a:rPr lang="de-DE" smtClean="0"/>
-              <a:t>04. Mrz. 2026</a:t>
+              <a:t>05. Mrz. 2026</a:t>
             </a:fld>
             <a:endParaRPr lang="de-DE"/>
           </a:p>
@@ -670,7 +671,7 @@
           <a:p>
             <a:fld id="{7E064887-1312-4A4A-8E43-383F23D240A8}" type="datetimeFigureOut">
               <a:rPr lang="de-DE" smtClean="0"/>
-              <a:t>04. Mrz. 2026</a:t>
+              <a:t>05. Mrz. 2026</a:t>
             </a:fld>
             <a:endParaRPr lang="de-DE"/>
           </a:p>
@@ -868,7 +869,7 @@
           <a:p>
             <a:fld id="{7E064887-1312-4A4A-8E43-383F23D240A8}" type="datetimeFigureOut">
               <a:rPr lang="de-DE" smtClean="0"/>
-              <a:t>04. Mrz. 2026</a:t>
+              <a:t>05. Mrz. 2026</a:t>
             </a:fld>
             <a:endParaRPr lang="de-DE"/>
           </a:p>
@@ -1143,7 +1144,7 @@
           <a:p>
             <a:fld id="{7E064887-1312-4A4A-8E43-383F23D240A8}" type="datetimeFigureOut">
               <a:rPr lang="de-DE" smtClean="0"/>
-              <a:t>04. Mrz. 2026</a:t>
+              <a:t>05. Mrz. 2026</a:t>
             </a:fld>
             <a:endParaRPr lang="de-DE"/>
           </a:p>
@@ -1408,7 +1409,7 @@
           <a:p>
             <a:fld id="{7E064887-1312-4A4A-8E43-383F23D240A8}" type="datetimeFigureOut">
               <a:rPr lang="de-DE" smtClean="0"/>
-              <a:t>04. Mrz. 2026</a:t>
+              <a:t>05. Mrz. 2026</a:t>
             </a:fld>
             <a:endParaRPr lang="de-DE"/>
           </a:p>
@@ -1820,7 +1821,7 @@
           <a:p>
             <a:fld id="{7E064887-1312-4A4A-8E43-383F23D240A8}" type="datetimeFigureOut">
               <a:rPr lang="de-DE" smtClean="0"/>
-              <a:t>04. Mrz. 2026</a:t>
+              <a:t>05. Mrz. 2026</a:t>
             </a:fld>
             <a:endParaRPr lang="de-DE"/>
           </a:p>
@@ -1961,7 +1962,7 @@
           <a:p>
             <a:fld id="{7E064887-1312-4A4A-8E43-383F23D240A8}" type="datetimeFigureOut">
               <a:rPr lang="de-DE" smtClean="0"/>
-              <a:t>04. Mrz. 2026</a:t>
+              <a:t>05. Mrz. 2026</a:t>
             </a:fld>
             <a:endParaRPr lang="de-DE"/>
           </a:p>
@@ -2074,7 +2075,7 @@
           <a:p>
             <a:fld id="{7E064887-1312-4A4A-8E43-383F23D240A8}" type="datetimeFigureOut">
               <a:rPr lang="de-DE" smtClean="0"/>
-              <a:t>04. Mrz. 2026</a:t>
+              <a:t>05. Mrz. 2026</a:t>
             </a:fld>
             <a:endParaRPr lang="de-DE"/>
           </a:p>
@@ -2385,7 +2386,7 @@
           <a:p>
             <a:fld id="{7E064887-1312-4A4A-8E43-383F23D240A8}" type="datetimeFigureOut">
               <a:rPr lang="de-DE" smtClean="0"/>
-              <a:t>04. Mrz. 2026</a:t>
+              <a:t>05. Mrz. 2026</a:t>
             </a:fld>
             <a:endParaRPr lang="de-DE"/>
           </a:p>
@@ -2673,7 +2674,7 @@
           <a:p>
             <a:fld id="{7E064887-1312-4A4A-8E43-383F23D240A8}" type="datetimeFigureOut">
               <a:rPr lang="de-DE" smtClean="0"/>
-              <a:t>04. Mrz. 2026</a:t>
+              <a:t>05. Mrz. 2026</a:t>
             </a:fld>
             <a:endParaRPr lang="de-DE"/>
           </a:p>
@@ -2914,7 +2915,7 @@
           <a:p>
             <a:fld id="{7E064887-1312-4A4A-8E43-383F23D240A8}" type="datetimeFigureOut">
               <a:rPr lang="de-DE" smtClean="0"/>
-              <a:t>04. Mrz. 2026</a:t>
+              <a:t>05. Mrz. 2026</a:t>
             </a:fld>
             <a:endParaRPr lang="de-DE"/>
           </a:p>
@@ -3331,144 +3332,12 @@
           <a:chExt cx="0" cy="0"/>
         </a:xfrm>
       </p:grpSpPr>
-      <p:pic>
-        <p:nvPicPr>
-          <p:cNvPr id="4" name="Grafik 3">
-            <a:extLst>
-              <a:ext uri="{FF2B5EF4-FFF2-40B4-BE49-F238E27FC236}">
-                <a16:creationId xmlns:a16="http://schemas.microsoft.com/office/drawing/2014/main" id="{31C63E44-5953-D8FC-961E-EF6989BA043A}"/>
-              </a:ext>
-            </a:extLst>
-          </p:cNvPr>
-          <p:cNvPicPr>
-            <a:picLocks noChangeAspect="1"/>
-          </p:cNvPicPr>
-          <p:nvPr/>
-        </p:nvPicPr>
-        <p:blipFill>
-          <a:blip r:embed="rId2"/>
-          <a:stretch>
-            <a:fillRect/>
-          </a:stretch>
-        </p:blipFill>
-        <p:spPr>
-          <a:xfrm>
-            <a:off x="901405" y="1186259"/>
-            <a:ext cx="7692179" cy="5131415"/>
-          </a:xfrm>
-          <a:prstGeom prst="rect">
-            <a:avLst/>
-          </a:prstGeom>
-        </p:spPr>
-      </p:pic>
-      <p:sp>
-        <p:nvSpPr>
-          <p:cNvPr id="7" name="Pfeil: gestreift nach rechts 6">
-            <a:extLst>
-              <a:ext uri="{FF2B5EF4-FFF2-40B4-BE49-F238E27FC236}">
-                <a16:creationId xmlns:a16="http://schemas.microsoft.com/office/drawing/2014/main" id="{5C0EED9F-B41C-DDFF-D389-17FF62A130FC}"/>
-              </a:ext>
-            </a:extLst>
-          </p:cNvPr>
-          <p:cNvSpPr/>
-          <p:nvPr/>
-        </p:nvSpPr>
-        <p:spPr>
-          <a:xfrm rot="17936506">
-            <a:off x="2423120" y="2880661"/>
-            <a:ext cx="2986510" cy="688109"/>
-          </a:xfrm>
-          <a:prstGeom prst="stripedRightArrow">
-            <a:avLst/>
-          </a:prstGeom>
-          <a:solidFill>
-            <a:srgbClr val="00FF00"/>
-          </a:solidFill>
-        </p:spPr>
-        <p:style>
-          <a:lnRef idx="2">
-            <a:schemeClr val="accent1">
-              <a:shade val="15000"/>
-            </a:schemeClr>
-          </a:lnRef>
-          <a:fillRef idx="1">
-            <a:schemeClr val="accent1"/>
-          </a:fillRef>
-          <a:effectRef idx="0">
-            <a:schemeClr val="accent1"/>
-          </a:effectRef>
-          <a:fontRef idx="minor">
-            <a:schemeClr val="lt1"/>
-          </a:fontRef>
-        </p:style>
-        <p:txBody>
-          <a:bodyPr rtlCol="0" anchor="ctr"/>
-          <a:lstStyle/>
-          <a:p>
-            <a:pPr algn="ctr"/>
-            <a:r>
-              <a:rPr lang="de-DE" dirty="0">
-                <a:sym typeface="Wingdings" panose="05000000000000000000" pitchFamily="2" charset="2"/>
-              </a:rPr>
-              <a:t>  </a:t>
-            </a:r>
-            <a:r>
-              <a:rPr lang="de-DE" dirty="0"/>
-              <a:t>Laufrichtung</a:t>
-            </a:r>
-          </a:p>
-        </p:txBody>
-      </p:sp>
-      <p:cxnSp>
-        <p:nvCxnSpPr>
-          <p:cNvPr id="3" name="Gerade Verbindung mit Pfeil 2">
-            <a:extLst>
-              <a:ext uri="{FF2B5EF4-FFF2-40B4-BE49-F238E27FC236}">
-                <a16:creationId xmlns:a16="http://schemas.microsoft.com/office/drawing/2014/main" id="{730AB657-91F1-8371-8503-6C930BD54561}"/>
-              </a:ext>
-            </a:extLst>
-          </p:cNvPr>
-          <p:cNvCxnSpPr>
-            <a:cxnSpLocks/>
-          </p:cNvCxnSpPr>
-          <p:nvPr/>
-        </p:nvCxnSpPr>
-        <p:spPr>
-          <a:xfrm flipH="1" flipV="1">
-            <a:off x="6313000" y="1884218"/>
-            <a:ext cx="2720164" cy="674255"/>
-          </a:xfrm>
-          <a:prstGeom prst="straightConnector1">
-            <a:avLst/>
-          </a:prstGeom>
-          <a:ln w="25400">
-            <a:solidFill>
-              <a:srgbClr val="00FF00"/>
-            </a:solidFill>
-            <a:tailEnd type="triangle"/>
-          </a:ln>
-        </p:spPr>
-        <p:style>
-          <a:lnRef idx="2">
-            <a:schemeClr val="accent1"/>
-          </a:lnRef>
-          <a:fillRef idx="0">
-            <a:schemeClr val="accent1"/>
-          </a:fillRef>
-          <a:effectRef idx="1">
-            <a:schemeClr val="accent1"/>
-          </a:effectRef>
-          <a:fontRef idx="minor">
-            <a:schemeClr val="tx1"/>
-          </a:fontRef>
-        </p:style>
-      </p:cxnSp>
-      <p:sp>
-        <p:nvSpPr>
-          <p:cNvPr id="5" name="Textfeld 4">
-            <a:extLst>
-              <a:ext uri="{FF2B5EF4-FFF2-40B4-BE49-F238E27FC236}">
-                <a16:creationId xmlns:a16="http://schemas.microsoft.com/office/drawing/2014/main" id="{92B1C0A0-136E-30AD-86E5-DECB4B11805A}"/>
+      <p:sp>
+        <p:nvSpPr>
+          <p:cNvPr id="2" name="Textfeld 1">
+            <a:extLst>
+              <a:ext uri="{FF2B5EF4-FFF2-40B4-BE49-F238E27FC236}">
+                <a16:creationId xmlns:a16="http://schemas.microsoft.com/office/drawing/2014/main" id="{B7CA28B9-E4FC-5EA9-BA7B-58476E87FC99}"/>
               </a:ext>
             </a:extLst>
           </p:cNvPr>
@@ -3477,8 +3346,8 @@
         </p:nvSpPr>
         <p:spPr>
           <a:xfrm>
-            <a:off x="9014376" y="2532595"/>
-            <a:ext cx="1732657" cy="369332"/>
+            <a:off x="759123" y="656009"/>
+            <a:ext cx="4882552" cy="369332"/>
           </a:xfrm>
           <a:prstGeom prst="rect">
             <a:avLst/>
@@ -3491,209 +3360,6 @@
           </a:bodyPr>
           <a:lstStyle/>
           <a:p>
-            <a:r>
-              <a:rPr lang="de-DE" dirty="0"/>
-              <a:t>Workstations</a:t>
-            </a:r>
-          </a:p>
-        </p:txBody>
-      </p:sp>
-      <p:cxnSp>
-        <p:nvCxnSpPr>
-          <p:cNvPr id="8" name="Gerade Verbindung mit Pfeil 7">
-            <a:extLst>
-              <a:ext uri="{FF2B5EF4-FFF2-40B4-BE49-F238E27FC236}">
-                <a16:creationId xmlns:a16="http://schemas.microsoft.com/office/drawing/2014/main" id="{28E7FB33-B4A8-4986-A88A-FCB689430907}"/>
-              </a:ext>
-            </a:extLst>
-          </p:cNvPr>
-          <p:cNvCxnSpPr>
-            <a:cxnSpLocks/>
-          </p:cNvCxnSpPr>
-          <p:nvPr/>
-        </p:nvCxnSpPr>
-        <p:spPr>
-          <a:xfrm flipH="1" flipV="1">
-            <a:off x="6539345" y="2221345"/>
-            <a:ext cx="2493819" cy="429491"/>
-          </a:xfrm>
-          <a:prstGeom prst="straightConnector1">
-            <a:avLst/>
-          </a:prstGeom>
-          <a:ln w="25400">
-            <a:solidFill>
-              <a:srgbClr val="00FF00"/>
-            </a:solidFill>
-            <a:tailEnd type="triangle"/>
-          </a:ln>
-        </p:spPr>
-        <p:style>
-          <a:lnRef idx="2">
-            <a:schemeClr val="accent1"/>
-          </a:lnRef>
-          <a:fillRef idx="0">
-            <a:schemeClr val="accent1"/>
-          </a:fillRef>
-          <a:effectRef idx="1">
-            <a:schemeClr val="accent1"/>
-          </a:effectRef>
-          <a:fontRef idx="minor">
-            <a:schemeClr val="tx1"/>
-          </a:fontRef>
-        </p:style>
-      </p:cxnSp>
-      <p:cxnSp>
-        <p:nvCxnSpPr>
-          <p:cNvPr id="11" name="Gerade Verbindung mit Pfeil 10">
-            <a:extLst>
-              <a:ext uri="{FF2B5EF4-FFF2-40B4-BE49-F238E27FC236}">
-                <a16:creationId xmlns:a16="http://schemas.microsoft.com/office/drawing/2014/main" id="{25B38E49-B6C3-5234-6704-3B4913109E0A}"/>
-              </a:ext>
-            </a:extLst>
-          </p:cNvPr>
-          <p:cNvCxnSpPr>
-            <a:cxnSpLocks/>
-          </p:cNvCxnSpPr>
-          <p:nvPr/>
-        </p:nvCxnSpPr>
-        <p:spPr>
-          <a:xfrm flipH="1" flipV="1">
-            <a:off x="7093527" y="2558473"/>
-            <a:ext cx="1939637" cy="221672"/>
-          </a:xfrm>
-          <a:prstGeom prst="straightConnector1">
-            <a:avLst/>
-          </a:prstGeom>
-          <a:ln w="25400">
-            <a:solidFill>
-              <a:srgbClr val="00FF00"/>
-            </a:solidFill>
-            <a:tailEnd type="triangle"/>
-          </a:ln>
-        </p:spPr>
-        <p:style>
-          <a:lnRef idx="2">
-            <a:schemeClr val="accent1"/>
-          </a:lnRef>
-          <a:fillRef idx="0">
-            <a:schemeClr val="accent1"/>
-          </a:fillRef>
-          <a:effectRef idx="1">
-            <a:schemeClr val="accent1"/>
-          </a:effectRef>
-          <a:fontRef idx="minor">
-            <a:schemeClr val="tx1"/>
-          </a:fontRef>
-        </p:style>
-      </p:cxnSp>
-      <p:cxnSp>
-        <p:nvCxnSpPr>
-          <p:cNvPr id="14" name="Gerade Verbindung mit Pfeil 13">
-            <a:extLst>
-              <a:ext uri="{FF2B5EF4-FFF2-40B4-BE49-F238E27FC236}">
-                <a16:creationId xmlns:a16="http://schemas.microsoft.com/office/drawing/2014/main" id="{9FBDFEBD-1226-F2B0-EA12-738E71827CEE}"/>
-              </a:ext>
-            </a:extLst>
-          </p:cNvPr>
-          <p:cNvCxnSpPr>
-            <a:cxnSpLocks/>
-          </p:cNvCxnSpPr>
-          <p:nvPr/>
-        </p:nvCxnSpPr>
-        <p:spPr>
-          <a:xfrm flipH="1">
-            <a:off x="7767782" y="2858656"/>
-            <a:ext cx="1260599" cy="856366"/>
-          </a:xfrm>
-          <a:prstGeom prst="straightConnector1">
-            <a:avLst/>
-          </a:prstGeom>
-          <a:ln w="25400">
-            <a:solidFill>
-              <a:srgbClr val="00FF00"/>
-            </a:solidFill>
-            <a:tailEnd type="triangle"/>
-          </a:ln>
-        </p:spPr>
-        <p:style>
-          <a:lnRef idx="2">
-            <a:schemeClr val="accent1"/>
-          </a:lnRef>
-          <a:fillRef idx="0">
-            <a:schemeClr val="accent1"/>
-          </a:fillRef>
-          <a:effectRef idx="1">
-            <a:schemeClr val="accent1"/>
-          </a:effectRef>
-          <a:fontRef idx="minor">
-            <a:schemeClr val="tx1"/>
-          </a:fontRef>
-        </p:style>
-      </p:cxnSp>
-      <p:sp>
-        <p:nvSpPr>
-          <p:cNvPr id="19" name="Textfeld 18">
-            <a:extLst>
-              <a:ext uri="{FF2B5EF4-FFF2-40B4-BE49-F238E27FC236}">
-                <a16:creationId xmlns:a16="http://schemas.microsoft.com/office/drawing/2014/main" id="{07710FEE-88B4-4333-6207-7A4643F94DEE}"/>
-              </a:ext>
-            </a:extLst>
-          </p:cNvPr>
-          <p:cNvSpPr txBox="1"/>
-          <p:nvPr/>
-        </p:nvSpPr>
-        <p:spPr>
-          <a:xfrm>
-            <a:off x="775854" y="318886"/>
-            <a:ext cx="6991928" cy="584775"/>
-          </a:xfrm>
-          <a:prstGeom prst="rect">
-            <a:avLst/>
-          </a:prstGeom>
-          <a:noFill/>
-        </p:spPr>
-        <p:txBody>
-          <a:bodyPr wrap="square" rtlCol="0">
-            <a:spAutoFit/>
-          </a:bodyPr>
-          <a:lstStyle/>
-          <a:p>
-            <a:r>
-              <a:rPr lang="de-DE" sz="3200" dirty="0"/>
-              <a:t>Übersicht Verpackungslinie (Packline)</a:t>
-            </a:r>
-          </a:p>
-        </p:txBody>
-      </p:sp>
-      <p:sp>
-        <p:nvSpPr>
-          <p:cNvPr id="2" name="Textfeld 1">
-            <a:extLst>
-              <a:ext uri="{FF2B5EF4-FFF2-40B4-BE49-F238E27FC236}">
-                <a16:creationId xmlns:a16="http://schemas.microsoft.com/office/drawing/2014/main" id="{B7CA28B9-E4FC-5EA9-BA7B-58476E87FC99}"/>
-              </a:ext>
-            </a:extLst>
-          </p:cNvPr>
-          <p:cNvSpPr txBox="1"/>
-          <p:nvPr/>
-        </p:nvSpPr>
-        <p:spPr>
-          <a:xfrm>
-            <a:off x="9376912" y="241941"/>
-            <a:ext cx="2544565" cy="369332"/>
-          </a:xfrm>
-          <a:prstGeom prst="rect">
-            <a:avLst/>
-          </a:prstGeom>
-          <a:noFill/>
-        </p:spPr>
-        <p:txBody>
-          <a:bodyPr wrap="square" rtlCol="0">
-            <a:spAutoFit/>
-          </a:bodyPr>
-          <a:lstStyle/>
-          <a:p>
-            <a:pPr algn="r"/>
             <a:r>
               <a:rPr lang="de-DE" dirty="0">
                 <a:solidFill>
@@ -3703,7 +3369,422 @@
                   <a:srgbClr val="000080"/>
                 </a:highlight>
               </a:rPr>
-              <a:t>Machine-Log-Navigator</a:t>
+              <a:t>Abschlussprojekt :</a:t>
+            </a:r>
+            <a:r>
+              <a:rPr lang="de-DE" dirty="0" err="1">
+                <a:solidFill>
+                  <a:schemeClr val="bg1"/>
+                </a:solidFill>
+                <a:highlight>
+                  <a:srgbClr val="000080"/>
+                </a:highlight>
+              </a:rPr>
+              <a:t>Machine</a:t>
+            </a:r>
+            <a:r>
+              <a:rPr lang="de-DE" dirty="0">
+                <a:solidFill>
+                  <a:schemeClr val="bg1"/>
+                </a:solidFill>
+                <a:highlight>
+                  <a:srgbClr val="000080"/>
+                </a:highlight>
+              </a:rPr>
+              <a:t>-Log-Navigator</a:t>
+            </a:r>
+          </a:p>
+        </p:txBody>
+      </p:sp>
+      <p:sp>
+        <p:nvSpPr>
+          <p:cNvPr id="6" name="Titel 1">
+            <a:extLst>
+              <a:ext uri="{FF2B5EF4-FFF2-40B4-BE49-F238E27FC236}">
+                <a16:creationId xmlns:a16="http://schemas.microsoft.com/office/drawing/2014/main" id="{D45C41D8-6AC7-BBCD-7C37-953E44238EEB}"/>
+              </a:ext>
+            </a:extLst>
+          </p:cNvPr>
+          <p:cNvSpPr txBox="1">
+            <a:spLocks/>
+          </p:cNvSpPr>
+          <p:nvPr/>
+        </p:nvSpPr>
+        <p:spPr>
+          <a:xfrm>
+            <a:off x="1166722" y="1518251"/>
+            <a:ext cx="2887200" cy="828220"/>
+          </a:xfrm>
+          <a:prstGeom prst="rect">
+            <a:avLst/>
+          </a:prstGeom>
+        </p:spPr>
+        <p:txBody>
+          <a:bodyPr vert="horz" lIns="91440" tIns="45720" rIns="91440" bIns="45720" rtlCol="0" anchor="b">
+            <a:noAutofit/>
+          </a:bodyPr>
+          <a:lstStyle>
+            <a:lvl1pPr algn="ctr" defTabSz="914400" rtl="0" eaLnBrk="1" latinLnBrk="0" hangingPunct="1">
+              <a:lnSpc>
+                <a:spcPct val="90000"/>
+              </a:lnSpc>
+              <a:spcBef>
+                <a:spcPct val="0"/>
+              </a:spcBef>
+              <a:buNone/>
+              <a:defRPr sz="6000" kern="1200">
+                <a:solidFill>
+                  <a:schemeClr val="tx1"/>
+                </a:solidFill>
+                <a:latin typeface="+mj-lt"/>
+                <a:ea typeface="+mj-ea"/>
+                <a:cs typeface="+mj-cs"/>
+              </a:defRPr>
+            </a:lvl1pPr>
+          </a:lstStyle>
+          <a:p>
+            <a:pPr algn="l"/>
+            <a:r>
+              <a:rPr lang="de-DE" sz="3600" b="1" u="sng" dirty="0"/>
+              <a:t>Projekt-Ziel</a:t>
+            </a:r>
+          </a:p>
+        </p:txBody>
+      </p:sp>
+      <p:sp>
+        <p:nvSpPr>
+          <p:cNvPr id="9" name="Textfeld 8">
+            <a:extLst>
+              <a:ext uri="{FF2B5EF4-FFF2-40B4-BE49-F238E27FC236}">
+                <a16:creationId xmlns:a16="http://schemas.microsoft.com/office/drawing/2014/main" id="{38F5A2E4-2576-3FC1-B559-62A766EEE8C6}"/>
+              </a:ext>
+            </a:extLst>
+          </p:cNvPr>
+          <p:cNvSpPr txBox="1"/>
+          <p:nvPr/>
+        </p:nvSpPr>
+        <p:spPr>
+          <a:xfrm>
+            <a:off x="1321998" y="2944252"/>
+            <a:ext cx="10211519" cy="969496"/>
+          </a:xfrm>
+          <a:prstGeom prst="rect">
+            <a:avLst/>
+          </a:prstGeom>
+          <a:noFill/>
+        </p:spPr>
+        <p:txBody>
+          <a:bodyPr wrap="square">
+            <a:spAutoFit/>
+          </a:bodyPr>
+          <a:lstStyle/>
+          <a:p>
+            <a:r>
+              <a:rPr lang="de-DE" sz="1600" dirty="0">
+                <a:solidFill>
+                  <a:schemeClr val="tx2">
+                    <a:lumMod val="75000"/>
+                    <a:lumOff val="25000"/>
+                  </a:schemeClr>
+                </a:solidFill>
+              </a:rPr>
+              <a:t>Ein</a:t>
+            </a:r>
+            <a:r>
+              <a:rPr lang="de-DE" sz="1600" b="1" dirty="0">
+                <a:solidFill>
+                  <a:schemeClr val="tx2">
+                    <a:lumMod val="75000"/>
+                    <a:lumOff val="25000"/>
+                  </a:schemeClr>
+                </a:solidFill>
+              </a:rPr>
+              <a:t> </a:t>
+            </a:r>
+            <a:r>
+              <a:rPr lang="de-DE" sz="1600" b="1" u="sng" dirty="0">
+                <a:solidFill>
+                  <a:schemeClr val="accent6">
+                    <a:lumMod val="75000"/>
+                  </a:schemeClr>
+                </a:solidFill>
+              </a:rPr>
+              <a:t>Web-Portal</a:t>
+            </a:r>
+            <a:r>
+              <a:rPr lang="de-DE" sz="1600" b="1" dirty="0">
+                <a:solidFill>
+                  <a:schemeClr val="tx2">
+                    <a:lumMod val="75000"/>
+                    <a:lumOff val="25000"/>
+                  </a:schemeClr>
+                </a:solidFill>
+              </a:rPr>
+              <a:t> </a:t>
+            </a:r>
+            <a:r>
+              <a:rPr lang="de-DE" sz="1600" dirty="0">
+                <a:solidFill>
+                  <a:schemeClr val="tx2">
+                    <a:lumMod val="75000"/>
+                    <a:lumOff val="25000"/>
+                  </a:schemeClr>
+                </a:solidFill>
+              </a:rPr>
+              <a:t>für</a:t>
+            </a:r>
+            <a:r>
+              <a:rPr lang="de-DE" sz="1600" b="1" dirty="0">
+                <a:solidFill>
+                  <a:schemeClr val="tx2">
+                    <a:lumMod val="75000"/>
+                    <a:lumOff val="25000"/>
+                  </a:schemeClr>
+                </a:solidFill>
+              </a:rPr>
+              <a:t> </a:t>
+            </a:r>
+            <a:r>
+              <a:rPr lang="de-DE" sz="1600" b="1" dirty="0">
+                <a:solidFill>
+                  <a:schemeClr val="accent6">
+                    <a:lumMod val="75000"/>
+                  </a:schemeClr>
+                </a:solidFill>
+              </a:rPr>
+              <a:t>Logdaten-Uploads</a:t>
+            </a:r>
+            <a:r>
+              <a:rPr lang="de-DE" sz="1600" b="1" dirty="0">
+                <a:solidFill>
+                  <a:schemeClr val="tx2">
+                    <a:lumMod val="75000"/>
+                    <a:lumOff val="25000"/>
+                  </a:schemeClr>
+                </a:solidFill>
+              </a:rPr>
+              <a:t> + </a:t>
+            </a:r>
+            <a:r>
+              <a:rPr lang="de-DE" sz="1600" b="1" dirty="0">
+                <a:solidFill>
+                  <a:schemeClr val="accent6">
+                    <a:lumMod val="75000"/>
+                  </a:schemeClr>
+                </a:solidFill>
+              </a:rPr>
+              <a:t>Dashboard</a:t>
+            </a:r>
+            <a:r>
+              <a:rPr lang="de-DE" sz="1600" b="1" dirty="0">
+                <a:solidFill>
+                  <a:srgbClr val="00B050"/>
+                </a:solidFill>
+              </a:rPr>
+              <a:t> </a:t>
+            </a:r>
+            <a:r>
+              <a:rPr lang="de-DE" sz="1600" dirty="0">
+                <a:solidFill>
+                  <a:schemeClr val="tx2">
+                    <a:lumMod val="75000"/>
+                    <a:lumOff val="25000"/>
+                  </a:schemeClr>
+                </a:solidFill>
+              </a:rPr>
+              <a:t>einer</a:t>
+            </a:r>
+            <a:r>
+              <a:rPr lang="de-DE" sz="1600" b="1" dirty="0">
+                <a:solidFill>
+                  <a:srgbClr val="00B050"/>
+                </a:solidFill>
+              </a:rPr>
+              <a:t> </a:t>
+            </a:r>
+            <a:r>
+              <a:rPr lang="de-DE" sz="1600" b="1" dirty="0">
+                <a:solidFill>
+                  <a:schemeClr val="accent6">
+                    <a:lumMod val="75000"/>
+                  </a:schemeClr>
+                </a:solidFill>
+              </a:rPr>
+              <a:t>Paket-Label-Maschine </a:t>
+            </a:r>
+            <a:r>
+              <a:rPr lang="de-DE" sz="1600" dirty="0">
+                <a:solidFill>
+                  <a:schemeClr val="tx2">
+                    <a:lumMod val="75000"/>
+                    <a:lumOff val="25000"/>
+                  </a:schemeClr>
+                </a:solidFill>
+              </a:rPr>
+              <a:t>aus der </a:t>
+            </a:r>
+            <a:r>
+              <a:rPr lang="de-DE" sz="1600" b="1" dirty="0">
+                <a:solidFill>
+                  <a:schemeClr val="accent6">
+                    <a:lumMod val="75000"/>
+                  </a:schemeClr>
+                </a:solidFill>
+              </a:rPr>
+              <a:t>Logistik</a:t>
+            </a:r>
+          </a:p>
+          <a:p>
+            <a:endParaRPr lang="de-DE" sz="500" b="1" dirty="0">
+              <a:solidFill>
+                <a:schemeClr val="tx2">
+                  <a:lumMod val="75000"/>
+                  <a:lumOff val="25000"/>
+                </a:schemeClr>
+              </a:solidFill>
+            </a:endParaRPr>
+          </a:p>
+          <a:p>
+            <a:r>
+              <a:rPr lang="de-DE" sz="1200" dirty="0">
+                <a:solidFill>
+                  <a:schemeClr val="tx2">
+                    <a:lumMod val="75000"/>
+                    <a:lumOff val="25000"/>
+                  </a:schemeClr>
+                </a:solidFill>
+              </a:rPr>
+              <a:t>1) Anzeigen von </a:t>
+            </a:r>
+            <a:r>
+              <a:rPr lang="de-DE" sz="1200" b="1" dirty="0"/>
+              <a:t>Statistiken</a:t>
+            </a:r>
+            <a:r>
+              <a:rPr lang="de-DE" sz="1200" dirty="0">
+                <a:solidFill>
+                  <a:schemeClr val="tx2">
+                    <a:lumMod val="75000"/>
+                    <a:lumOff val="25000"/>
+                  </a:schemeClr>
+                </a:solidFill>
+              </a:rPr>
+              <a:t> und </a:t>
+            </a:r>
+            <a:r>
+              <a:rPr lang="de-DE" sz="1200" b="1" dirty="0"/>
+              <a:t>Auffälligkeiten</a:t>
+            </a:r>
+            <a:r>
+              <a:rPr lang="de-DE" sz="1200" dirty="0">
+                <a:solidFill>
+                  <a:schemeClr val="tx2">
+                    <a:lumMod val="75000"/>
+                    <a:lumOff val="25000"/>
+                  </a:schemeClr>
+                </a:solidFill>
+              </a:rPr>
+              <a:t> aus dem log-upload zum Verhalten von Versand-Label-Maschinen  </a:t>
+            </a:r>
+            <a:r>
+              <a:rPr lang="de-DE" sz="1200" b="1" dirty="0"/>
+              <a:t>(Maschinenbau → Logistik)</a:t>
+            </a:r>
+          </a:p>
+          <a:p>
+            <a:r>
+              <a:rPr lang="de-DE" sz="1200" dirty="0">
+                <a:solidFill>
+                  <a:schemeClr val="tx2">
+                    <a:lumMod val="75000"/>
+                    <a:lumOff val="25000"/>
+                  </a:schemeClr>
+                </a:solidFill>
+              </a:rPr>
+              <a:t>2) Bereitstellen normalisierter Daten zum Download zur </a:t>
+            </a:r>
+            <a:r>
+              <a:rPr lang="de-DE" sz="1200" b="1" dirty="0"/>
+              <a:t>Daten-Transparenz</a:t>
+            </a:r>
+            <a:r>
+              <a:rPr lang="de-DE" sz="1200" dirty="0">
+                <a:solidFill>
+                  <a:schemeClr val="tx2">
+                    <a:lumMod val="75000"/>
+                    <a:lumOff val="25000"/>
+                  </a:schemeClr>
+                </a:solidFill>
+              </a:rPr>
+              <a:t> zur Nachvollziehbarkeit für Softwareentwickler &amp; Produktionsleiter</a:t>
+            </a:r>
+          </a:p>
+          <a:p>
+            <a:r>
+              <a:rPr lang="de-DE" sz="1200" dirty="0">
+                <a:solidFill>
+                  <a:schemeClr val="tx2">
+                    <a:lumMod val="75000"/>
+                    <a:lumOff val="25000"/>
+                  </a:schemeClr>
+                </a:solidFill>
+              </a:rPr>
+              <a:t>3) </a:t>
+            </a:r>
+            <a:r>
+              <a:rPr lang="de-DE" sz="1200" b="1" dirty="0"/>
+              <a:t>Algorithmus</a:t>
+            </a:r>
+            <a:r>
+              <a:rPr lang="de-DE" sz="1200" dirty="0">
+                <a:solidFill>
+                  <a:schemeClr val="tx2">
+                    <a:lumMod val="75000"/>
+                    <a:lumOff val="25000"/>
+                  </a:schemeClr>
+                </a:solidFill>
+              </a:rPr>
+              <a:t> entwickeln/bereitstellen zur Performance-Optimierung der Maschine zwecks Steigerung der QA-Produktivität (Kosteneinsparung) </a:t>
+            </a:r>
+          </a:p>
+        </p:txBody>
+      </p:sp>
+      <p:sp>
+        <p:nvSpPr>
+          <p:cNvPr id="10" name="Textfeld 9">
+            <a:extLst>
+              <a:ext uri="{FF2B5EF4-FFF2-40B4-BE49-F238E27FC236}">
+                <a16:creationId xmlns:a16="http://schemas.microsoft.com/office/drawing/2014/main" id="{F916F535-508F-940F-8F39-451F1915FFA3}"/>
+              </a:ext>
+            </a:extLst>
+          </p:cNvPr>
+          <p:cNvSpPr txBox="1"/>
+          <p:nvPr/>
+        </p:nvSpPr>
+        <p:spPr>
+          <a:xfrm>
+            <a:off x="5270740" y="6411218"/>
+            <a:ext cx="6754483" cy="261610"/>
+          </a:xfrm>
+          <a:prstGeom prst="rect">
+            <a:avLst/>
+          </a:prstGeom>
+          <a:noFill/>
+        </p:spPr>
+        <p:txBody>
+          <a:bodyPr wrap="square" rtlCol="0">
+            <a:spAutoFit/>
+          </a:bodyPr>
+          <a:lstStyle/>
+          <a:p>
+            <a:pPr algn="r"/>
+            <a:r>
+              <a:rPr lang="de-DE" sz="1100" b="1" i="1" dirty="0"/>
+              <a:t>DSI - Abschlußprojekt Team:   </a:t>
+            </a:r>
+            <a:r>
+              <a:rPr lang="de-DE" sz="1100" i="1" dirty="0"/>
+              <a:t>Michael Schipper, Mohamad Esber, Marco Michaelis | Date: May 2026</a:t>
             </a:r>
           </a:p>
         </p:txBody>
@@ -3711,7 +3792,7 @@
     </p:spTree>
     <p:extLst>
       <p:ext uri="{BB962C8B-B14F-4D97-AF65-F5344CB8AC3E}">
-        <p14:creationId xmlns:p14="http://schemas.microsoft.com/office/powerpoint/2010/main" val="4243711858"/>
+        <p14:creationId xmlns:p14="http://schemas.microsoft.com/office/powerpoint/2010/main" val="470528211"/>
       </p:ext>
     </p:extLst>
   </p:cSld>
@@ -3743,7 +3824,7 @@
           <p:cNvPr id="4" name="Grafik 3">
             <a:extLst>
               <a:ext uri="{FF2B5EF4-FFF2-40B4-BE49-F238E27FC236}">
-                <a16:creationId xmlns:a16="http://schemas.microsoft.com/office/drawing/2014/main" id="{464354A3-F30D-6D31-5B80-1C77C499A93D}"/>
+                <a16:creationId xmlns:a16="http://schemas.microsoft.com/office/drawing/2014/main" id="{31C63E44-5953-D8FC-961E-EF6989BA043A}"/>
               </a:ext>
             </a:extLst>
           </p:cNvPr>
@@ -3760,209 +3841,20 @@
         </p:blipFill>
         <p:spPr>
           <a:xfrm>
-            <a:off x="556493" y="1127514"/>
-            <a:ext cx="6166883" cy="5304931"/>
+            <a:off x="901405" y="1186259"/>
+            <a:ext cx="7692179" cy="5131415"/>
           </a:xfrm>
           <a:prstGeom prst="rect">
             <a:avLst/>
           </a:prstGeom>
         </p:spPr>
       </p:pic>
-      <p:cxnSp>
-        <p:nvCxnSpPr>
-          <p:cNvPr id="8" name="Gerade Verbindung mit Pfeil 7">
-            <a:extLst>
-              <a:ext uri="{FF2B5EF4-FFF2-40B4-BE49-F238E27FC236}">
-                <a16:creationId xmlns:a16="http://schemas.microsoft.com/office/drawing/2014/main" id="{57546A80-CCB2-F59D-936E-C78EFDF9F3DE}"/>
-              </a:ext>
-            </a:extLst>
-          </p:cNvPr>
-          <p:cNvCxnSpPr/>
-          <p:nvPr/>
-        </p:nvCxnSpPr>
-        <p:spPr>
-          <a:xfrm flipH="1" flipV="1">
-            <a:off x="3769243" y="2096653"/>
-            <a:ext cx="3869230" cy="83127"/>
-          </a:xfrm>
-          <a:prstGeom prst="straightConnector1">
-            <a:avLst/>
-          </a:prstGeom>
-          <a:ln w="25400">
-            <a:solidFill>
-              <a:srgbClr val="00FF00"/>
-            </a:solidFill>
-            <a:tailEnd type="triangle"/>
-          </a:ln>
-        </p:spPr>
-        <p:style>
-          <a:lnRef idx="2">
-            <a:schemeClr val="accent1"/>
-          </a:lnRef>
-          <a:fillRef idx="0">
-            <a:schemeClr val="accent1"/>
-          </a:fillRef>
-          <a:effectRef idx="1">
-            <a:schemeClr val="accent1"/>
-          </a:effectRef>
-          <a:fontRef idx="minor">
-            <a:schemeClr val="tx1"/>
-          </a:fontRef>
-        </p:style>
-      </p:cxnSp>
-      <p:sp>
-        <p:nvSpPr>
-          <p:cNvPr id="9" name="Textfeld 8">
-            <a:extLst>
-              <a:ext uri="{FF2B5EF4-FFF2-40B4-BE49-F238E27FC236}">
-                <a16:creationId xmlns:a16="http://schemas.microsoft.com/office/drawing/2014/main" id="{7C1EE129-93CD-E5BC-6160-04CCAFF97DCE}"/>
-              </a:ext>
-            </a:extLst>
-          </p:cNvPr>
-          <p:cNvSpPr txBox="1"/>
-          <p:nvPr/>
-        </p:nvSpPr>
-        <p:spPr>
-          <a:xfrm>
-            <a:off x="7599217" y="1995114"/>
-            <a:ext cx="2660073" cy="369332"/>
-          </a:xfrm>
-          <a:prstGeom prst="rect">
-            <a:avLst/>
-          </a:prstGeom>
-          <a:noFill/>
-        </p:spPr>
-        <p:txBody>
-          <a:bodyPr wrap="square" rtlCol="0">
-            <a:spAutoFit/>
-          </a:bodyPr>
-          <a:lstStyle/>
-          <a:p>
-            <a:r>
-              <a:rPr lang="de-DE" dirty="0"/>
-              <a:t>Kunden-Bestellbarcode</a:t>
-            </a:r>
-          </a:p>
-        </p:txBody>
-      </p:sp>
-      <p:cxnSp>
-        <p:nvCxnSpPr>
-          <p:cNvPr id="10" name="Gerade Verbindung mit Pfeil 9">
-            <a:extLst>
-              <a:ext uri="{FF2B5EF4-FFF2-40B4-BE49-F238E27FC236}">
-                <a16:creationId xmlns:a16="http://schemas.microsoft.com/office/drawing/2014/main" id="{ADD07494-B574-58D9-3F54-D1DE94135DBB}"/>
-              </a:ext>
-            </a:extLst>
-          </p:cNvPr>
-          <p:cNvCxnSpPr/>
-          <p:nvPr/>
-        </p:nvCxnSpPr>
-        <p:spPr>
-          <a:xfrm flipH="1" flipV="1">
-            <a:off x="3921643" y="4087089"/>
-            <a:ext cx="3869230" cy="83127"/>
-          </a:xfrm>
-          <a:prstGeom prst="straightConnector1">
-            <a:avLst/>
-          </a:prstGeom>
-          <a:ln w="25400">
-            <a:solidFill>
-              <a:srgbClr val="00FF00"/>
-            </a:solidFill>
-            <a:tailEnd type="triangle"/>
-          </a:ln>
-        </p:spPr>
-        <p:style>
-          <a:lnRef idx="2">
-            <a:schemeClr val="accent1"/>
-          </a:lnRef>
-          <a:fillRef idx="0">
-            <a:schemeClr val="accent1"/>
-          </a:fillRef>
-          <a:effectRef idx="1">
-            <a:schemeClr val="accent1"/>
-          </a:effectRef>
-          <a:fontRef idx="minor">
-            <a:schemeClr val="tx1"/>
-          </a:fontRef>
-        </p:style>
-      </p:cxnSp>
-      <p:sp>
-        <p:nvSpPr>
-          <p:cNvPr id="11" name="Textfeld 10">
-            <a:extLst>
-              <a:ext uri="{FF2B5EF4-FFF2-40B4-BE49-F238E27FC236}">
-                <a16:creationId xmlns:a16="http://schemas.microsoft.com/office/drawing/2014/main" id="{5A5229D4-CEEC-C6C5-BC3E-3B6A9A5026C7}"/>
-              </a:ext>
-            </a:extLst>
-          </p:cNvPr>
-          <p:cNvSpPr txBox="1"/>
-          <p:nvPr/>
-        </p:nvSpPr>
-        <p:spPr>
-          <a:xfrm>
-            <a:off x="7726221" y="3985550"/>
-            <a:ext cx="2660073" cy="369332"/>
-          </a:xfrm>
-          <a:prstGeom prst="rect">
-            <a:avLst/>
-          </a:prstGeom>
-          <a:noFill/>
-        </p:spPr>
-        <p:txBody>
-          <a:bodyPr wrap="square" rtlCol="0">
-            <a:spAutoFit/>
-          </a:bodyPr>
-          <a:lstStyle/>
-          <a:p>
-            <a:r>
-              <a:rPr lang="de-DE" dirty="0"/>
-              <a:t>Boxbarcode</a:t>
-            </a:r>
-          </a:p>
-        </p:txBody>
-      </p:sp>
-      <p:sp>
-        <p:nvSpPr>
-          <p:cNvPr id="12" name="Textfeld 11">
-            <a:extLst>
-              <a:ext uri="{FF2B5EF4-FFF2-40B4-BE49-F238E27FC236}">
-                <a16:creationId xmlns:a16="http://schemas.microsoft.com/office/drawing/2014/main" id="{744227DD-ECFA-969F-B79C-E8A29D5BAA5F}"/>
-              </a:ext>
-            </a:extLst>
-          </p:cNvPr>
-          <p:cNvSpPr txBox="1"/>
-          <p:nvPr/>
-        </p:nvSpPr>
-        <p:spPr>
-          <a:xfrm>
-            <a:off x="6998858" y="6030105"/>
-            <a:ext cx="3468252" cy="369332"/>
-          </a:xfrm>
-          <a:prstGeom prst="rect">
-            <a:avLst/>
-          </a:prstGeom>
-          <a:noFill/>
-        </p:spPr>
-        <p:txBody>
-          <a:bodyPr wrap="square" rtlCol="0">
-            <a:spAutoFit/>
-          </a:bodyPr>
-          <a:lstStyle/>
-          <a:p>
-            <a:r>
-              <a:rPr lang="de-DE" dirty="0"/>
-              <a:t>Paket läuft zur Label-Maschine</a:t>
-            </a:r>
-          </a:p>
-        </p:txBody>
-      </p:sp>
-      <p:sp>
-        <p:nvSpPr>
-          <p:cNvPr id="14" name="Pfeil: nach rechts 13">
-            <a:extLst>
-              <a:ext uri="{FF2B5EF4-FFF2-40B4-BE49-F238E27FC236}">
-                <a16:creationId xmlns:a16="http://schemas.microsoft.com/office/drawing/2014/main" id="{389C4549-1355-5FF9-F5C7-20D317E63D21}"/>
+      <p:sp>
+        <p:nvSpPr>
+          <p:cNvPr id="7" name="Pfeil: gestreift nach rechts 6">
+            <a:extLst>
+              <a:ext uri="{FF2B5EF4-FFF2-40B4-BE49-F238E27FC236}">
+                <a16:creationId xmlns:a16="http://schemas.microsoft.com/office/drawing/2014/main" id="{5C0EED9F-B41C-DDFF-D389-17FF62A130FC}"/>
               </a:ext>
             </a:extLst>
           </p:cNvPr>
@@ -3970,13 +3862,16 @@
           <p:nvPr/>
         </p:nvSpPr>
         <p:spPr>
-          <a:xfrm>
-            <a:off x="10386294" y="6030105"/>
-            <a:ext cx="570345" cy="402340"/>
-          </a:xfrm>
-          <a:prstGeom prst="rightArrow">
-            <a:avLst/>
-          </a:prstGeom>
+          <a:xfrm rot="17936506">
+            <a:off x="2423120" y="2880661"/>
+            <a:ext cx="2986510" cy="688109"/>
+          </a:xfrm>
+          <a:prstGeom prst="stripedRightArrow">
+            <a:avLst/>
+          </a:prstGeom>
+          <a:solidFill>
+            <a:srgbClr val="00FF00"/>
+          </a:solidFill>
         </p:spPr>
         <p:style>
           <a:lnRef idx="2">
@@ -3999,145 +3894,25 @@
           <a:lstStyle/>
           <a:p>
             <a:pPr algn="ctr"/>
-            <a:endParaRPr lang="de-DE"/>
-          </a:p>
-        </p:txBody>
-      </p:sp>
-      <p:sp>
-        <p:nvSpPr>
-          <p:cNvPr id="15" name="Textfeld 14">
-            <a:extLst>
-              <a:ext uri="{FF2B5EF4-FFF2-40B4-BE49-F238E27FC236}">
-                <a16:creationId xmlns:a16="http://schemas.microsoft.com/office/drawing/2014/main" id="{803BF5DF-4BE3-25F7-3C13-44828FEC3CCA}"/>
-              </a:ext>
-            </a:extLst>
-          </p:cNvPr>
-          <p:cNvSpPr txBox="1"/>
-          <p:nvPr/>
-        </p:nvSpPr>
-        <p:spPr>
-          <a:xfrm>
-            <a:off x="556493" y="350557"/>
-            <a:ext cx="4567993" cy="584775"/>
-          </a:xfrm>
-          <a:prstGeom prst="rect">
-            <a:avLst/>
-          </a:prstGeom>
-          <a:noFill/>
-        </p:spPr>
-        <p:txBody>
-          <a:bodyPr wrap="square" rtlCol="0">
-            <a:spAutoFit/>
-          </a:bodyPr>
-          <a:lstStyle/>
-          <a:p>
-            <a:r>
-              <a:rPr lang="de-DE" sz="3200" dirty="0"/>
-              <a:t>Mitarbeiter (Workstation)</a:t>
-            </a:r>
-          </a:p>
-        </p:txBody>
-      </p:sp>
-      <p:sp>
-        <p:nvSpPr>
-          <p:cNvPr id="16" name="Textfeld 15">
-            <a:extLst>
-              <a:ext uri="{FF2B5EF4-FFF2-40B4-BE49-F238E27FC236}">
-                <a16:creationId xmlns:a16="http://schemas.microsoft.com/office/drawing/2014/main" id="{C22334A7-06CC-C3D6-DB63-B01303423293}"/>
-              </a:ext>
-            </a:extLst>
-          </p:cNvPr>
-          <p:cNvSpPr txBox="1"/>
-          <p:nvPr/>
-        </p:nvSpPr>
-        <p:spPr>
-          <a:xfrm>
-            <a:off x="5016915" y="422432"/>
-            <a:ext cx="3035301" cy="461665"/>
-          </a:xfrm>
-          <a:prstGeom prst="rect">
-            <a:avLst/>
-          </a:prstGeom>
-          <a:noFill/>
-        </p:spPr>
-        <p:txBody>
-          <a:bodyPr wrap="square" rtlCol="0">
-            <a:spAutoFit/>
-          </a:bodyPr>
-          <a:lstStyle/>
-          <a:p>
-            <a:r>
-              <a:rPr lang="de-DE" sz="1200" dirty="0"/>
-              <a:t>Kundenbestellung verpacken</a:t>
-            </a:r>
-          </a:p>
-          <a:p>
-            <a:r>
-              <a:rPr lang="de-DE" sz="1200" dirty="0"/>
-              <a:t>Bestell-Barcode aufkleben</a:t>
-            </a:r>
-          </a:p>
-        </p:txBody>
-      </p:sp>
-      <p:sp>
-        <p:nvSpPr>
-          <p:cNvPr id="17" name="Rechteck 16">
-            <a:extLst>
-              <a:ext uri="{FF2B5EF4-FFF2-40B4-BE49-F238E27FC236}">
-                <a16:creationId xmlns:a16="http://schemas.microsoft.com/office/drawing/2014/main" id="{C1A26954-8CAB-FB89-5F2E-DA5640F12172}"/>
-              </a:ext>
-            </a:extLst>
-          </p:cNvPr>
-          <p:cNvSpPr/>
-          <p:nvPr/>
-        </p:nvSpPr>
-        <p:spPr>
-          <a:xfrm rot="2427125">
-            <a:off x="2380907" y="3037014"/>
-            <a:ext cx="501857" cy="302251"/>
-          </a:xfrm>
-          <a:prstGeom prst="rect">
-            <a:avLst/>
-          </a:prstGeom>
-          <a:noFill/>
-          <a:ln w="9525">
-            <a:solidFill>
-              <a:schemeClr val="bg1"/>
-            </a:solidFill>
-            <a:prstDash val="dash"/>
-          </a:ln>
-        </p:spPr>
-        <p:style>
-          <a:lnRef idx="2">
-            <a:schemeClr val="accent1">
-              <a:shade val="15000"/>
-            </a:schemeClr>
-          </a:lnRef>
-          <a:fillRef idx="1">
-            <a:schemeClr val="accent1"/>
-          </a:fillRef>
-          <a:effectRef idx="0">
-            <a:schemeClr val="accent1"/>
-          </a:effectRef>
-          <a:fontRef idx="minor">
-            <a:schemeClr val="lt1"/>
-          </a:fontRef>
-        </p:style>
-        <p:txBody>
-          <a:bodyPr rtlCol="0" anchor="ctr"/>
-          <a:lstStyle/>
-          <a:p>
-            <a:pPr algn="ctr"/>
-            <a:endParaRPr lang="de-DE"/>
+            <a:r>
+              <a:rPr lang="de-DE" dirty="0">
+                <a:sym typeface="Wingdings" panose="05000000000000000000" pitchFamily="2" charset="2"/>
+              </a:rPr>
+              <a:t>  </a:t>
+            </a:r>
+            <a:r>
+              <a:rPr lang="de-DE" dirty="0"/>
+              <a:t>Laufrichtung</a:t>
+            </a:r>
           </a:p>
         </p:txBody>
       </p:sp>
       <p:cxnSp>
         <p:nvCxnSpPr>
-          <p:cNvPr id="18" name="Gerade Verbindung mit Pfeil 17">
-            <a:extLst>
-              <a:ext uri="{FF2B5EF4-FFF2-40B4-BE49-F238E27FC236}">
-                <a16:creationId xmlns:a16="http://schemas.microsoft.com/office/drawing/2014/main" id="{8120EC2F-9554-17B8-9243-4CD5B2F9C1BA}"/>
+          <p:cNvPr id="3" name="Gerade Verbindung mit Pfeil 2">
+            <a:extLst>
+              <a:ext uri="{FF2B5EF4-FFF2-40B4-BE49-F238E27FC236}">
+                <a16:creationId xmlns:a16="http://schemas.microsoft.com/office/drawing/2014/main" id="{730AB657-91F1-8371-8503-6C930BD54561}"/>
               </a:ext>
             </a:extLst>
           </p:cNvPr>
@@ -4147,9 +3922,9 @@
           <p:nvPr/>
         </p:nvCxnSpPr>
         <p:spPr>
-          <a:xfrm flipH="1">
-            <a:off x="2613891" y="2533270"/>
-            <a:ext cx="794327" cy="615649"/>
+          <a:xfrm flipH="1" flipV="1">
+            <a:off x="6313000" y="1884218"/>
+            <a:ext cx="2720164" cy="674255"/>
           </a:xfrm>
           <a:prstGeom prst="straightConnector1">
             <a:avLst/>
@@ -4178,10 +3953,212 @@
       </p:cxnSp>
       <p:sp>
         <p:nvSpPr>
+          <p:cNvPr id="5" name="Textfeld 4">
+            <a:extLst>
+              <a:ext uri="{FF2B5EF4-FFF2-40B4-BE49-F238E27FC236}">
+                <a16:creationId xmlns:a16="http://schemas.microsoft.com/office/drawing/2014/main" id="{92B1C0A0-136E-30AD-86E5-DECB4B11805A}"/>
+              </a:ext>
+            </a:extLst>
+          </p:cNvPr>
+          <p:cNvSpPr txBox="1"/>
+          <p:nvPr/>
+        </p:nvSpPr>
+        <p:spPr>
+          <a:xfrm>
+            <a:off x="9014376" y="2532595"/>
+            <a:ext cx="1732657" cy="369332"/>
+          </a:xfrm>
+          <a:prstGeom prst="rect">
+            <a:avLst/>
+          </a:prstGeom>
+          <a:noFill/>
+        </p:spPr>
+        <p:txBody>
+          <a:bodyPr wrap="square" rtlCol="0">
+            <a:spAutoFit/>
+          </a:bodyPr>
+          <a:lstStyle/>
+          <a:p>
+            <a:r>
+              <a:rPr lang="de-DE" dirty="0"/>
+              <a:t>Workstations</a:t>
+            </a:r>
+          </a:p>
+        </p:txBody>
+      </p:sp>
+      <p:cxnSp>
+        <p:nvCxnSpPr>
+          <p:cNvPr id="8" name="Gerade Verbindung mit Pfeil 7">
+            <a:extLst>
+              <a:ext uri="{FF2B5EF4-FFF2-40B4-BE49-F238E27FC236}">
+                <a16:creationId xmlns:a16="http://schemas.microsoft.com/office/drawing/2014/main" id="{28E7FB33-B4A8-4986-A88A-FCB689430907}"/>
+              </a:ext>
+            </a:extLst>
+          </p:cNvPr>
+          <p:cNvCxnSpPr>
+            <a:cxnSpLocks/>
+          </p:cNvCxnSpPr>
+          <p:nvPr/>
+        </p:nvCxnSpPr>
+        <p:spPr>
+          <a:xfrm flipH="1" flipV="1">
+            <a:off x="6539345" y="2221345"/>
+            <a:ext cx="2493819" cy="429491"/>
+          </a:xfrm>
+          <a:prstGeom prst="straightConnector1">
+            <a:avLst/>
+          </a:prstGeom>
+          <a:ln w="25400">
+            <a:solidFill>
+              <a:srgbClr val="00FF00"/>
+            </a:solidFill>
+            <a:tailEnd type="triangle"/>
+          </a:ln>
+        </p:spPr>
+        <p:style>
+          <a:lnRef idx="2">
+            <a:schemeClr val="accent1"/>
+          </a:lnRef>
+          <a:fillRef idx="0">
+            <a:schemeClr val="accent1"/>
+          </a:fillRef>
+          <a:effectRef idx="1">
+            <a:schemeClr val="accent1"/>
+          </a:effectRef>
+          <a:fontRef idx="minor">
+            <a:schemeClr val="tx1"/>
+          </a:fontRef>
+        </p:style>
+      </p:cxnSp>
+      <p:cxnSp>
+        <p:nvCxnSpPr>
+          <p:cNvPr id="11" name="Gerade Verbindung mit Pfeil 10">
+            <a:extLst>
+              <a:ext uri="{FF2B5EF4-FFF2-40B4-BE49-F238E27FC236}">
+                <a16:creationId xmlns:a16="http://schemas.microsoft.com/office/drawing/2014/main" id="{25B38E49-B6C3-5234-6704-3B4913109E0A}"/>
+              </a:ext>
+            </a:extLst>
+          </p:cNvPr>
+          <p:cNvCxnSpPr>
+            <a:cxnSpLocks/>
+          </p:cNvCxnSpPr>
+          <p:nvPr/>
+        </p:nvCxnSpPr>
+        <p:spPr>
+          <a:xfrm flipH="1" flipV="1">
+            <a:off x="7093527" y="2558473"/>
+            <a:ext cx="1939637" cy="221672"/>
+          </a:xfrm>
+          <a:prstGeom prst="straightConnector1">
+            <a:avLst/>
+          </a:prstGeom>
+          <a:ln w="25400">
+            <a:solidFill>
+              <a:srgbClr val="00FF00"/>
+            </a:solidFill>
+            <a:tailEnd type="triangle"/>
+          </a:ln>
+        </p:spPr>
+        <p:style>
+          <a:lnRef idx="2">
+            <a:schemeClr val="accent1"/>
+          </a:lnRef>
+          <a:fillRef idx="0">
+            <a:schemeClr val="accent1"/>
+          </a:fillRef>
+          <a:effectRef idx="1">
+            <a:schemeClr val="accent1"/>
+          </a:effectRef>
+          <a:fontRef idx="minor">
+            <a:schemeClr val="tx1"/>
+          </a:fontRef>
+        </p:style>
+      </p:cxnSp>
+      <p:cxnSp>
+        <p:nvCxnSpPr>
+          <p:cNvPr id="14" name="Gerade Verbindung mit Pfeil 13">
+            <a:extLst>
+              <a:ext uri="{FF2B5EF4-FFF2-40B4-BE49-F238E27FC236}">
+                <a16:creationId xmlns:a16="http://schemas.microsoft.com/office/drawing/2014/main" id="{9FBDFEBD-1226-F2B0-EA12-738E71827CEE}"/>
+              </a:ext>
+            </a:extLst>
+          </p:cNvPr>
+          <p:cNvCxnSpPr>
+            <a:cxnSpLocks/>
+          </p:cNvCxnSpPr>
+          <p:nvPr/>
+        </p:nvCxnSpPr>
+        <p:spPr>
+          <a:xfrm flipH="1">
+            <a:off x="7767782" y="2858656"/>
+            <a:ext cx="1260599" cy="856366"/>
+          </a:xfrm>
+          <a:prstGeom prst="straightConnector1">
+            <a:avLst/>
+          </a:prstGeom>
+          <a:ln w="25400">
+            <a:solidFill>
+              <a:srgbClr val="00FF00"/>
+            </a:solidFill>
+            <a:tailEnd type="triangle"/>
+          </a:ln>
+        </p:spPr>
+        <p:style>
+          <a:lnRef idx="2">
+            <a:schemeClr val="accent1"/>
+          </a:lnRef>
+          <a:fillRef idx="0">
+            <a:schemeClr val="accent1"/>
+          </a:fillRef>
+          <a:effectRef idx="1">
+            <a:schemeClr val="accent1"/>
+          </a:effectRef>
+          <a:fontRef idx="minor">
+            <a:schemeClr val="tx1"/>
+          </a:fontRef>
+        </p:style>
+      </p:cxnSp>
+      <p:sp>
+        <p:nvSpPr>
+          <p:cNvPr id="19" name="Textfeld 18">
+            <a:extLst>
+              <a:ext uri="{FF2B5EF4-FFF2-40B4-BE49-F238E27FC236}">
+                <a16:creationId xmlns:a16="http://schemas.microsoft.com/office/drawing/2014/main" id="{07710FEE-88B4-4333-6207-7A4643F94DEE}"/>
+              </a:ext>
+            </a:extLst>
+          </p:cNvPr>
+          <p:cNvSpPr txBox="1"/>
+          <p:nvPr/>
+        </p:nvSpPr>
+        <p:spPr>
+          <a:xfrm>
+            <a:off x="775854" y="318886"/>
+            <a:ext cx="6991928" cy="584775"/>
+          </a:xfrm>
+          <a:prstGeom prst="rect">
+            <a:avLst/>
+          </a:prstGeom>
+          <a:noFill/>
+        </p:spPr>
+        <p:txBody>
+          <a:bodyPr wrap="square" rtlCol="0">
+            <a:spAutoFit/>
+          </a:bodyPr>
+          <a:lstStyle/>
+          <a:p>
+            <a:r>
+              <a:rPr lang="de-DE" sz="3200" dirty="0"/>
+              <a:t>Übersicht Verpackungslinie (Packline)</a:t>
+            </a:r>
+          </a:p>
+        </p:txBody>
+      </p:sp>
+      <p:sp>
+        <p:nvSpPr>
           <p:cNvPr id="2" name="Textfeld 1">
             <a:extLst>
               <a:ext uri="{FF2B5EF4-FFF2-40B4-BE49-F238E27FC236}">
-                <a16:creationId xmlns:a16="http://schemas.microsoft.com/office/drawing/2014/main" id="{75B68CFD-AAEE-E951-C47A-0AE1F387903C}"/>
+                <a16:creationId xmlns:a16="http://schemas.microsoft.com/office/drawing/2014/main" id="{B7CA28B9-E4FC-5EA9-BA7B-58476E87FC99}"/>
               </a:ext>
             </a:extLst>
           </p:cNvPr>
@@ -4222,7 +4199,7 @@
     </p:spTree>
     <p:extLst>
       <p:ext uri="{BB962C8B-B14F-4D97-AF65-F5344CB8AC3E}">
-        <p14:creationId xmlns:p14="http://schemas.microsoft.com/office/powerpoint/2010/main" val="334455706"/>
+        <p14:creationId xmlns:p14="http://schemas.microsoft.com/office/powerpoint/2010/main" val="4243711858"/>
       </p:ext>
     </p:extLst>
   </p:cSld>
@@ -4249,52 +4226,12 @@
           <a:chExt cx="0" cy="0"/>
         </a:xfrm>
       </p:grpSpPr>
-      <p:sp>
-        <p:nvSpPr>
-          <p:cNvPr id="32" name="Textfeld 31">
-            <a:extLst>
-              <a:ext uri="{FF2B5EF4-FFF2-40B4-BE49-F238E27FC236}">
-                <a16:creationId xmlns:a16="http://schemas.microsoft.com/office/drawing/2014/main" id="{53C9237C-E628-E692-B363-223E9F868DFD}"/>
-              </a:ext>
-            </a:extLst>
-          </p:cNvPr>
-          <p:cNvSpPr txBox="1"/>
-          <p:nvPr/>
-        </p:nvSpPr>
-        <p:spPr>
-          <a:xfrm>
-            <a:off x="8323707" y="4622748"/>
-            <a:ext cx="3589371" cy="338554"/>
-          </a:xfrm>
-          <a:prstGeom prst="rect">
-            <a:avLst/>
-          </a:prstGeom>
-          <a:noFill/>
-        </p:spPr>
-        <p:txBody>
-          <a:bodyPr wrap="square" rtlCol="0">
-            <a:spAutoFit/>
-          </a:bodyPr>
-          <a:lstStyle/>
-          <a:p>
-            <a:r>
-              <a:rPr lang="de-DE" sz="1600" dirty="0"/>
-              <a:t>Kunden-Adresslabel-</a:t>
-            </a:r>
-            <a:r>
-              <a:rPr lang="de-DE" sz="1600" dirty="0" err="1"/>
-              <a:t>Stickervorgang</a:t>
-            </a:r>
-            <a:endParaRPr lang="de-DE" sz="1600" dirty="0"/>
-          </a:p>
-        </p:txBody>
-      </p:sp>
       <p:pic>
         <p:nvPicPr>
-          <p:cNvPr id="3" name="Grafik 2">
-            <a:extLst>
-              <a:ext uri="{FF2B5EF4-FFF2-40B4-BE49-F238E27FC236}">
-                <a16:creationId xmlns:a16="http://schemas.microsoft.com/office/drawing/2014/main" id="{84F64F6A-8696-4090-4FD8-91B3B13CE560}"/>
+          <p:cNvPr id="4" name="Grafik 3">
+            <a:extLst>
+              <a:ext uri="{FF2B5EF4-FFF2-40B4-BE49-F238E27FC236}">
+                <a16:creationId xmlns:a16="http://schemas.microsoft.com/office/drawing/2014/main" id="{464354A3-F30D-6D31-5B80-1C77C499A93D}"/>
               </a:ext>
             </a:extLst>
           </p:cNvPr>
@@ -4311,20 +4248,209 @@
         </p:blipFill>
         <p:spPr>
           <a:xfrm>
-            <a:off x="542925" y="1486435"/>
-            <a:ext cx="7250122" cy="4856802"/>
+            <a:off x="556493" y="1127514"/>
+            <a:ext cx="6166883" cy="5304931"/>
           </a:xfrm>
           <a:prstGeom prst="rect">
             <a:avLst/>
           </a:prstGeom>
         </p:spPr>
       </p:pic>
-      <p:sp>
-        <p:nvSpPr>
-          <p:cNvPr id="5" name="Pfeil: gestreift nach rechts 4">
-            <a:extLst>
-              <a:ext uri="{FF2B5EF4-FFF2-40B4-BE49-F238E27FC236}">
-                <a16:creationId xmlns:a16="http://schemas.microsoft.com/office/drawing/2014/main" id="{C043DFB5-76FB-393A-58DF-F9D8760F18A6}"/>
+      <p:cxnSp>
+        <p:nvCxnSpPr>
+          <p:cNvPr id="8" name="Gerade Verbindung mit Pfeil 7">
+            <a:extLst>
+              <a:ext uri="{FF2B5EF4-FFF2-40B4-BE49-F238E27FC236}">
+                <a16:creationId xmlns:a16="http://schemas.microsoft.com/office/drawing/2014/main" id="{57546A80-CCB2-F59D-936E-C78EFDF9F3DE}"/>
+              </a:ext>
+            </a:extLst>
+          </p:cNvPr>
+          <p:cNvCxnSpPr/>
+          <p:nvPr/>
+        </p:nvCxnSpPr>
+        <p:spPr>
+          <a:xfrm flipH="1" flipV="1">
+            <a:off x="3769243" y="2096653"/>
+            <a:ext cx="3869230" cy="83127"/>
+          </a:xfrm>
+          <a:prstGeom prst="straightConnector1">
+            <a:avLst/>
+          </a:prstGeom>
+          <a:ln w="25400">
+            <a:solidFill>
+              <a:srgbClr val="00FF00"/>
+            </a:solidFill>
+            <a:tailEnd type="triangle"/>
+          </a:ln>
+        </p:spPr>
+        <p:style>
+          <a:lnRef idx="2">
+            <a:schemeClr val="accent1"/>
+          </a:lnRef>
+          <a:fillRef idx="0">
+            <a:schemeClr val="accent1"/>
+          </a:fillRef>
+          <a:effectRef idx="1">
+            <a:schemeClr val="accent1"/>
+          </a:effectRef>
+          <a:fontRef idx="minor">
+            <a:schemeClr val="tx1"/>
+          </a:fontRef>
+        </p:style>
+      </p:cxnSp>
+      <p:sp>
+        <p:nvSpPr>
+          <p:cNvPr id="9" name="Textfeld 8">
+            <a:extLst>
+              <a:ext uri="{FF2B5EF4-FFF2-40B4-BE49-F238E27FC236}">
+                <a16:creationId xmlns:a16="http://schemas.microsoft.com/office/drawing/2014/main" id="{7C1EE129-93CD-E5BC-6160-04CCAFF97DCE}"/>
+              </a:ext>
+            </a:extLst>
+          </p:cNvPr>
+          <p:cNvSpPr txBox="1"/>
+          <p:nvPr/>
+        </p:nvSpPr>
+        <p:spPr>
+          <a:xfrm>
+            <a:off x="7599217" y="1995114"/>
+            <a:ext cx="2660073" cy="369332"/>
+          </a:xfrm>
+          <a:prstGeom prst="rect">
+            <a:avLst/>
+          </a:prstGeom>
+          <a:noFill/>
+        </p:spPr>
+        <p:txBody>
+          <a:bodyPr wrap="square" rtlCol="0">
+            <a:spAutoFit/>
+          </a:bodyPr>
+          <a:lstStyle/>
+          <a:p>
+            <a:r>
+              <a:rPr lang="de-DE" dirty="0"/>
+              <a:t>Kunden-Bestellbarcode</a:t>
+            </a:r>
+          </a:p>
+        </p:txBody>
+      </p:sp>
+      <p:cxnSp>
+        <p:nvCxnSpPr>
+          <p:cNvPr id="10" name="Gerade Verbindung mit Pfeil 9">
+            <a:extLst>
+              <a:ext uri="{FF2B5EF4-FFF2-40B4-BE49-F238E27FC236}">
+                <a16:creationId xmlns:a16="http://schemas.microsoft.com/office/drawing/2014/main" id="{ADD07494-B574-58D9-3F54-D1DE94135DBB}"/>
+              </a:ext>
+            </a:extLst>
+          </p:cNvPr>
+          <p:cNvCxnSpPr/>
+          <p:nvPr/>
+        </p:nvCxnSpPr>
+        <p:spPr>
+          <a:xfrm flipH="1" flipV="1">
+            <a:off x="3921643" y="4087089"/>
+            <a:ext cx="3869230" cy="83127"/>
+          </a:xfrm>
+          <a:prstGeom prst="straightConnector1">
+            <a:avLst/>
+          </a:prstGeom>
+          <a:ln w="25400">
+            <a:solidFill>
+              <a:srgbClr val="00FF00"/>
+            </a:solidFill>
+            <a:tailEnd type="triangle"/>
+          </a:ln>
+        </p:spPr>
+        <p:style>
+          <a:lnRef idx="2">
+            <a:schemeClr val="accent1"/>
+          </a:lnRef>
+          <a:fillRef idx="0">
+            <a:schemeClr val="accent1"/>
+          </a:fillRef>
+          <a:effectRef idx="1">
+            <a:schemeClr val="accent1"/>
+          </a:effectRef>
+          <a:fontRef idx="minor">
+            <a:schemeClr val="tx1"/>
+          </a:fontRef>
+        </p:style>
+      </p:cxnSp>
+      <p:sp>
+        <p:nvSpPr>
+          <p:cNvPr id="11" name="Textfeld 10">
+            <a:extLst>
+              <a:ext uri="{FF2B5EF4-FFF2-40B4-BE49-F238E27FC236}">
+                <a16:creationId xmlns:a16="http://schemas.microsoft.com/office/drawing/2014/main" id="{5A5229D4-CEEC-C6C5-BC3E-3B6A9A5026C7}"/>
+              </a:ext>
+            </a:extLst>
+          </p:cNvPr>
+          <p:cNvSpPr txBox="1"/>
+          <p:nvPr/>
+        </p:nvSpPr>
+        <p:spPr>
+          <a:xfrm>
+            <a:off x="7726221" y="3985550"/>
+            <a:ext cx="2660073" cy="369332"/>
+          </a:xfrm>
+          <a:prstGeom prst="rect">
+            <a:avLst/>
+          </a:prstGeom>
+          <a:noFill/>
+        </p:spPr>
+        <p:txBody>
+          <a:bodyPr wrap="square" rtlCol="0">
+            <a:spAutoFit/>
+          </a:bodyPr>
+          <a:lstStyle/>
+          <a:p>
+            <a:r>
+              <a:rPr lang="de-DE" dirty="0"/>
+              <a:t>Boxbarcode</a:t>
+            </a:r>
+          </a:p>
+        </p:txBody>
+      </p:sp>
+      <p:sp>
+        <p:nvSpPr>
+          <p:cNvPr id="12" name="Textfeld 11">
+            <a:extLst>
+              <a:ext uri="{FF2B5EF4-FFF2-40B4-BE49-F238E27FC236}">
+                <a16:creationId xmlns:a16="http://schemas.microsoft.com/office/drawing/2014/main" id="{744227DD-ECFA-969F-B79C-E8A29D5BAA5F}"/>
+              </a:ext>
+            </a:extLst>
+          </p:cNvPr>
+          <p:cNvSpPr txBox="1"/>
+          <p:nvPr/>
+        </p:nvSpPr>
+        <p:spPr>
+          <a:xfrm>
+            <a:off x="6998858" y="6030105"/>
+            <a:ext cx="3468252" cy="369332"/>
+          </a:xfrm>
+          <a:prstGeom prst="rect">
+            <a:avLst/>
+          </a:prstGeom>
+          <a:noFill/>
+        </p:spPr>
+        <p:txBody>
+          <a:bodyPr wrap="square" rtlCol="0">
+            <a:spAutoFit/>
+          </a:bodyPr>
+          <a:lstStyle/>
+          <a:p>
+            <a:r>
+              <a:rPr lang="de-DE" dirty="0"/>
+              <a:t>Paket läuft zur Label-Maschine</a:t>
+            </a:r>
+          </a:p>
+        </p:txBody>
+      </p:sp>
+      <p:sp>
+        <p:nvSpPr>
+          <p:cNvPr id="14" name="Pfeil: nach rechts 13">
+            <a:extLst>
+              <a:ext uri="{FF2B5EF4-FFF2-40B4-BE49-F238E27FC236}">
+                <a16:creationId xmlns:a16="http://schemas.microsoft.com/office/drawing/2014/main" id="{389C4549-1355-5FF9-F5C7-20D317E63D21}"/>
               </a:ext>
             </a:extLst>
           </p:cNvPr>
@@ -4332,16 +4458,13 @@
           <p:nvPr/>
         </p:nvSpPr>
         <p:spPr>
-          <a:xfrm rot="19627890" flipH="1">
-            <a:off x="4400940" y="4536078"/>
-            <a:ext cx="3094557" cy="866498"/>
-          </a:xfrm>
-          <a:prstGeom prst="stripedRightArrow">
-            <a:avLst/>
-          </a:prstGeom>
-          <a:solidFill>
-            <a:srgbClr val="00FF00"/>
-          </a:solidFill>
+          <a:xfrm>
+            <a:off x="10386294" y="6030105"/>
+            <a:ext cx="570345" cy="402340"/>
+          </a:xfrm>
+          <a:prstGeom prst="rightArrow">
+            <a:avLst/>
+          </a:prstGeom>
         </p:spPr>
         <p:style>
           <a:lnRef idx="2">
@@ -4364,70 +4487,16 @@
           <a:lstStyle/>
           <a:p>
             <a:pPr algn="ctr"/>
-            <a:r>
-              <a:rPr lang="de-DE" dirty="0"/>
-              <a:t>Laufrichtung  </a:t>
-            </a:r>
-            <a:r>
-              <a:rPr lang="de-DE" dirty="0">
-                <a:sym typeface="Wingdings" panose="05000000000000000000" pitchFamily="2" charset="2"/>
-              </a:rPr>
-              <a:t></a:t>
-            </a:r>
-            <a:endParaRPr lang="de-DE" dirty="0"/>
-          </a:p>
-        </p:txBody>
-      </p:sp>
-      <p:cxnSp>
-        <p:nvCxnSpPr>
-          <p:cNvPr id="8" name="Gerade Verbindung mit Pfeil 7">
-            <a:extLst>
-              <a:ext uri="{FF2B5EF4-FFF2-40B4-BE49-F238E27FC236}">
-                <a16:creationId xmlns:a16="http://schemas.microsoft.com/office/drawing/2014/main" id="{81D0F4A3-E913-88A6-994B-4FEDE7E92C65}"/>
-              </a:ext>
-            </a:extLst>
-          </p:cNvPr>
-          <p:cNvCxnSpPr>
-            <a:cxnSpLocks/>
-          </p:cNvCxnSpPr>
-          <p:nvPr/>
-        </p:nvCxnSpPr>
-        <p:spPr>
-          <a:xfrm flipH="1">
-            <a:off x="7374890" y="1766032"/>
-            <a:ext cx="180456" cy="168211"/>
-          </a:xfrm>
-          <a:prstGeom prst="straightConnector1">
-            <a:avLst/>
-          </a:prstGeom>
-          <a:ln w="25400">
-            <a:solidFill>
-              <a:srgbClr val="00FF00"/>
-            </a:solidFill>
-            <a:tailEnd type="triangle"/>
-          </a:ln>
-        </p:spPr>
-        <p:style>
-          <a:lnRef idx="2">
-            <a:schemeClr val="accent1"/>
-          </a:lnRef>
-          <a:fillRef idx="0">
-            <a:schemeClr val="accent1"/>
-          </a:fillRef>
-          <a:effectRef idx="1">
-            <a:schemeClr val="accent1"/>
-          </a:effectRef>
-          <a:fontRef idx="minor">
-            <a:schemeClr val="tx1"/>
-          </a:fontRef>
-        </p:style>
-      </p:cxnSp>
-      <p:sp>
-        <p:nvSpPr>
-          <p:cNvPr id="9" name="Textfeld 8">
-            <a:extLst>
-              <a:ext uri="{FF2B5EF4-FFF2-40B4-BE49-F238E27FC236}">
-                <a16:creationId xmlns:a16="http://schemas.microsoft.com/office/drawing/2014/main" id="{0F491203-3C4E-9CF4-1799-4409859A4753}"/>
+            <a:endParaRPr lang="de-DE"/>
+          </a:p>
+        </p:txBody>
+      </p:sp>
+      <p:sp>
+        <p:nvSpPr>
+          <p:cNvPr id="15" name="Textfeld 14">
+            <a:extLst>
+              <a:ext uri="{FF2B5EF4-FFF2-40B4-BE49-F238E27FC236}">
+                <a16:creationId xmlns:a16="http://schemas.microsoft.com/office/drawing/2014/main" id="{803BF5DF-4BE3-25F7-3C13-44828FEC3CCA}"/>
               </a:ext>
             </a:extLst>
           </p:cNvPr>
@@ -4436,8 +4505,8 @@
         </p:nvSpPr>
         <p:spPr>
           <a:xfrm>
-            <a:off x="8304712" y="1589979"/>
-            <a:ext cx="2660073" cy="369332"/>
+            <a:off x="556493" y="350557"/>
+            <a:ext cx="4567993" cy="584775"/>
           </a:xfrm>
           <a:prstGeom prst="rect">
             <a:avLst/>
@@ -4451,62 +4520,18 @@
           <a:lstStyle/>
           <a:p>
             <a:r>
-              <a:rPr lang="de-DE" dirty="0"/>
-              <a:t>Barcode-Scanner</a:t>
-            </a:r>
-          </a:p>
-        </p:txBody>
-      </p:sp>
-      <p:cxnSp>
-        <p:nvCxnSpPr>
-          <p:cNvPr id="12" name="Gerade Verbindung mit Pfeil 11">
-            <a:extLst>
-              <a:ext uri="{FF2B5EF4-FFF2-40B4-BE49-F238E27FC236}">
-                <a16:creationId xmlns:a16="http://schemas.microsoft.com/office/drawing/2014/main" id="{A6376D25-DADE-7E65-65E7-B61575EC1C53}"/>
-              </a:ext>
-            </a:extLst>
-          </p:cNvPr>
-          <p:cNvCxnSpPr>
-            <a:cxnSpLocks/>
-          </p:cNvCxnSpPr>
-          <p:nvPr/>
-        </p:nvCxnSpPr>
-        <p:spPr>
-          <a:xfrm flipH="1">
-            <a:off x="7482936" y="3388032"/>
-            <a:ext cx="821776" cy="0"/>
-          </a:xfrm>
-          <a:prstGeom prst="straightConnector1">
-            <a:avLst/>
-          </a:prstGeom>
-          <a:ln w="25400">
-            <a:solidFill>
-              <a:srgbClr val="00FF00"/>
-            </a:solidFill>
-            <a:tailEnd type="triangle"/>
-          </a:ln>
-        </p:spPr>
-        <p:style>
-          <a:lnRef idx="2">
-            <a:schemeClr val="accent1"/>
-          </a:lnRef>
-          <a:fillRef idx="0">
-            <a:schemeClr val="accent1"/>
-          </a:fillRef>
-          <a:effectRef idx="1">
-            <a:schemeClr val="accent1"/>
-          </a:effectRef>
-          <a:fontRef idx="minor">
-            <a:schemeClr val="tx1"/>
-          </a:fontRef>
-        </p:style>
-      </p:cxnSp>
-      <p:sp>
-        <p:nvSpPr>
-          <p:cNvPr id="14" name="Textfeld 13">
-            <a:extLst>
-              <a:ext uri="{FF2B5EF4-FFF2-40B4-BE49-F238E27FC236}">
-                <a16:creationId xmlns:a16="http://schemas.microsoft.com/office/drawing/2014/main" id="{684807E6-684E-3564-E28D-756A93C03C7E}"/>
+              <a:rPr lang="de-DE" sz="3200" dirty="0"/>
+              <a:t>Mitarbeiter (Workstation)</a:t>
+            </a:r>
+          </a:p>
+        </p:txBody>
+      </p:sp>
+      <p:sp>
+        <p:nvSpPr>
+          <p:cNvPr id="16" name="Textfeld 15">
+            <a:extLst>
+              <a:ext uri="{FF2B5EF4-FFF2-40B4-BE49-F238E27FC236}">
+                <a16:creationId xmlns:a16="http://schemas.microsoft.com/office/drawing/2014/main" id="{C22334A7-06CC-C3D6-DB63-B01303423293}"/>
               </a:ext>
             </a:extLst>
           </p:cNvPr>
@@ -4515,8 +4540,8 @@
         </p:nvSpPr>
         <p:spPr>
           <a:xfrm>
-            <a:off x="8321964" y="3184327"/>
-            <a:ext cx="1819564" cy="369332"/>
+            <a:off x="5016915" y="422432"/>
+            <a:ext cx="3035301" cy="461665"/>
           </a:xfrm>
           <a:prstGeom prst="rect">
             <a:avLst/>
@@ -4530,433 +4555,44 @@
           <a:lstStyle/>
           <a:p>
             <a:r>
-              <a:rPr lang="de-DE" dirty="0"/>
-              <a:t>Waage</a:t>
-            </a:r>
-          </a:p>
-        </p:txBody>
-      </p:sp>
-      <p:cxnSp>
-        <p:nvCxnSpPr>
-          <p:cNvPr id="15" name="Gerade Verbindung mit Pfeil 14">
-            <a:extLst>
-              <a:ext uri="{FF2B5EF4-FFF2-40B4-BE49-F238E27FC236}">
-                <a16:creationId xmlns:a16="http://schemas.microsoft.com/office/drawing/2014/main" id="{4EA1706D-9640-5AF0-363F-9A2FF6A3CA48}"/>
-              </a:ext>
-            </a:extLst>
-          </p:cNvPr>
-          <p:cNvCxnSpPr>
-            <a:cxnSpLocks/>
-          </p:cNvCxnSpPr>
-          <p:nvPr/>
-        </p:nvCxnSpPr>
-        <p:spPr>
-          <a:xfrm flipH="1" flipV="1">
-            <a:off x="6049369" y="2229085"/>
-            <a:ext cx="865842" cy="383619"/>
-          </a:xfrm>
-          <a:prstGeom prst="straightConnector1">
-            <a:avLst/>
-          </a:prstGeom>
-          <a:ln w="25400">
+              <a:rPr lang="de-DE" sz="1200" dirty="0"/>
+              <a:t>Kundenbestellung verpacken</a:t>
+            </a:r>
+          </a:p>
+          <a:p>
+            <a:r>
+              <a:rPr lang="de-DE" sz="1200" dirty="0"/>
+              <a:t>Bestell-Barcode aufkleben</a:t>
+            </a:r>
+          </a:p>
+        </p:txBody>
+      </p:sp>
+      <p:sp>
+        <p:nvSpPr>
+          <p:cNvPr id="17" name="Rechteck 16">
+            <a:extLst>
+              <a:ext uri="{FF2B5EF4-FFF2-40B4-BE49-F238E27FC236}">
+                <a16:creationId xmlns:a16="http://schemas.microsoft.com/office/drawing/2014/main" id="{C1A26954-8CAB-FB89-5F2E-DA5640F12172}"/>
+              </a:ext>
+            </a:extLst>
+          </p:cNvPr>
+          <p:cNvSpPr/>
+          <p:nvPr/>
+        </p:nvSpPr>
+        <p:spPr>
+          <a:xfrm rot="2427125">
+            <a:off x="2380907" y="3037014"/>
+            <a:ext cx="501857" cy="302251"/>
+          </a:xfrm>
+          <a:prstGeom prst="rect">
+            <a:avLst/>
+          </a:prstGeom>
+          <a:noFill/>
+          <a:ln w="9525">
             <a:solidFill>
-              <a:srgbClr val="00FF00"/>
+              <a:schemeClr val="bg1"/>
             </a:solidFill>
-            <a:tailEnd type="triangle"/>
-          </a:ln>
-        </p:spPr>
-        <p:style>
-          <a:lnRef idx="2">
-            <a:schemeClr val="accent1"/>
-          </a:lnRef>
-          <a:fillRef idx="0">
-            <a:schemeClr val="accent1"/>
-          </a:fillRef>
-          <a:effectRef idx="1">
-            <a:schemeClr val="accent1"/>
-          </a:effectRef>
-          <a:fontRef idx="minor">
-            <a:schemeClr val="tx1"/>
-          </a:fontRef>
-        </p:style>
-      </p:cxnSp>
-      <p:sp>
-        <p:nvSpPr>
-          <p:cNvPr id="20" name="Textfeld 19">
-            <a:extLst>
-              <a:ext uri="{FF2B5EF4-FFF2-40B4-BE49-F238E27FC236}">
-                <a16:creationId xmlns:a16="http://schemas.microsoft.com/office/drawing/2014/main" id="{132FFD1F-1FE5-3448-F493-33AF0A3664B7}"/>
-              </a:ext>
-            </a:extLst>
-          </p:cNvPr>
-          <p:cNvSpPr txBox="1"/>
-          <p:nvPr/>
-        </p:nvSpPr>
-        <p:spPr>
-          <a:xfrm>
-            <a:off x="8321964" y="2285604"/>
-            <a:ext cx="2295237" cy="646331"/>
-          </a:xfrm>
-          <a:prstGeom prst="rect">
-            <a:avLst/>
-          </a:prstGeom>
-          <a:noFill/>
-        </p:spPr>
-        <p:txBody>
-          <a:bodyPr wrap="square" rtlCol="0">
-            <a:spAutoFit/>
-          </a:bodyPr>
-          <a:lstStyle/>
-          <a:p>
-            <a:r>
-              <a:rPr lang="de-DE" dirty="0"/>
-              <a:t>Adresslabel-Rollen</a:t>
-            </a:r>
-          </a:p>
-          <a:p>
-            <a:r>
-              <a:rPr lang="de-DE" dirty="0"/>
-              <a:t>(Blanko-Sticker)</a:t>
-            </a:r>
-          </a:p>
-        </p:txBody>
-      </p:sp>
-      <p:cxnSp>
-        <p:nvCxnSpPr>
-          <p:cNvPr id="22" name="Gerade Verbindung mit Pfeil 21">
-            <a:extLst>
-              <a:ext uri="{FF2B5EF4-FFF2-40B4-BE49-F238E27FC236}">
-                <a16:creationId xmlns:a16="http://schemas.microsoft.com/office/drawing/2014/main" id="{29786450-923A-E053-E79A-8290A1F03953}"/>
-              </a:ext>
-            </a:extLst>
-          </p:cNvPr>
-          <p:cNvCxnSpPr>
-            <a:cxnSpLocks/>
-          </p:cNvCxnSpPr>
-          <p:nvPr/>
-        </p:nvCxnSpPr>
-        <p:spPr>
-          <a:xfrm flipH="1" flipV="1">
-            <a:off x="3823855" y="3258585"/>
-            <a:ext cx="3551035" cy="830032"/>
-          </a:xfrm>
-          <a:prstGeom prst="straightConnector1">
-            <a:avLst/>
-          </a:prstGeom>
-          <a:ln w="25400">
-            <a:solidFill>
-              <a:srgbClr val="00FF00"/>
-            </a:solidFill>
-            <a:tailEnd type="triangle"/>
-          </a:ln>
-        </p:spPr>
-        <p:style>
-          <a:lnRef idx="2">
-            <a:schemeClr val="accent1"/>
-          </a:lnRef>
-          <a:fillRef idx="0">
-            <a:schemeClr val="accent1"/>
-          </a:fillRef>
-          <a:effectRef idx="1">
-            <a:schemeClr val="accent1"/>
-          </a:effectRef>
-          <a:fontRef idx="minor">
-            <a:schemeClr val="tx1"/>
-          </a:fontRef>
-        </p:style>
-      </p:cxnSp>
-      <p:sp>
-        <p:nvSpPr>
-          <p:cNvPr id="27" name="Textfeld 26">
-            <a:extLst>
-              <a:ext uri="{FF2B5EF4-FFF2-40B4-BE49-F238E27FC236}">
-                <a16:creationId xmlns:a16="http://schemas.microsoft.com/office/drawing/2014/main" id="{41795F51-BD39-C812-AECC-12BBE0CB2E34}"/>
-              </a:ext>
-            </a:extLst>
-          </p:cNvPr>
-          <p:cNvSpPr txBox="1"/>
-          <p:nvPr/>
-        </p:nvSpPr>
-        <p:spPr>
-          <a:xfrm>
-            <a:off x="8335465" y="3914355"/>
-            <a:ext cx="2295237" cy="369332"/>
-          </a:xfrm>
-          <a:prstGeom prst="rect">
-            <a:avLst/>
-          </a:prstGeom>
-          <a:noFill/>
-        </p:spPr>
-        <p:txBody>
-          <a:bodyPr wrap="square" rtlCol="0">
-            <a:spAutoFit/>
-          </a:bodyPr>
-          <a:lstStyle/>
-          <a:p>
-            <a:r>
-              <a:rPr lang="de-DE" dirty="0"/>
-              <a:t>Adresslabel-Drucker</a:t>
-            </a:r>
-          </a:p>
-        </p:txBody>
-      </p:sp>
-      <p:cxnSp>
-        <p:nvCxnSpPr>
-          <p:cNvPr id="29" name="Gerade Verbindung mit Pfeil 28">
-            <a:extLst>
-              <a:ext uri="{FF2B5EF4-FFF2-40B4-BE49-F238E27FC236}">
-                <a16:creationId xmlns:a16="http://schemas.microsoft.com/office/drawing/2014/main" id="{5DDCBACC-93FC-6EF3-61D3-22C6BF7FA4F1}"/>
-              </a:ext>
-            </a:extLst>
-          </p:cNvPr>
-          <p:cNvCxnSpPr>
-            <a:cxnSpLocks/>
-          </p:cNvCxnSpPr>
-          <p:nvPr/>
-        </p:nvCxnSpPr>
-        <p:spPr>
-          <a:xfrm flipH="1" flipV="1">
-            <a:off x="3075710" y="4650876"/>
-            <a:ext cx="5246254" cy="155741"/>
-          </a:xfrm>
-          <a:prstGeom prst="straightConnector1">
-            <a:avLst/>
-          </a:prstGeom>
-          <a:ln w="25400">
-            <a:solidFill>
-              <a:srgbClr val="00FF00"/>
-            </a:solidFill>
-            <a:tailEnd type="triangle"/>
-          </a:ln>
-        </p:spPr>
-        <p:style>
-          <a:lnRef idx="2">
-            <a:schemeClr val="accent1"/>
-          </a:lnRef>
-          <a:fillRef idx="0">
-            <a:schemeClr val="accent1"/>
-          </a:fillRef>
-          <a:effectRef idx="1">
-            <a:schemeClr val="accent1"/>
-          </a:effectRef>
-          <a:fontRef idx="minor">
-            <a:schemeClr val="tx1"/>
-          </a:fontRef>
-        </p:style>
-      </p:cxnSp>
-      <p:cxnSp>
-        <p:nvCxnSpPr>
-          <p:cNvPr id="49" name="Gerade Verbindung mit Pfeil 48">
-            <a:extLst>
-              <a:ext uri="{FF2B5EF4-FFF2-40B4-BE49-F238E27FC236}">
-                <a16:creationId xmlns:a16="http://schemas.microsoft.com/office/drawing/2014/main" id="{E6813169-BC7C-94AA-DB94-2B12D47A69F7}"/>
-              </a:ext>
-            </a:extLst>
-          </p:cNvPr>
-          <p:cNvCxnSpPr>
-            <a:cxnSpLocks/>
-          </p:cNvCxnSpPr>
-          <p:nvPr/>
-        </p:nvCxnSpPr>
-        <p:spPr>
-          <a:xfrm flipH="1">
-            <a:off x="7555346" y="1766032"/>
-            <a:ext cx="780119" cy="0"/>
-          </a:xfrm>
-          <a:prstGeom prst="straightConnector1">
-            <a:avLst/>
-          </a:prstGeom>
-          <a:ln w="25400">
-            <a:solidFill>
-              <a:srgbClr val="00FF00"/>
-            </a:solidFill>
-            <a:tailEnd type="none"/>
-          </a:ln>
-        </p:spPr>
-        <p:style>
-          <a:lnRef idx="2">
-            <a:schemeClr val="accent1"/>
-          </a:lnRef>
-          <a:fillRef idx="0">
-            <a:schemeClr val="accent1"/>
-          </a:fillRef>
-          <a:effectRef idx="1">
-            <a:schemeClr val="accent1"/>
-          </a:effectRef>
-          <a:fontRef idx="minor">
-            <a:schemeClr val="tx1"/>
-          </a:fontRef>
-        </p:style>
-      </p:cxnSp>
-      <p:cxnSp>
-        <p:nvCxnSpPr>
-          <p:cNvPr id="54" name="Gerade Verbindung mit Pfeil 53">
-            <a:extLst>
-              <a:ext uri="{FF2B5EF4-FFF2-40B4-BE49-F238E27FC236}">
-                <a16:creationId xmlns:a16="http://schemas.microsoft.com/office/drawing/2014/main" id="{9E23F57D-CBDB-0BEE-BFE2-334AF659228F}"/>
-              </a:ext>
-            </a:extLst>
-          </p:cNvPr>
-          <p:cNvCxnSpPr>
-            <a:cxnSpLocks/>
-          </p:cNvCxnSpPr>
-          <p:nvPr/>
-        </p:nvCxnSpPr>
-        <p:spPr>
-          <a:xfrm flipH="1">
-            <a:off x="6915211" y="2600738"/>
-            <a:ext cx="1420254" cy="0"/>
-          </a:xfrm>
-          <a:prstGeom prst="straightConnector1">
-            <a:avLst/>
-          </a:prstGeom>
-          <a:ln w="25400">
-            <a:solidFill>
-              <a:srgbClr val="00FF00"/>
-            </a:solidFill>
-            <a:tailEnd type="none"/>
-          </a:ln>
-        </p:spPr>
-        <p:style>
-          <a:lnRef idx="2">
-            <a:schemeClr val="accent1"/>
-          </a:lnRef>
-          <a:fillRef idx="0">
-            <a:schemeClr val="accent1"/>
-          </a:fillRef>
-          <a:effectRef idx="1">
-            <a:schemeClr val="accent1"/>
-          </a:effectRef>
-          <a:fontRef idx="minor">
-            <a:schemeClr val="tx1"/>
-          </a:fontRef>
-        </p:style>
-      </p:cxnSp>
-      <p:cxnSp>
-        <p:nvCxnSpPr>
-          <p:cNvPr id="57" name="Gerade Verbindung mit Pfeil 56">
-            <a:extLst>
-              <a:ext uri="{FF2B5EF4-FFF2-40B4-BE49-F238E27FC236}">
-                <a16:creationId xmlns:a16="http://schemas.microsoft.com/office/drawing/2014/main" id="{E77E53DD-F397-806F-2F47-261E2CEA60D6}"/>
-              </a:ext>
-            </a:extLst>
-          </p:cNvPr>
-          <p:cNvCxnSpPr>
-            <a:cxnSpLocks/>
-          </p:cNvCxnSpPr>
-          <p:nvPr/>
-        </p:nvCxnSpPr>
-        <p:spPr>
-          <a:xfrm flipH="1">
-            <a:off x="7374890" y="4088617"/>
-            <a:ext cx="947074" cy="0"/>
-          </a:xfrm>
-          <a:prstGeom prst="straightConnector1">
-            <a:avLst/>
-          </a:prstGeom>
-          <a:ln w="25400">
-            <a:solidFill>
-              <a:srgbClr val="00FF00"/>
-            </a:solidFill>
-            <a:tailEnd type="none"/>
-          </a:ln>
-        </p:spPr>
-        <p:style>
-          <a:lnRef idx="2">
-            <a:schemeClr val="accent1"/>
-          </a:lnRef>
-          <a:fillRef idx="0">
-            <a:schemeClr val="accent1"/>
-          </a:fillRef>
-          <a:effectRef idx="1">
-            <a:schemeClr val="accent1"/>
-          </a:effectRef>
-          <a:fontRef idx="minor">
-            <a:schemeClr val="tx1"/>
-          </a:fontRef>
-        </p:style>
-      </p:cxnSp>
-      <p:sp>
-        <p:nvSpPr>
-          <p:cNvPr id="59" name="Textfeld 58">
-            <a:extLst>
-              <a:ext uri="{FF2B5EF4-FFF2-40B4-BE49-F238E27FC236}">
-                <a16:creationId xmlns:a16="http://schemas.microsoft.com/office/drawing/2014/main" id="{C2DE509A-7BB0-01C7-45EC-2D75FCE98835}"/>
-              </a:ext>
-            </a:extLst>
-          </p:cNvPr>
-          <p:cNvSpPr txBox="1"/>
-          <p:nvPr/>
-        </p:nvSpPr>
-        <p:spPr>
-          <a:xfrm>
-            <a:off x="463519" y="400077"/>
-            <a:ext cx="10397138" cy="830997"/>
-          </a:xfrm>
-          <a:prstGeom prst="rect">
-            <a:avLst/>
-          </a:prstGeom>
-          <a:noFill/>
-        </p:spPr>
-        <p:txBody>
-          <a:bodyPr wrap="square" rtlCol="0">
-            <a:spAutoFit/>
-          </a:bodyPr>
-          <a:lstStyle/>
-          <a:p>
-            <a:r>
-              <a:rPr lang="de-DE" sz="3200" dirty="0"/>
-              <a:t>Label-Maschine  (Labelmachine) =&gt; Versand-Abfertigung)</a:t>
-            </a:r>
-          </a:p>
-          <a:p>
-            <a:r>
-              <a:rPr lang="de-DE" sz="1600" dirty="0">
-                <a:solidFill>
-                  <a:schemeClr val="bg1"/>
-                </a:solidFill>
-                <a:highlight>
-                  <a:srgbClr val="FF0000"/>
-                </a:highlight>
-              </a:rPr>
-              <a:t> Logfile-Erzeugung</a:t>
-            </a:r>
-            <a:r>
-              <a:rPr lang="de-DE" sz="1600" dirty="0">
-                <a:solidFill>
-                  <a:schemeClr val="bg1"/>
-                </a:solidFill>
-              </a:rPr>
-              <a:t> </a:t>
-            </a:r>
-          </a:p>
-        </p:txBody>
-      </p:sp>
-      <p:sp>
-        <p:nvSpPr>
-          <p:cNvPr id="6" name="Ellipse 5">
-            <a:extLst>
-              <a:ext uri="{FF2B5EF4-FFF2-40B4-BE49-F238E27FC236}">
-                <a16:creationId xmlns:a16="http://schemas.microsoft.com/office/drawing/2014/main" id="{B067621C-7DF7-2162-F8E6-15837114BFBB}"/>
-              </a:ext>
-            </a:extLst>
-          </p:cNvPr>
-          <p:cNvSpPr/>
-          <p:nvPr/>
-        </p:nvSpPr>
-        <p:spPr>
-          <a:xfrm>
-            <a:off x="6915210" y="1881866"/>
-            <a:ext cx="511665" cy="341633"/>
-          </a:xfrm>
-          <a:prstGeom prst="ellipse">
-            <a:avLst/>
-          </a:prstGeom>
-          <a:noFill/>
-          <a:ln>
-            <a:solidFill>
-              <a:srgbClr val="00FF00"/>
-            </a:solidFill>
+            <a:prstDash val="dash"/>
           </a:ln>
         </p:spPr>
         <p:style>
@@ -4984,12 +4620,56 @@
           </a:p>
         </p:txBody>
       </p:sp>
+      <p:cxnSp>
+        <p:nvCxnSpPr>
+          <p:cNvPr id="18" name="Gerade Verbindung mit Pfeil 17">
+            <a:extLst>
+              <a:ext uri="{FF2B5EF4-FFF2-40B4-BE49-F238E27FC236}">
+                <a16:creationId xmlns:a16="http://schemas.microsoft.com/office/drawing/2014/main" id="{8120EC2F-9554-17B8-9243-4CD5B2F9C1BA}"/>
+              </a:ext>
+            </a:extLst>
+          </p:cNvPr>
+          <p:cNvCxnSpPr>
+            <a:cxnSpLocks/>
+          </p:cNvCxnSpPr>
+          <p:nvPr/>
+        </p:nvCxnSpPr>
+        <p:spPr>
+          <a:xfrm flipH="1">
+            <a:off x="2613891" y="2533270"/>
+            <a:ext cx="794327" cy="615649"/>
+          </a:xfrm>
+          <a:prstGeom prst="straightConnector1">
+            <a:avLst/>
+          </a:prstGeom>
+          <a:ln w="25400">
+            <a:solidFill>
+              <a:srgbClr val="00FF00"/>
+            </a:solidFill>
+            <a:tailEnd type="triangle"/>
+          </a:ln>
+        </p:spPr>
+        <p:style>
+          <a:lnRef idx="2">
+            <a:schemeClr val="accent1"/>
+          </a:lnRef>
+          <a:fillRef idx="0">
+            <a:schemeClr val="accent1"/>
+          </a:fillRef>
+          <a:effectRef idx="1">
+            <a:schemeClr val="accent1"/>
+          </a:effectRef>
+          <a:fontRef idx="minor">
+            <a:schemeClr val="tx1"/>
+          </a:fontRef>
+        </p:style>
+      </p:cxnSp>
       <p:sp>
         <p:nvSpPr>
           <p:cNvPr id="2" name="Textfeld 1">
             <a:extLst>
               <a:ext uri="{FF2B5EF4-FFF2-40B4-BE49-F238E27FC236}">
-                <a16:creationId xmlns:a16="http://schemas.microsoft.com/office/drawing/2014/main" id="{0E4E1E2C-BFC7-CD38-EF9E-7DFF4A3C2A98}"/>
+                <a16:creationId xmlns:a16="http://schemas.microsoft.com/office/drawing/2014/main" id="{75B68CFD-AAEE-E951-C47A-0AE1F387903C}"/>
               </a:ext>
             </a:extLst>
           </p:cNvPr>
@@ -4998,8 +4678,8 @@
         </p:nvSpPr>
         <p:spPr>
           <a:xfrm>
-            <a:off x="8321964" y="1827450"/>
-            <a:ext cx="2944134" cy="415498"/>
+            <a:off x="9376912" y="241941"/>
+            <a:ext cx="2544565" cy="369332"/>
           </a:xfrm>
           <a:prstGeom prst="rect">
             <a:avLst/>
@@ -5012,104 +4692,25 @@
           </a:bodyPr>
           <a:lstStyle/>
           <a:p>
-            <a:r>
-              <a:rPr lang="de-DE" sz="1050" dirty="0"/>
-              <a:t>Strichcodesticker (Kundenbestell-Daten)   </a:t>
-            </a:r>
-          </a:p>
-          <a:p>
-            <a:r>
-              <a:rPr lang="de-DE" sz="1050" dirty="0"/>
-              <a:t>&amp;   Verpackungsbarcode</a:t>
-            </a:r>
-          </a:p>
-        </p:txBody>
-      </p:sp>
-      <p:sp>
-        <p:nvSpPr>
-          <p:cNvPr id="4" name="Textfeld 3">
-            <a:extLst>
-              <a:ext uri="{FF2B5EF4-FFF2-40B4-BE49-F238E27FC236}">
-                <a16:creationId xmlns:a16="http://schemas.microsoft.com/office/drawing/2014/main" id="{2F3338DB-2BC1-71B7-C22D-D685CF05468C}"/>
-              </a:ext>
-            </a:extLst>
-          </p:cNvPr>
-          <p:cNvSpPr txBox="1"/>
-          <p:nvPr/>
-        </p:nvSpPr>
-        <p:spPr>
-          <a:xfrm>
-            <a:off x="8185531" y="6203853"/>
-            <a:ext cx="3468252" cy="369332"/>
-          </a:xfrm>
-          <a:prstGeom prst="rect">
-            <a:avLst/>
-          </a:prstGeom>
-          <a:noFill/>
-        </p:spPr>
-        <p:txBody>
-          <a:bodyPr wrap="square" rtlCol="0">
-            <a:spAutoFit/>
-          </a:bodyPr>
-          <a:lstStyle/>
-          <a:p>
-            <a:r>
-              <a:rPr lang="de-DE" dirty="0"/>
-              <a:t>Labelmaschine &amp; QA-Kontrolle</a:t>
-            </a:r>
-          </a:p>
-        </p:txBody>
-      </p:sp>
-      <p:sp>
-        <p:nvSpPr>
-          <p:cNvPr id="7" name="Pfeil: nach rechts 6">
-            <a:extLst>
-              <a:ext uri="{FF2B5EF4-FFF2-40B4-BE49-F238E27FC236}">
-                <a16:creationId xmlns:a16="http://schemas.microsoft.com/office/drawing/2014/main" id="{E4728521-AE92-A11E-FA09-FF1F143453AC}"/>
-              </a:ext>
-            </a:extLst>
-          </p:cNvPr>
-          <p:cNvSpPr/>
-          <p:nvPr/>
-        </p:nvSpPr>
-        <p:spPr>
-          <a:xfrm>
-            <a:off x="11342733" y="6172949"/>
-            <a:ext cx="570345" cy="402340"/>
-          </a:xfrm>
-          <a:prstGeom prst="rightArrow">
-            <a:avLst/>
-          </a:prstGeom>
-        </p:spPr>
-        <p:style>
-          <a:lnRef idx="2">
-            <a:schemeClr val="accent1">
-              <a:shade val="15000"/>
-            </a:schemeClr>
-          </a:lnRef>
-          <a:fillRef idx="1">
-            <a:schemeClr val="accent1"/>
-          </a:fillRef>
-          <a:effectRef idx="0">
-            <a:schemeClr val="accent1"/>
-          </a:effectRef>
-          <a:fontRef idx="minor">
-            <a:schemeClr val="lt1"/>
-          </a:fontRef>
-        </p:style>
-        <p:txBody>
-          <a:bodyPr rtlCol="0" anchor="ctr"/>
-          <a:lstStyle/>
-          <a:p>
-            <a:pPr algn="ctr"/>
-            <a:endParaRPr lang="de-DE"/>
+            <a:pPr algn="r"/>
+            <a:r>
+              <a:rPr lang="de-DE" dirty="0">
+                <a:solidFill>
+                  <a:schemeClr val="bg1"/>
+                </a:solidFill>
+                <a:highlight>
+                  <a:srgbClr val="000080"/>
+                </a:highlight>
+              </a:rPr>
+              <a:t>Machine-Log-Navigator</a:t>
+            </a:r>
           </a:p>
         </p:txBody>
       </p:sp>
     </p:spTree>
     <p:extLst>
       <p:ext uri="{BB962C8B-B14F-4D97-AF65-F5344CB8AC3E}">
-        <p14:creationId xmlns:p14="http://schemas.microsoft.com/office/powerpoint/2010/main" val="3223449868"/>
+        <p14:creationId xmlns:p14="http://schemas.microsoft.com/office/powerpoint/2010/main" val="334455706"/>
       </p:ext>
     </p:extLst>
   </p:cSld>
@@ -5136,12 +4737,52 @@
           <a:chExt cx="0" cy="0"/>
         </a:xfrm>
       </p:grpSpPr>
+      <p:sp>
+        <p:nvSpPr>
+          <p:cNvPr id="32" name="Textfeld 31">
+            <a:extLst>
+              <a:ext uri="{FF2B5EF4-FFF2-40B4-BE49-F238E27FC236}">
+                <a16:creationId xmlns:a16="http://schemas.microsoft.com/office/drawing/2014/main" id="{53C9237C-E628-E692-B363-223E9F868DFD}"/>
+              </a:ext>
+            </a:extLst>
+          </p:cNvPr>
+          <p:cNvSpPr txBox="1"/>
+          <p:nvPr/>
+        </p:nvSpPr>
+        <p:spPr>
+          <a:xfrm>
+            <a:off x="8323707" y="4622748"/>
+            <a:ext cx="3589371" cy="338554"/>
+          </a:xfrm>
+          <a:prstGeom prst="rect">
+            <a:avLst/>
+          </a:prstGeom>
+          <a:noFill/>
+        </p:spPr>
+        <p:txBody>
+          <a:bodyPr wrap="square" rtlCol="0">
+            <a:spAutoFit/>
+          </a:bodyPr>
+          <a:lstStyle/>
+          <a:p>
+            <a:r>
+              <a:rPr lang="de-DE" sz="1600" dirty="0"/>
+              <a:t>Kunden-Adresslabel-</a:t>
+            </a:r>
+            <a:r>
+              <a:rPr lang="de-DE" sz="1600" dirty="0" err="1"/>
+              <a:t>Stickervorgang</a:t>
+            </a:r>
+            <a:endParaRPr lang="de-DE" sz="1600" dirty="0"/>
+          </a:p>
+        </p:txBody>
+      </p:sp>
       <p:pic>
         <p:nvPicPr>
-          <p:cNvPr id="9" name="Grafik 8" descr="Ein Bild, das Bautechnik, Stahl, Fabrik, Werkzeugraum enthält.&#10;&#10;KI-generierte Inhalte können fehlerhaft sein.">
-            <a:extLst>
-              <a:ext uri="{FF2B5EF4-FFF2-40B4-BE49-F238E27FC236}">
-                <a16:creationId xmlns:a16="http://schemas.microsoft.com/office/drawing/2014/main" id="{C06E13C1-CF15-813E-DB61-7D5AB7460898}"/>
+          <p:cNvPr id="3" name="Grafik 2">
+            <a:extLst>
+              <a:ext uri="{FF2B5EF4-FFF2-40B4-BE49-F238E27FC236}">
+                <a16:creationId xmlns:a16="http://schemas.microsoft.com/office/drawing/2014/main" id="{84F64F6A-8696-4090-4FD8-91B3B13CE560}"/>
               </a:ext>
             </a:extLst>
           </p:cNvPr>
@@ -5151,21 +4792,15 @@
           <p:nvPr/>
         </p:nvPicPr>
         <p:blipFill>
-          <a:blip r:embed="rId2">
-            <a:extLst>
-              <a:ext uri="{28A0092B-C50C-407E-A947-70E740481C1C}">
-                <a14:useLocalDpi xmlns:a14="http://schemas.microsoft.com/office/drawing/2010/main" val="0"/>
-              </a:ext>
-            </a:extLst>
-          </a:blip>
+          <a:blip r:embed="rId2"/>
           <a:stretch>
             <a:fillRect/>
           </a:stretch>
         </p:blipFill>
         <p:spPr>
           <a:xfrm>
-            <a:off x="2664894" y="955301"/>
-            <a:ext cx="7144747" cy="5353797"/>
+            <a:off x="542925" y="1486435"/>
+            <a:ext cx="7250122" cy="4856802"/>
           </a:xfrm>
           <a:prstGeom prst="rect">
             <a:avLst/>
@@ -5174,10 +4809,10 @@
       </p:pic>
       <p:sp>
         <p:nvSpPr>
-          <p:cNvPr id="10" name="Pfeil: gestreift nach rechts 9">
-            <a:extLst>
-              <a:ext uri="{FF2B5EF4-FFF2-40B4-BE49-F238E27FC236}">
-                <a16:creationId xmlns:a16="http://schemas.microsoft.com/office/drawing/2014/main" id="{464474A5-66D7-9991-26A0-7987FB26CDB6}"/>
+          <p:cNvPr id="5" name="Pfeil: gestreift nach rechts 4">
+            <a:extLst>
+              <a:ext uri="{FF2B5EF4-FFF2-40B4-BE49-F238E27FC236}">
+                <a16:creationId xmlns:a16="http://schemas.microsoft.com/office/drawing/2014/main" id="{C043DFB5-76FB-393A-58DF-F9D8760F18A6}"/>
               </a:ext>
             </a:extLst>
           </p:cNvPr>
@@ -5185,8 +4820,8 @@
           <p:nvPr/>
         </p:nvSpPr>
         <p:spPr>
-          <a:xfrm rot="21115646" flipH="1">
-            <a:off x="4908979" y="4111041"/>
+          <a:xfrm rot="19627890" flipH="1">
+            <a:off x="4400940" y="4536078"/>
             <a:ext cx="3094557" cy="866498"/>
           </a:xfrm>
           <a:prstGeom prst="stripedRightArrow">
@@ -5231,47 +4866,12 @@
           </a:p>
         </p:txBody>
       </p:sp>
-      <p:sp>
-        <p:nvSpPr>
-          <p:cNvPr id="11" name="Textfeld 10">
-            <a:extLst>
-              <a:ext uri="{FF2B5EF4-FFF2-40B4-BE49-F238E27FC236}">
-                <a16:creationId xmlns:a16="http://schemas.microsoft.com/office/drawing/2014/main" id="{06C2C856-C246-B5B3-1024-307E33157E90}"/>
-              </a:ext>
-            </a:extLst>
-          </p:cNvPr>
-          <p:cNvSpPr txBox="1"/>
-          <p:nvPr/>
-        </p:nvSpPr>
-        <p:spPr>
-          <a:xfrm>
-            <a:off x="9693359" y="407235"/>
-            <a:ext cx="2295237" cy="369332"/>
-          </a:xfrm>
-          <a:prstGeom prst="rect">
-            <a:avLst/>
-          </a:prstGeom>
-          <a:noFill/>
-        </p:spPr>
-        <p:txBody>
-          <a:bodyPr wrap="square" rtlCol="0">
-            <a:spAutoFit/>
-          </a:bodyPr>
-          <a:lstStyle/>
-          <a:p>
-            <a:r>
-              <a:rPr lang="de-DE" dirty="0"/>
-              <a:t>Scanner in Aktion</a:t>
-            </a:r>
-          </a:p>
-        </p:txBody>
-      </p:sp>
       <p:cxnSp>
         <p:nvCxnSpPr>
-          <p:cNvPr id="12" name="Gerade Verbindung mit Pfeil 11">
-            <a:extLst>
-              <a:ext uri="{FF2B5EF4-FFF2-40B4-BE49-F238E27FC236}">
-                <a16:creationId xmlns:a16="http://schemas.microsoft.com/office/drawing/2014/main" id="{C3B64FA5-D51A-26B9-7819-A6CD22C09E84}"/>
+          <p:cNvPr id="8" name="Gerade Verbindung mit Pfeil 7">
+            <a:extLst>
+              <a:ext uri="{FF2B5EF4-FFF2-40B4-BE49-F238E27FC236}">
+                <a16:creationId xmlns:a16="http://schemas.microsoft.com/office/drawing/2014/main" id="{81D0F4A3-E913-88A6-994B-4FEDE7E92C65}"/>
               </a:ext>
             </a:extLst>
           </p:cNvPr>
@@ -5282,8 +4882,8 @@
         </p:nvCxnSpPr>
         <p:spPr>
           <a:xfrm flipH="1">
-            <a:off x="8049044" y="776567"/>
-            <a:ext cx="1644315" cy="1033760"/>
+            <a:off x="7374890" y="1766032"/>
+            <a:ext cx="180456" cy="168211"/>
           </a:xfrm>
           <a:prstGeom prst="straightConnector1">
             <a:avLst/>
@@ -5312,230 +4912,45 @@
       </p:cxnSp>
       <p:sp>
         <p:nvSpPr>
-          <p:cNvPr id="18" name="Ellipse 17">
-            <a:extLst>
-              <a:ext uri="{FF2B5EF4-FFF2-40B4-BE49-F238E27FC236}">
-                <a16:creationId xmlns:a16="http://schemas.microsoft.com/office/drawing/2014/main" id="{356BBC1A-522C-9EF7-83D1-BC4A0FFAB297}"/>
-              </a:ext>
-            </a:extLst>
-          </p:cNvPr>
-          <p:cNvSpPr/>
-          <p:nvPr/>
-        </p:nvSpPr>
-        <p:spPr>
-          <a:xfrm>
-            <a:off x="7313925" y="1496292"/>
-            <a:ext cx="1237673" cy="757690"/>
-          </a:xfrm>
-          <a:prstGeom prst="ellipse">
+          <p:cNvPr id="9" name="Textfeld 8">
+            <a:extLst>
+              <a:ext uri="{FF2B5EF4-FFF2-40B4-BE49-F238E27FC236}">
+                <a16:creationId xmlns:a16="http://schemas.microsoft.com/office/drawing/2014/main" id="{0F491203-3C4E-9CF4-1799-4409859A4753}"/>
+              </a:ext>
+            </a:extLst>
+          </p:cNvPr>
+          <p:cNvSpPr txBox="1"/>
+          <p:nvPr/>
+        </p:nvSpPr>
+        <p:spPr>
+          <a:xfrm>
+            <a:off x="8304712" y="1589979"/>
+            <a:ext cx="2660073" cy="369332"/>
+          </a:xfrm>
+          <a:prstGeom prst="rect">
             <a:avLst/>
           </a:prstGeom>
           <a:noFill/>
-          <a:ln>
-            <a:solidFill>
-              <a:srgbClr val="00FF00"/>
-            </a:solidFill>
-          </a:ln>
-        </p:spPr>
-        <p:style>
-          <a:lnRef idx="2">
-            <a:schemeClr val="accent1">
-              <a:shade val="15000"/>
-            </a:schemeClr>
-          </a:lnRef>
-          <a:fillRef idx="1">
-            <a:schemeClr val="accent1"/>
-          </a:fillRef>
-          <a:effectRef idx="0">
-            <a:schemeClr val="accent1"/>
-          </a:effectRef>
-          <a:fontRef idx="minor">
-            <a:schemeClr val="lt1"/>
-          </a:fontRef>
-        </p:style>
-        <p:txBody>
-          <a:bodyPr rtlCol="0" anchor="ctr"/>
-          <a:lstStyle/>
-          <a:p>
-            <a:pPr algn="ctr"/>
-            <a:endParaRPr lang="de-DE"/>
-          </a:p>
-        </p:txBody>
-      </p:sp>
-      <p:sp>
-        <p:nvSpPr>
-          <p:cNvPr id="19" name="Rechteck 18">
-            <a:extLst>
-              <a:ext uri="{FF2B5EF4-FFF2-40B4-BE49-F238E27FC236}">
-                <a16:creationId xmlns:a16="http://schemas.microsoft.com/office/drawing/2014/main" id="{BC7F62CA-78AB-FCFD-17C0-D5867A34FA10}"/>
-              </a:ext>
-            </a:extLst>
-          </p:cNvPr>
-          <p:cNvSpPr/>
-          <p:nvPr/>
-        </p:nvSpPr>
-        <p:spPr>
-          <a:xfrm rot="21295450">
-            <a:off x="495117" y="4197801"/>
-            <a:ext cx="2592577" cy="330687"/>
-          </a:xfrm>
-          <a:prstGeom prst="rect">
-            <a:avLst/>
-          </a:prstGeom>
-          <a:solidFill>
-            <a:srgbClr val="28201E"/>
-          </a:solidFill>
-          <a:ln>
-            <a:noFill/>
-          </a:ln>
-        </p:spPr>
-        <p:style>
-          <a:lnRef idx="2">
-            <a:schemeClr val="accent1">
-              <a:shade val="15000"/>
-            </a:schemeClr>
-          </a:lnRef>
-          <a:fillRef idx="1">
-            <a:schemeClr val="accent1"/>
-          </a:fillRef>
-          <a:effectRef idx="0">
-            <a:schemeClr val="accent1"/>
-          </a:effectRef>
-          <a:fontRef idx="minor">
-            <a:schemeClr val="lt1"/>
-          </a:fontRef>
-        </p:style>
-        <p:txBody>
-          <a:bodyPr rtlCol="0" anchor="ctr"/>
-          <a:lstStyle/>
-          <a:p>
-            <a:pPr algn="ctr"/>
-            <a:endParaRPr lang="de-DE"/>
-          </a:p>
-        </p:txBody>
-      </p:sp>
-      <p:sp>
-        <p:nvSpPr>
-          <p:cNvPr id="20" name="Rechteck 19">
-            <a:extLst>
-              <a:ext uri="{FF2B5EF4-FFF2-40B4-BE49-F238E27FC236}">
-                <a16:creationId xmlns:a16="http://schemas.microsoft.com/office/drawing/2014/main" id="{42723B3F-4EB5-DDD4-74B4-0F2259001371}"/>
-              </a:ext>
-            </a:extLst>
-          </p:cNvPr>
-          <p:cNvSpPr/>
-          <p:nvPr/>
-        </p:nvSpPr>
-        <p:spPr>
-          <a:xfrm rot="16200000">
-            <a:off x="841462" y="4679128"/>
-            <a:ext cx="1117602" cy="330687"/>
-          </a:xfrm>
-          <a:prstGeom prst="rect">
-            <a:avLst/>
-          </a:prstGeom>
-          <a:solidFill>
-            <a:srgbClr val="28201E"/>
-          </a:solidFill>
-          <a:ln>
-            <a:noFill/>
-          </a:ln>
-        </p:spPr>
-        <p:style>
-          <a:lnRef idx="2">
-            <a:schemeClr val="accent1">
-              <a:shade val="15000"/>
-            </a:schemeClr>
-          </a:lnRef>
-          <a:fillRef idx="1">
-            <a:schemeClr val="accent1"/>
-          </a:fillRef>
-          <a:effectRef idx="0">
-            <a:schemeClr val="accent1"/>
-          </a:effectRef>
-          <a:fontRef idx="minor">
-            <a:schemeClr val="lt1"/>
-          </a:fontRef>
-        </p:style>
-        <p:txBody>
-          <a:bodyPr rtlCol="0" anchor="ctr"/>
-          <a:lstStyle/>
-          <a:p>
-            <a:pPr algn="ctr"/>
-            <a:endParaRPr lang="de-DE"/>
-          </a:p>
-        </p:txBody>
-      </p:sp>
-      <p:sp>
-        <p:nvSpPr>
-          <p:cNvPr id="21" name="Rechteck 20">
-            <a:extLst>
-              <a:ext uri="{FF2B5EF4-FFF2-40B4-BE49-F238E27FC236}">
-                <a16:creationId xmlns:a16="http://schemas.microsoft.com/office/drawing/2014/main" id="{18A04283-0B39-2252-3ACF-9E557F8ADC1E}"/>
-              </a:ext>
-            </a:extLst>
-          </p:cNvPr>
-          <p:cNvSpPr/>
-          <p:nvPr/>
-        </p:nvSpPr>
-        <p:spPr>
-          <a:xfrm>
-            <a:off x="532950" y="5392746"/>
-            <a:ext cx="1772759" cy="942109"/>
-          </a:xfrm>
-          <a:prstGeom prst="rect">
-            <a:avLst/>
-          </a:prstGeom>
-          <a:solidFill>
-            <a:srgbClr val="0033CC"/>
-          </a:solidFill>
-          <a:ln w="34925">
-            <a:solidFill>
-              <a:schemeClr val="accent2"/>
-            </a:solidFill>
-          </a:ln>
-        </p:spPr>
-        <p:style>
-          <a:lnRef idx="2">
-            <a:schemeClr val="accent1">
-              <a:shade val="15000"/>
-            </a:schemeClr>
-          </a:lnRef>
-          <a:fillRef idx="1">
-            <a:schemeClr val="accent1"/>
-          </a:fillRef>
-          <a:effectRef idx="0">
-            <a:schemeClr val="accent1"/>
-          </a:effectRef>
-          <a:fontRef idx="minor">
-            <a:schemeClr val="lt1"/>
-          </a:fontRef>
-        </p:style>
-        <p:txBody>
-          <a:bodyPr rtlCol="0" anchor="ctr"/>
-          <a:lstStyle/>
-          <a:p>
-            <a:pPr algn="ctr"/>
+        </p:spPr>
+        <p:txBody>
+          <a:bodyPr wrap="square" rtlCol="0">
+            <a:spAutoFit/>
+          </a:bodyPr>
+          <a:lstStyle/>
+          <a:p>
             <a:r>
               <a:rPr lang="de-DE" dirty="0"/>
-              <a:t>QA</a:t>
-            </a:r>
-          </a:p>
-          <a:p>
-            <a:pPr algn="ctr"/>
-            <a:r>
-              <a:rPr lang="de-DE" dirty="0"/>
-              <a:t>Workstation</a:t>
+              <a:t>Barcode-Scanner</a:t>
             </a:r>
           </a:p>
         </p:txBody>
       </p:sp>
       <p:cxnSp>
         <p:nvCxnSpPr>
-          <p:cNvPr id="22" name="Gerade Verbindung mit Pfeil 21">
-            <a:extLst>
-              <a:ext uri="{FF2B5EF4-FFF2-40B4-BE49-F238E27FC236}">
-                <a16:creationId xmlns:a16="http://schemas.microsoft.com/office/drawing/2014/main" id="{18A75901-E06A-57BA-0826-D233AF06C8F1}"/>
+          <p:cNvPr id="12" name="Gerade Verbindung mit Pfeil 11">
+            <a:extLst>
+              <a:ext uri="{FF2B5EF4-FFF2-40B4-BE49-F238E27FC236}">
+                <a16:creationId xmlns:a16="http://schemas.microsoft.com/office/drawing/2014/main" id="{A6376D25-DADE-7E65-65E7-B61575EC1C53}"/>
               </a:ext>
             </a:extLst>
           </p:cNvPr>
@@ -5546,8 +4961,8 @@
         </p:nvCxnSpPr>
         <p:spPr>
           <a:xfrm flipH="1">
-            <a:off x="1827202" y="4285670"/>
-            <a:ext cx="427756" cy="50689"/>
+            <a:off x="7482936" y="3388032"/>
+            <a:ext cx="821776" cy="0"/>
           </a:xfrm>
           <a:prstGeom prst="straightConnector1">
             <a:avLst/>
@@ -5556,7 +4971,249 @@
             <a:solidFill>
               <a:srgbClr val="00FF00"/>
             </a:solidFill>
-            <a:prstDash val="sysDot"/>
+            <a:tailEnd type="triangle"/>
+          </a:ln>
+        </p:spPr>
+        <p:style>
+          <a:lnRef idx="2">
+            <a:schemeClr val="accent1"/>
+          </a:lnRef>
+          <a:fillRef idx="0">
+            <a:schemeClr val="accent1"/>
+          </a:fillRef>
+          <a:effectRef idx="1">
+            <a:schemeClr val="accent1"/>
+          </a:effectRef>
+          <a:fontRef idx="minor">
+            <a:schemeClr val="tx1"/>
+          </a:fontRef>
+        </p:style>
+      </p:cxnSp>
+      <p:sp>
+        <p:nvSpPr>
+          <p:cNvPr id="14" name="Textfeld 13">
+            <a:extLst>
+              <a:ext uri="{FF2B5EF4-FFF2-40B4-BE49-F238E27FC236}">
+                <a16:creationId xmlns:a16="http://schemas.microsoft.com/office/drawing/2014/main" id="{684807E6-684E-3564-E28D-756A93C03C7E}"/>
+              </a:ext>
+            </a:extLst>
+          </p:cNvPr>
+          <p:cNvSpPr txBox="1"/>
+          <p:nvPr/>
+        </p:nvSpPr>
+        <p:spPr>
+          <a:xfrm>
+            <a:off x="8321964" y="3184327"/>
+            <a:ext cx="1819564" cy="369332"/>
+          </a:xfrm>
+          <a:prstGeom prst="rect">
+            <a:avLst/>
+          </a:prstGeom>
+          <a:noFill/>
+        </p:spPr>
+        <p:txBody>
+          <a:bodyPr wrap="square" rtlCol="0">
+            <a:spAutoFit/>
+          </a:bodyPr>
+          <a:lstStyle/>
+          <a:p>
+            <a:r>
+              <a:rPr lang="de-DE" dirty="0"/>
+              <a:t>Waage</a:t>
+            </a:r>
+          </a:p>
+        </p:txBody>
+      </p:sp>
+      <p:cxnSp>
+        <p:nvCxnSpPr>
+          <p:cNvPr id="15" name="Gerade Verbindung mit Pfeil 14">
+            <a:extLst>
+              <a:ext uri="{FF2B5EF4-FFF2-40B4-BE49-F238E27FC236}">
+                <a16:creationId xmlns:a16="http://schemas.microsoft.com/office/drawing/2014/main" id="{4EA1706D-9640-5AF0-363F-9A2FF6A3CA48}"/>
+              </a:ext>
+            </a:extLst>
+          </p:cNvPr>
+          <p:cNvCxnSpPr>
+            <a:cxnSpLocks/>
+          </p:cNvCxnSpPr>
+          <p:nvPr/>
+        </p:nvCxnSpPr>
+        <p:spPr>
+          <a:xfrm flipH="1" flipV="1">
+            <a:off x="6049369" y="2229085"/>
+            <a:ext cx="865842" cy="383619"/>
+          </a:xfrm>
+          <a:prstGeom prst="straightConnector1">
+            <a:avLst/>
+          </a:prstGeom>
+          <a:ln w="25400">
+            <a:solidFill>
+              <a:srgbClr val="00FF00"/>
+            </a:solidFill>
+            <a:tailEnd type="triangle"/>
+          </a:ln>
+        </p:spPr>
+        <p:style>
+          <a:lnRef idx="2">
+            <a:schemeClr val="accent1"/>
+          </a:lnRef>
+          <a:fillRef idx="0">
+            <a:schemeClr val="accent1"/>
+          </a:fillRef>
+          <a:effectRef idx="1">
+            <a:schemeClr val="accent1"/>
+          </a:effectRef>
+          <a:fontRef idx="minor">
+            <a:schemeClr val="tx1"/>
+          </a:fontRef>
+        </p:style>
+      </p:cxnSp>
+      <p:sp>
+        <p:nvSpPr>
+          <p:cNvPr id="20" name="Textfeld 19">
+            <a:extLst>
+              <a:ext uri="{FF2B5EF4-FFF2-40B4-BE49-F238E27FC236}">
+                <a16:creationId xmlns:a16="http://schemas.microsoft.com/office/drawing/2014/main" id="{132FFD1F-1FE5-3448-F493-33AF0A3664B7}"/>
+              </a:ext>
+            </a:extLst>
+          </p:cNvPr>
+          <p:cNvSpPr txBox="1"/>
+          <p:nvPr/>
+        </p:nvSpPr>
+        <p:spPr>
+          <a:xfrm>
+            <a:off x="8321964" y="2285604"/>
+            <a:ext cx="2295237" cy="646331"/>
+          </a:xfrm>
+          <a:prstGeom prst="rect">
+            <a:avLst/>
+          </a:prstGeom>
+          <a:noFill/>
+        </p:spPr>
+        <p:txBody>
+          <a:bodyPr wrap="square" rtlCol="0">
+            <a:spAutoFit/>
+          </a:bodyPr>
+          <a:lstStyle/>
+          <a:p>
+            <a:r>
+              <a:rPr lang="de-DE" dirty="0"/>
+              <a:t>Adresslabel-Rollen</a:t>
+            </a:r>
+          </a:p>
+          <a:p>
+            <a:r>
+              <a:rPr lang="de-DE" dirty="0"/>
+              <a:t>(Blanko-Sticker)</a:t>
+            </a:r>
+          </a:p>
+        </p:txBody>
+      </p:sp>
+      <p:cxnSp>
+        <p:nvCxnSpPr>
+          <p:cNvPr id="22" name="Gerade Verbindung mit Pfeil 21">
+            <a:extLst>
+              <a:ext uri="{FF2B5EF4-FFF2-40B4-BE49-F238E27FC236}">
+                <a16:creationId xmlns:a16="http://schemas.microsoft.com/office/drawing/2014/main" id="{29786450-923A-E053-E79A-8290A1F03953}"/>
+              </a:ext>
+            </a:extLst>
+          </p:cNvPr>
+          <p:cNvCxnSpPr>
+            <a:cxnSpLocks/>
+          </p:cNvCxnSpPr>
+          <p:nvPr/>
+        </p:nvCxnSpPr>
+        <p:spPr>
+          <a:xfrm flipH="1" flipV="1">
+            <a:off x="3823855" y="3258585"/>
+            <a:ext cx="3551035" cy="830032"/>
+          </a:xfrm>
+          <a:prstGeom prst="straightConnector1">
+            <a:avLst/>
+          </a:prstGeom>
+          <a:ln w="25400">
+            <a:solidFill>
+              <a:srgbClr val="00FF00"/>
+            </a:solidFill>
+            <a:tailEnd type="triangle"/>
+          </a:ln>
+        </p:spPr>
+        <p:style>
+          <a:lnRef idx="2">
+            <a:schemeClr val="accent1"/>
+          </a:lnRef>
+          <a:fillRef idx="0">
+            <a:schemeClr val="accent1"/>
+          </a:fillRef>
+          <a:effectRef idx="1">
+            <a:schemeClr val="accent1"/>
+          </a:effectRef>
+          <a:fontRef idx="minor">
+            <a:schemeClr val="tx1"/>
+          </a:fontRef>
+        </p:style>
+      </p:cxnSp>
+      <p:sp>
+        <p:nvSpPr>
+          <p:cNvPr id="27" name="Textfeld 26">
+            <a:extLst>
+              <a:ext uri="{FF2B5EF4-FFF2-40B4-BE49-F238E27FC236}">
+                <a16:creationId xmlns:a16="http://schemas.microsoft.com/office/drawing/2014/main" id="{41795F51-BD39-C812-AECC-12BBE0CB2E34}"/>
+              </a:ext>
+            </a:extLst>
+          </p:cNvPr>
+          <p:cNvSpPr txBox="1"/>
+          <p:nvPr/>
+        </p:nvSpPr>
+        <p:spPr>
+          <a:xfrm>
+            <a:off x="8335465" y="3914355"/>
+            <a:ext cx="2295237" cy="369332"/>
+          </a:xfrm>
+          <a:prstGeom prst="rect">
+            <a:avLst/>
+          </a:prstGeom>
+          <a:noFill/>
+        </p:spPr>
+        <p:txBody>
+          <a:bodyPr wrap="square" rtlCol="0">
+            <a:spAutoFit/>
+          </a:bodyPr>
+          <a:lstStyle/>
+          <a:p>
+            <a:r>
+              <a:rPr lang="de-DE" dirty="0"/>
+              <a:t>Adresslabel-Drucker</a:t>
+            </a:r>
+          </a:p>
+        </p:txBody>
+      </p:sp>
+      <p:cxnSp>
+        <p:nvCxnSpPr>
+          <p:cNvPr id="29" name="Gerade Verbindung mit Pfeil 28">
+            <a:extLst>
+              <a:ext uri="{FF2B5EF4-FFF2-40B4-BE49-F238E27FC236}">
+                <a16:creationId xmlns:a16="http://schemas.microsoft.com/office/drawing/2014/main" id="{5DDCBACC-93FC-6EF3-61D3-22C6BF7FA4F1}"/>
+              </a:ext>
+            </a:extLst>
+          </p:cNvPr>
+          <p:cNvCxnSpPr>
+            <a:cxnSpLocks/>
+          </p:cNvCxnSpPr>
+          <p:nvPr/>
+        </p:nvCxnSpPr>
+        <p:spPr>
+          <a:xfrm flipH="1" flipV="1">
+            <a:off x="3075710" y="4650876"/>
+            <a:ext cx="5246254" cy="155741"/>
+          </a:xfrm>
+          <a:prstGeom prst="straightConnector1">
+            <a:avLst/>
+          </a:prstGeom>
+          <a:ln w="25400">
+            <a:solidFill>
+              <a:srgbClr val="00FF00"/>
+            </a:solidFill>
             <a:tailEnd type="triangle"/>
           </a:ln>
         </p:spPr>
@@ -5577,10 +5234,10 @@
       </p:cxnSp>
       <p:cxnSp>
         <p:nvCxnSpPr>
-          <p:cNvPr id="27" name="Gerade Verbindung mit Pfeil 26">
-            <a:extLst>
-              <a:ext uri="{FF2B5EF4-FFF2-40B4-BE49-F238E27FC236}">
-                <a16:creationId xmlns:a16="http://schemas.microsoft.com/office/drawing/2014/main" id="{8A18EFB3-F57E-9178-152C-2939DCB86267}"/>
+          <p:cNvPr id="49" name="Gerade Verbindung mit Pfeil 48">
+            <a:extLst>
+              <a:ext uri="{FF2B5EF4-FFF2-40B4-BE49-F238E27FC236}">
+                <a16:creationId xmlns:a16="http://schemas.microsoft.com/office/drawing/2014/main" id="{E6813169-BC7C-94AA-DB94-2B12D47A69F7}"/>
               </a:ext>
             </a:extLst>
           </p:cNvPr>
@@ -5591,8 +5248,8 @@
         </p:nvCxnSpPr>
         <p:spPr>
           <a:xfrm flipH="1">
-            <a:off x="871817" y="4394938"/>
-            <a:ext cx="427756" cy="50689"/>
+            <a:off x="7555346" y="1766032"/>
+            <a:ext cx="780119" cy="0"/>
           </a:xfrm>
           <a:prstGeom prst="straightConnector1">
             <a:avLst/>
@@ -5601,8 +5258,7 @@
             <a:solidFill>
               <a:srgbClr val="00FF00"/>
             </a:solidFill>
-            <a:prstDash val="sysDot"/>
-            <a:tailEnd type="triangle"/>
+            <a:tailEnd type="none"/>
           </a:ln>
         </p:spPr>
         <p:style>
@@ -5622,10 +5278,10 @@
       </p:cxnSp>
       <p:cxnSp>
         <p:nvCxnSpPr>
-          <p:cNvPr id="28" name="Gerade Verbindung mit Pfeil 27">
-            <a:extLst>
-              <a:ext uri="{FF2B5EF4-FFF2-40B4-BE49-F238E27FC236}">
-                <a16:creationId xmlns:a16="http://schemas.microsoft.com/office/drawing/2014/main" id="{F993F038-96B5-28AC-19DB-199A2015773E}"/>
+          <p:cNvPr id="54" name="Gerade Verbindung mit Pfeil 53">
+            <a:extLst>
+              <a:ext uri="{FF2B5EF4-FFF2-40B4-BE49-F238E27FC236}">
+                <a16:creationId xmlns:a16="http://schemas.microsoft.com/office/drawing/2014/main" id="{9E23F57D-CBDB-0BEE-BFE2-334AF659228F}"/>
               </a:ext>
             </a:extLst>
           </p:cNvPr>
@@ -5635,19 +5291,18 @@
           <p:nvPr/>
         </p:nvCxnSpPr>
         <p:spPr>
-          <a:xfrm>
-            <a:off x="1399244" y="4587338"/>
-            <a:ext cx="0" cy="514266"/>
+          <a:xfrm flipH="1">
+            <a:off x="6915211" y="2600738"/>
+            <a:ext cx="1420254" cy="0"/>
           </a:xfrm>
           <a:prstGeom prst="straightConnector1">
             <a:avLst/>
           </a:prstGeom>
           <a:ln w="25400">
             <a:solidFill>
-              <a:srgbClr val="FF0000"/>
+              <a:srgbClr val="00FF00"/>
             </a:solidFill>
-            <a:prstDash val="sysDot"/>
-            <a:tailEnd type="triangle"/>
+            <a:tailEnd type="none"/>
           </a:ln>
         </p:spPr>
         <p:style>
@@ -5667,10 +5322,10 @@
       </p:cxnSp>
       <p:cxnSp>
         <p:nvCxnSpPr>
-          <p:cNvPr id="31" name="Gerade Verbindung mit Pfeil 30">
-            <a:extLst>
-              <a:ext uri="{FF2B5EF4-FFF2-40B4-BE49-F238E27FC236}">
-                <a16:creationId xmlns:a16="http://schemas.microsoft.com/office/drawing/2014/main" id="{848B2089-9543-F77C-0072-AC9361385C6D}"/>
+          <p:cNvPr id="57" name="Gerade Verbindung mit Pfeil 56">
+            <a:extLst>
+              <a:ext uri="{FF2B5EF4-FFF2-40B4-BE49-F238E27FC236}">
+                <a16:creationId xmlns:a16="http://schemas.microsoft.com/office/drawing/2014/main" id="{E77E53DD-F397-806F-2F47-261E2CEA60D6}"/>
               </a:ext>
             </a:extLst>
           </p:cNvPr>
@@ -5680,18 +5335,18 @@
           <p:nvPr/>
         </p:nvCxnSpPr>
         <p:spPr>
-          <a:xfrm>
-            <a:off x="1425494" y="3789116"/>
-            <a:ext cx="0" cy="332235"/>
+          <a:xfrm flipH="1">
+            <a:off x="7374890" y="4088617"/>
+            <a:ext cx="947074" cy="0"/>
           </a:xfrm>
           <a:prstGeom prst="straightConnector1">
             <a:avLst/>
           </a:prstGeom>
-          <a:ln>
+          <a:ln w="25400">
             <a:solidFill>
-              <a:srgbClr val="FF0000"/>
+              <a:srgbClr val="00FF00"/>
             </a:solidFill>
-            <a:tailEnd type="triangle"/>
+            <a:tailEnd type="none"/>
           </a:ln>
         </p:spPr>
         <p:style>
@@ -5711,10 +5366,10 @@
       </p:cxnSp>
       <p:sp>
         <p:nvSpPr>
-          <p:cNvPr id="33" name="Textfeld 32">
-            <a:extLst>
-              <a:ext uri="{FF2B5EF4-FFF2-40B4-BE49-F238E27FC236}">
-                <a16:creationId xmlns:a16="http://schemas.microsoft.com/office/drawing/2014/main" id="{06E67DA9-E8D0-3A40-DBB4-FC0438591899}"/>
+          <p:cNvPr id="59" name="Textfeld 58">
+            <a:extLst>
+              <a:ext uri="{FF2B5EF4-FFF2-40B4-BE49-F238E27FC236}">
+                <a16:creationId xmlns:a16="http://schemas.microsoft.com/office/drawing/2014/main" id="{C2DE509A-7BB0-01C7-45EC-2D75FCE98835}"/>
               </a:ext>
             </a:extLst>
           </p:cNvPr>
@@ -5723,8 +5378,8 @@
         </p:nvSpPr>
         <p:spPr>
           <a:xfrm>
-            <a:off x="267232" y="2884262"/>
-            <a:ext cx="2115127" cy="923330"/>
+            <a:off x="463519" y="400077"/>
+            <a:ext cx="10397138" cy="830997"/>
           </a:xfrm>
           <a:prstGeom prst="rect">
             <a:avLst/>
@@ -5737,136 +5392,212 @@
           </a:bodyPr>
           <a:lstStyle/>
           <a:p>
-            <a:pPr algn="ctr"/>
-            <a:r>
-              <a:rPr lang="de-DE" dirty="0"/>
-              <a:t>Kickout (KO)</a:t>
-            </a:r>
-          </a:p>
-          <a:p>
-            <a:pPr algn="ctr"/>
-            <a:r>
-              <a:rPr lang="de-DE" dirty="0"/>
-              <a:t>wenn weight:</a:t>
-            </a:r>
-          </a:p>
-          <a:p>
-            <a:pPr algn="ctr"/>
-            <a:r>
-              <a:rPr lang="de-DE" dirty="0"/>
-              <a:t>EXP  !=  ACT</a:t>
-            </a:r>
-          </a:p>
-        </p:txBody>
-      </p:sp>
-      <p:sp>
-        <p:nvSpPr>
-          <p:cNvPr id="35" name="Textfeld 34">
-            <a:extLst>
-              <a:ext uri="{FF2B5EF4-FFF2-40B4-BE49-F238E27FC236}">
-                <a16:creationId xmlns:a16="http://schemas.microsoft.com/office/drawing/2014/main" id="{94888D6D-EBE0-A4CF-E266-6CF6B03693F4}"/>
-              </a:ext>
-            </a:extLst>
-          </p:cNvPr>
-          <p:cNvSpPr txBox="1"/>
-          <p:nvPr/>
-        </p:nvSpPr>
-        <p:spPr>
-          <a:xfrm>
-            <a:off x="481157" y="269571"/>
-            <a:ext cx="8047527" cy="584775"/>
-          </a:xfrm>
-          <a:prstGeom prst="rect">
-            <a:avLst/>
-          </a:prstGeom>
-          <a:noFill/>
-        </p:spPr>
-        <p:txBody>
-          <a:bodyPr wrap="square" rtlCol="0">
-            <a:spAutoFit/>
-          </a:bodyPr>
-          <a:lstStyle/>
-          <a:p>
             <a:r>
               <a:rPr lang="de-DE" sz="3200" dirty="0"/>
-              <a:t>Label-Maschine &amp; </a:t>
-            </a:r>
-            <a:r>
-              <a:rPr lang="de-DE" sz="3200" dirty="0" err="1"/>
-              <a:t>Kickoutprocess</a:t>
-            </a:r>
-            <a:endParaRPr lang="de-DE" sz="3200" dirty="0"/>
-          </a:p>
-        </p:txBody>
-      </p:sp>
-      <p:sp>
-        <p:nvSpPr>
-          <p:cNvPr id="3" name="Textfeld 2">
-            <a:extLst>
-              <a:ext uri="{FF2B5EF4-FFF2-40B4-BE49-F238E27FC236}">
-                <a16:creationId xmlns:a16="http://schemas.microsoft.com/office/drawing/2014/main" id="{C00DEFC9-CC83-3A00-0632-55559A6839A9}"/>
-              </a:ext>
-            </a:extLst>
-          </p:cNvPr>
-          <p:cNvSpPr txBox="1"/>
-          <p:nvPr/>
-        </p:nvSpPr>
-        <p:spPr>
-          <a:xfrm>
-            <a:off x="361695" y="2294389"/>
-            <a:ext cx="2020664" cy="561692"/>
-          </a:xfrm>
-          <a:prstGeom prst="rect">
-            <a:avLst/>
-          </a:prstGeom>
-          <a:solidFill>
-            <a:srgbClr val="C00000"/>
-          </a:solidFill>
-        </p:spPr>
-        <p:txBody>
-          <a:bodyPr wrap="square">
-            <a:spAutoFit/>
-          </a:bodyPr>
-          <a:lstStyle/>
-          <a:p>
-            <a:r>
-              <a:rPr lang="de-DE" sz="1250" dirty="0" err="1">
+              <a:t>Label-Maschine  (Labelmachine) =&gt; Versand-Abfertigung)</a:t>
+            </a:r>
+          </a:p>
+          <a:p>
+            <a:r>
+              <a:rPr lang="de-DE" sz="1600" dirty="0">
+                <a:solidFill>
+                  <a:schemeClr val="bg1"/>
+                </a:solidFill>
+                <a:highlight>
+                  <a:srgbClr val="FF0000"/>
+                </a:highlight>
+              </a:rPr>
+              <a:t> Logfile-Erzeugung</a:t>
+            </a:r>
+            <a:r>
+              <a:rPr lang="de-DE" sz="1600" dirty="0">
                 <a:solidFill>
                   <a:schemeClr val="bg1"/>
                 </a:solidFill>
               </a:rPr>
-              <a:t>Packetproblemerkennung</a:t>
-            </a:r>
-            <a:endParaRPr lang="de-DE" sz="1250" dirty="0">
-              <a:solidFill>
-                <a:schemeClr val="bg1"/>
-              </a:solidFill>
-            </a:endParaRPr>
-          </a:p>
-          <a:p>
-            <a:r>
-              <a:rPr lang="de-DE" sz="1800" dirty="0" err="1">
-                <a:solidFill>
-                  <a:schemeClr val="bg1"/>
-                </a:solidFill>
-              </a:rPr>
-              <a:t>Machine</a:t>
-            </a:r>
-            <a:r>
-              <a:rPr lang="de-DE" sz="1800" dirty="0">
-                <a:solidFill>
-                  <a:schemeClr val="bg1"/>
-                </a:solidFill>
-              </a:rPr>
-              <a:t>-Learning</a:t>
-            </a:r>
+              <a:t> </a:t>
+            </a:r>
+          </a:p>
+        </p:txBody>
+      </p:sp>
+      <p:sp>
+        <p:nvSpPr>
+          <p:cNvPr id="6" name="Ellipse 5">
+            <a:extLst>
+              <a:ext uri="{FF2B5EF4-FFF2-40B4-BE49-F238E27FC236}">
+                <a16:creationId xmlns:a16="http://schemas.microsoft.com/office/drawing/2014/main" id="{B067621C-7DF7-2162-F8E6-15837114BFBB}"/>
+              </a:ext>
+            </a:extLst>
+          </p:cNvPr>
+          <p:cNvSpPr/>
+          <p:nvPr/>
+        </p:nvSpPr>
+        <p:spPr>
+          <a:xfrm>
+            <a:off x="6915210" y="1881866"/>
+            <a:ext cx="511665" cy="341633"/>
+          </a:xfrm>
+          <a:prstGeom prst="ellipse">
+            <a:avLst/>
+          </a:prstGeom>
+          <a:noFill/>
+          <a:ln>
+            <a:solidFill>
+              <a:srgbClr val="00FF00"/>
+            </a:solidFill>
+          </a:ln>
+        </p:spPr>
+        <p:style>
+          <a:lnRef idx="2">
+            <a:schemeClr val="accent1">
+              <a:shade val="15000"/>
+            </a:schemeClr>
+          </a:lnRef>
+          <a:fillRef idx="1">
+            <a:schemeClr val="accent1"/>
+          </a:fillRef>
+          <a:effectRef idx="0">
+            <a:schemeClr val="accent1"/>
+          </a:effectRef>
+          <a:fontRef idx="minor">
+            <a:schemeClr val="lt1"/>
+          </a:fontRef>
+        </p:style>
+        <p:txBody>
+          <a:bodyPr rtlCol="0" anchor="ctr"/>
+          <a:lstStyle/>
+          <a:p>
+            <a:pPr algn="ctr"/>
+            <a:endParaRPr lang="de-DE"/>
+          </a:p>
+        </p:txBody>
+      </p:sp>
+      <p:sp>
+        <p:nvSpPr>
+          <p:cNvPr id="2" name="Textfeld 1">
+            <a:extLst>
+              <a:ext uri="{FF2B5EF4-FFF2-40B4-BE49-F238E27FC236}">
+                <a16:creationId xmlns:a16="http://schemas.microsoft.com/office/drawing/2014/main" id="{0E4E1E2C-BFC7-CD38-EF9E-7DFF4A3C2A98}"/>
+              </a:ext>
+            </a:extLst>
+          </p:cNvPr>
+          <p:cNvSpPr txBox="1"/>
+          <p:nvPr/>
+        </p:nvSpPr>
+        <p:spPr>
+          <a:xfrm>
+            <a:off x="8321964" y="1827450"/>
+            <a:ext cx="2944134" cy="415498"/>
+          </a:xfrm>
+          <a:prstGeom prst="rect">
+            <a:avLst/>
+          </a:prstGeom>
+          <a:noFill/>
+        </p:spPr>
+        <p:txBody>
+          <a:bodyPr wrap="square" rtlCol="0">
+            <a:spAutoFit/>
+          </a:bodyPr>
+          <a:lstStyle/>
+          <a:p>
+            <a:r>
+              <a:rPr lang="de-DE" sz="1050" dirty="0"/>
+              <a:t>Strichcodesticker (Kundenbestell-Daten)   </a:t>
+            </a:r>
+          </a:p>
+          <a:p>
+            <a:r>
+              <a:rPr lang="de-DE" sz="1050" dirty="0"/>
+              <a:t>&amp;   Verpackungsbarcode</a:t>
+            </a:r>
+          </a:p>
+        </p:txBody>
+      </p:sp>
+      <p:sp>
+        <p:nvSpPr>
+          <p:cNvPr id="4" name="Textfeld 3">
+            <a:extLst>
+              <a:ext uri="{FF2B5EF4-FFF2-40B4-BE49-F238E27FC236}">
+                <a16:creationId xmlns:a16="http://schemas.microsoft.com/office/drawing/2014/main" id="{2F3338DB-2BC1-71B7-C22D-D685CF05468C}"/>
+              </a:ext>
+            </a:extLst>
+          </p:cNvPr>
+          <p:cNvSpPr txBox="1"/>
+          <p:nvPr/>
+        </p:nvSpPr>
+        <p:spPr>
+          <a:xfrm>
+            <a:off x="8185531" y="6203853"/>
+            <a:ext cx="3468252" cy="369332"/>
+          </a:xfrm>
+          <a:prstGeom prst="rect">
+            <a:avLst/>
+          </a:prstGeom>
+          <a:noFill/>
+        </p:spPr>
+        <p:txBody>
+          <a:bodyPr wrap="square" rtlCol="0">
+            <a:spAutoFit/>
+          </a:bodyPr>
+          <a:lstStyle/>
+          <a:p>
+            <a:r>
+              <a:rPr lang="de-DE" dirty="0"/>
+              <a:t>Labelmaschine &amp; QA-Kontrolle</a:t>
+            </a:r>
+          </a:p>
+        </p:txBody>
+      </p:sp>
+      <p:sp>
+        <p:nvSpPr>
+          <p:cNvPr id="7" name="Pfeil: nach rechts 6">
+            <a:extLst>
+              <a:ext uri="{FF2B5EF4-FFF2-40B4-BE49-F238E27FC236}">
+                <a16:creationId xmlns:a16="http://schemas.microsoft.com/office/drawing/2014/main" id="{E4728521-AE92-A11E-FA09-FF1F143453AC}"/>
+              </a:ext>
+            </a:extLst>
+          </p:cNvPr>
+          <p:cNvSpPr/>
+          <p:nvPr/>
+        </p:nvSpPr>
+        <p:spPr>
+          <a:xfrm>
+            <a:off x="11342733" y="6172949"/>
+            <a:ext cx="570345" cy="402340"/>
+          </a:xfrm>
+          <a:prstGeom prst="rightArrow">
+            <a:avLst/>
+          </a:prstGeom>
+        </p:spPr>
+        <p:style>
+          <a:lnRef idx="2">
+            <a:schemeClr val="accent1">
+              <a:shade val="15000"/>
+            </a:schemeClr>
+          </a:lnRef>
+          <a:fillRef idx="1">
+            <a:schemeClr val="accent1"/>
+          </a:fillRef>
+          <a:effectRef idx="0">
+            <a:schemeClr val="accent1"/>
+          </a:effectRef>
+          <a:fontRef idx="minor">
+            <a:schemeClr val="lt1"/>
+          </a:fontRef>
+        </p:style>
+        <p:txBody>
+          <a:bodyPr rtlCol="0" anchor="ctr"/>
+          <a:lstStyle/>
+          <a:p>
+            <a:pPr algn="ctr"/>
+            <a:endParaRPr lang="de-DE"/>
           </a:p>
         </p:txBody>
       </p:sp>
     </p:spTree>
     <p:extLst>
       <p:ext uri="{BB962C8B-B14F-4D97-AF65-F5344CB8AC3E}">
-        <p14:creationId xmlns:p14="http://schemas.microsoft.com/office/powerpoint/2010/main" val="359237405"/>
+        <p14:creationId xmlns:p14="http://schemas.microsoft.com/office/powerpoint/2010/main" val="3223449868"/>
       </p:ext>
     </p:extLst>
   </p:cSld>
@@ -5893,45 +5624,12 @@
           <a:chExt cx="0" cy="0"/>
         </a:xfrm>
       </p:grpSpPr>
-      <p:sp>
-        <p:nvSpPr>
-          <p:cNvPr id="2" name="Titel 1">
-            <a:extLst>
-              <a:ext uri="{FF2B5EF4-FFF2-40B4-BE49-F238E27FC236}">
-                <a16:creationId xmlns:a16="http://schemas.microsoft.com/office/drawing/2014/main" id="{AF5DA710-7168-EB00-79B6-37454B75FF5C}"/>
-              </a:ext>
-            </a:extLst>
-          </p:cNvPr>
-          <p:cNvSpPr>
-            <a:spLocks noGrp="1"/>
-          </p:cNvSpPr>
-          <p:nvPr>
-            <p:ph type="title"/>
-          </p:nvPr>
-        </p:nvSpPr>
-        <p:spPr>
-          <a:xfrm>
-            <a:off x="437072" y="277771"/>
-            <a:ext cx="10515600" cy="1325563"/>
-          </a:xfrm>
-        </p:spPr>
-        <p:txBody>
-          <a:bodyPr/>
-          <a:lstStyle/>
-          <a:p>
-            <a:r>
-              <a:rPr lang="de-DE" dirty="0"/>
-              <a:t>Insight Log-Data</a:t>
-            </a:r>
-          </a:p>
-        </p:txBody>
-      </p:sp>
       <p:pic>
         <p:nvPicPr>
-          <p:cNvPr id="4" name="Grafik 3">
-            <a:extLst>
-              <a:ext uri="{FF2B5EF4-FFF2-40B4-BE49-F238E27FC236}">
-                <a16:creationId xmlns:a16="http://schemas.microsoft.com/office/drawing/2014/main" id="{DB5B1C7A-542E-D029-CEB3-F2F7C8509450}"/>
+          <p:cNvPr id="9" name="Grafik 8" descr="Ein Bild, das Bautechnik, Stahl, Fabrik, Werkzeugraum enthält.&#10;&#10;KI-generierte Inhalte können fehlerhaft sein.">
+            <a:extLst>
+              <a:ext uri="{FF2B5EF4-FFF2-40B4-BE49-F238E27FC236}">
+                <a16:creationId xmlns:a16="http://schemas.microsoft.com/office/drawing/2014/main" id="{C06E13C1-CF15-813E-DB61-7D5AB7460898}"/>
               </a:ext>
             </a:extLst>
           </p:cNvPr>
@@ -5941,27 +5639,127 @@
           <p:nvPr/>
         </p:nvPicPr>
         <p:blipFill>
-          <a:blip r:embed="rId2"/>
+          <a:blip r:embed="rId2">
+            <a:extLst>
+              <a:ext uri="{28A0092B-C50C-407E-A947-70E740481C1C}">
+                <a14:useLocalDpi xmlns:a14="http://schemas.microsoft.com/office/drawing/2010/main" val="0"/>
+              </a:ext>
+            </a:extLst>
+          </a:blip>
           <a:stretch>
             <a:fillRect/>
           </a:stretch>
         </p:blipFill>
         <p:spPr>
           <a:xfrm>
-            <a:off x="437072" y="2572115"/>
-            <a:ext cx="11260347" cy="1238209"/>
+            <a:off x="2664894" y="955301"/>
+            <a:ext cx="7144747" cy="5353797"/>
           </a:xfrm>
           <a:prstGeom prst="rect">
             <a:avLst/>
           </a:prstGeom>
         </p:spPr>
       </p:pic>
+      <p:sp>
+        <p:nvSpPr>
+          <p:cNvPr id="10" name="Pfeil: gestreift nach rechts 9">
+            <a:extLst>
+              <a:ext uri="{FF2B5EF4-FFF2-40B4-BE49-F238E27FC236}">
+                <a16:creationId xmlns:a16="http://schemas.microsoft.com/office/drawing/2014/main" id="{464474A5-66D7-9991-26A0-7987FB26CDB6}"/>
+              </a:ext>
+            </a:extLst>
+          </p:cNvPr>
+          <p:cNvSpPr/>
+          <p:nvPr/>
+        </p:nvSpPr>
+        <p:spPr>
+          <a:xfrm rot="21115646" flipH="1">
+            <a:off x="4908979" y="4111041"/>
+            <a:ext cx="3094557" cy="866498"/>
+          </a:xfrm>
+          <a:prstGeom prst="stripedRightArrow">
+            <a:avLst/>
+          </a:prstGeom>
+          <a:solidFill>
+            <a:srgbClr val="00FF00"/>
+          </a:solidFill>
+        </p:spPr>
+        <p:style>
+          <a:lnRef idx="2">
+            <a:schemeClr val="accent1">
+              <a:shade val="15000"/>
+            </a:schemeClr>
+          </a:lnRef>
+          <a:fillRef idx="1">
+            <a:schemeClr val="accent1"/>
+          </a:fillRef>
+          <a:effectRef idx="0">
+            <a:schemeClr val="accent1"/>
+          </a:effectRef>
+          <a:fontRef idx="minor">
+            <a:schemeClr val="lt1"/>
+          </a:fontRef>
+        </p:style>
+        <p:txBody>
+          <a:bodyPr rtlCol="0" anchor="ctr"/>
+          <a:lstStyle/>
+          <a:p>
+            <a:pPr algn="ctr"/>
+            <a:r>
+              <a:rPr lang="de-DE" dirty="0"/>
+              <a:t>Laufrichtung  </a:t>
+            </a:r>
+            <a:r>
+              <a:rPr lang="de-DE" dirty="0">
+                <a:sym typeface="Wingdings" panose="05000000000000000000" pitchFamily="2" charset="2"/>
+              </a:rPr>
+              <a:t></a:t>
+            </a:r>
+            <a:endParaRPr lang="de-DE" dirty="0"/>
+          </a:p>
+        </p:txBody>
+      </p:sp>
+      <p:sp>
+        <p:nvSpPr>
+          <p:cNvPr id="11" name="Textfeld 10">
+            <a:extLst>
+              <a:ext uri="{FF2B5EF4-FFF2-40B4-BE49-F238E27FC236}">
+                <a16:creationId xmlns:a16="http://schemas.microsoft.com/office/drawing/2014/main" id="{06C2C856-C246-B5B3-1024-307E33157E90}"/>
+              </a:ext>
+            </a:extLst>
+          </p:cNvPr>
+          <p:cNvSpPr txBox="1"/>
+          <p:nvPr/>
+        </p:nvSpPr>
+        <p:spPr>
+          <a:xfrm>
+            <a:off x="9693359" y="407235"/>
+            <a:ext cx="2295237" cy="369332"/>
+          </a:xfrm>
+          <a:prstGeom prst="rect">
+            <a:avLst/>
+          </a:prstGeom>
+          <a:noFill/>
+        </p:spPr>
+        <p:txBody>
+          <a:bodyPr wrap="square" rtlCol="0">
+            <a:spAutoFit/>
+          </a:bodyPr>
+          <a:lstStyle/>
+          <a:p>
+            <a:r>
+              <a:rPr lang="de-DE" dirty="0"/>
+              <a:t>Scanner in Aktion</a:t>
+            </a:r>
+          </a:p>
+        </p:txBody>
+      </p:sp>
       <p:cxnSp>
         <p:nvCxnSpPr>
-          <p:cNvPr id="5" name="Gerade Verbindung mit Pfeil 4">
-            <a:extLst>
-              <a:ext uri="{FF2B5EF4-FFF2-40B4-BE49-F238E27FC236}">
-                <a16:creationId xmlns:a16="http://schemas.microsoft.com/office/drawing/2014/main" id="{DC667D10-A414-B0A9-80D8-C5E3C9163BFB}"/>
+          <p:cNvPr id="12" name="Gerade Verbindung mit Pfeil 11">
+            <a:extLst>
+              <a:ext uri="{FF2B5EF4-FFF2-40B4-BE49-F238E27FC236}">
+                <a16:creationId xmlns:a16="http://schemas.microsoft.com/office/drawing/2014/main" id="{C3B64FA5-D51A-26B9-7819-A6CD22C09E84}"/>
               </a:ext>
             </a:extLst>
           </p:cNvPr>
@@ -5972,16 +5770,281 @@
         </p:nvCxnSpPr>
         <p:spPr>
           <a:xfrm flipH="1">
-            <a:off x="726141" y="2048161"/>
-            <a:ext cx="271386" cy="393536"/>
+            <a:off x="8049044" y="776567"/>
+            <a:ext cx="1644315" cy="1033760"/>
           </a:xfrm>
           <a:prstGeom prst="straightConnector1">
             <a:avLst/>
           </a:prstGeom>
-          <a:ln w="12700">
+          <a:ln w="25400">
             <a:solidFill>
-              <a:schemeClr val="tx1"/>
+              <a:srgbClr val="00FF00"/>
             </a:solidFill>
+            <a:tailEnd type="triangle"/>
+          </a:ln>
+        </p:spPr>
+        <p:style>
+          <a:lnRef idx="2">
+            <a:schemeClr val="accent1"/>
+          </a:lnRef>
+          <a:fillRef idx="0">
+            <a:schemeClr val="accent1"/>
+          </a:fillRef>
+          <a:effectRef idx="1">
+            <a:schemeClr val="accent1"/>
+          </a:effectRef>
+          <a:fontRef idx="minor">
+            <a:schemeClr val="tx1"/>
+          </a:fontRef>
+        </p:style>
+      </p:cxnSp>
+      <p:sp>
+        <p:nvSpPr>
+          <p:cNvPr id="18" name="Ellipse 17">
+            <a:extLst>
+              <a:ext uri="{FF2B5EF4-FFF2-40B4-BE49-F238E27FC236}">
+                <a16:creationId xmlns:a16="http://schemas.microsoft.com/office/drawing/2014/main" id="{356BBC1A-522C-9EF7-83D1-BC4A0FFAB297}"/>
+              </a:ext>
+            </a:extLst>
+          </p:cNvPr>
+          <p:cNvSpPr/>
+          <p:nvPr/>
+        </p:nvSpPr>
+        <p:spPr>
+          <a:xfrm>
+            <a:off x="7313925" y="1496292"/>
+            <a:ext cx="1237673" cy="757690"/>
+          </a:xfrm>
+          <a:prstGeom prst="ellipse">
+            <a:avLst/>
+          </a:prstGeom>
+          <a:noFill/>
+          <a:ln>
+            <a:solidFill>
+              <a:srgbClr val="00FF00"/>
+            </a:solidFill>
+          </a:ln>
+        </p:spPr>
+        <p:style>
+          <a:lnRef idx="2">
+            <a:schemeClr val="accent1">
+              <a:shade val="15000"/>
+            </a:schemeClr>
+          </a:lnRef>
+          <a:fillRef idx="1">
+            <a:schemeClr val="accent1"/>
+          </a:fillRef>
+          <a:effectRef idx="0">
+            <a:schemeClr val="accent1"/>
+          </a:effectRef>
+          <a:fontRef idx="minor">
+            <a:schemeClr val="lt1"/>
+          </a:fontRef>
+        </p:style>
+        <p:txBody>
+          <a:bodyPr rtlCol="0" anchor="ctr"/>
+          <a:lstStyle/>
+          <a:p>
+            <a:pPr algn="ctr"/>
+            <a:endParaRPr lang="de-DE"/>
+          </a:p>
+        </p:txBody>
+      </p:sp>
+      <p:sp>
+        <p:nvSpPr>
+          <p:cNvPr id="19" name="Rechteck 18">
+            <a:extLst>
+              <a:ext uri="{FF2B5EF4-FFF2-40B4-BE49-F238E27FC236}">
+                <a16:creationId xmlns:a16="http://schemas.microsoft.com/office/drawing/2014/main" id="{BC7F62CA-78AB-FCFD-17C0-D5867A34FA10}"/>
+              </a:ext>
+            </a:extLst>
+          </p:cNvPr>
+          <p:cNvSpPr/>
+          <p:nvPr/>
+        </p:nvSpPr>
+        <p:spPr>
+          <a:xfrm rot="21295450">
+            <a:off x="495117" y="4197801"/>
+            <a:ext cx="2592577" cy="330687"/>
+          </a:xfrm>
+          <a:prstGeom prst="rect">
+            <a:avLst/>
+          </a:prstGeom>
+          <a:solidFill>
+            <a:srgbClr val="28201E"/>
+          </a:solidFill>
+          <a:ln>
+            <a:noFill/>
+          </a:ln>
+        </p:spPr>
+        <p:style>
+          <a:lnRef idx="2">
+            <a:schemeClr val="accent1">
+              <a:shade val="15000"/>
+            </a:schemeClr>
+          </a:lnRef>
+          <a:fillRef idx="1">
+            <a:schemeClr val="accent1"/>
+          </a:fillRef>
+          <a:effectRef idx="0">
+            <a:schemeClr val="accent1"/>
+          </a:effectRef>
+          <a:fontRef idx="minor">
+            <a:schemeClr val="lt1"/>
+          </a:fontRef>
+        </p:style>
+        <p:txBody>
+          <a:bodyPr rtlCol="0" anchor="ctr"/>
+          <a:lstStyle/>
+          <a:p>
+            <a:pPr algn="ctr"/>
+            <a:endParaRPr lang="de-DE"/>
+          </a:p>
+        </p:txBody>
+      </p:sp>
+      <p:sp>
+        <p:nvSpPr>
+          <p:cNvPr id="20" name="Rechteck 19">
+            <a:extLst>
+              <a:ext uri="{FF2B5EF4-FFF2-40B4-BE49-F238E27FC236}">
+                <a16:creationId xmlns:a16="http://schemas.microsoft.com/office/drawing/2014/main" id="{42723B3F-4EB5-DDD4-74B4-0F2259001371}"/>
+              </a:ext>
+            </a:extLst>
+          </p:cNvPr>
+          <p:cNvSpPr/>
+          <p:nvPr/>
+        </p:nvSpPr>
+        <p:spPr>
+          <a:xfrm rot="16200000">
+            <a:off x="841462" y="4679128"/>
+            <a:ext cx="1117602" cy="330687"/>
+          </a:xfrm>
+          <a:prstGeom prst="rect">
+            <a:avLst/>
+          </a:prstGeom>
+          <a:solidFill>
+            <a:srgbClr val="28201E"/>
+          </a:solidFill>
+          <a:ln>
+            <a:noFill/>
+          </a:ln>
+        </p:spPr>
+        <p:style>
+          <a:lnRef idx="2">
+            <a:schemeClr val="accent1">
+              <a:shade val="15000"/>
+            </a:schemeClr>
+          </a:lnRef>
+          <a:fillRef idx="1">
+            <a:schemeClr val="accent1"/>
+          </a:fillRef>
+          <a:effectRef idx="0">
+            <a:schemeClr val="accent1"/>
+          </a:effectRef>
+          <a:fontRef idx="minor">
+            <a:schemeClr val="lt1"/>
+          </a:fontRef>
+        </p:style>
+        <p:txBody>
+          <a:bodyPr rtlCol="0" anchor="ctr"/>
+          <a:lstStyle/>
+          <a:p>
+            <a:pPr algn="ctr"/>
+            <a:endParaRPr lang="de-DE"/>
+          </a:p>
+        </p:txBody>
+      </p:sp>
+      <p:sp>
+        <p:nvSpPr>
+          <p:cNvPr id="21" name="Rechteck 20">
+            <a:extLst>
+              <a:ext uri="{FF2B5EF4-FFF2-40B4-BE49-F238E27FC236}">
+                <a16:creationId xmlns:a16="http://schemas.microsoft.com/office/drawing/2014/main" id="{18A04283-0B39-2252-3ACF-9E557F8ADC1E}"/>
+              </a:ext>
+            </a:extLst>
+          </p:cNvPr>
+          <p:cNvSpPr/>
+          <p:nvPr/>
+        </p:nvSpPr>
+        <p:spPr>
+          <a:xfrm>
+            <a:off x="532950" y="5392746"/>
+            <a:ext cx="1772759" cy="942109"/>
+          </a:xfrm>
+          <a:prstGeom prst="rect">
+            <a:avLst/>
+          </a:prstGeom>
+          <a:solidFill>
+            <a:srgbClr val="0033CC"/>
+          </a:solidFill>
+          <a:ln w="34925">
+            <a:solidFill>
+              <a:schemeClr val="accent2"/>
+            </a:solidFill>
+          </a:ln>
+        </p:spPr>
+        <p:style>
+          <a:lnRef idx="2">
+            <a:schemeClr val="accent1">
+              <a:shade val="15000"/>
+            </a:schemeClr>
+          </a:lnRef>
+          <a:fillRef idx="1">
+            <a:schemeClr val="accent1"/>
+          </a:fillRef>
+          <a:effectRef idx="0">
+            <a:schemeClr val="accent1"/>
+          </a:effectRef>
+          <a:fontRef idx="minor">
+            <a:schemeClr val="lt1"/>
+          </a:fontRef>
+        </p:style>
+        <p:txBody>
+          <a:bodyPr rtlCol="0" anchor="ctr"/>
+          <a:lstStyle/>
+          <a:p>
+            <a:pPr algn="ctr"/>
+            <a:r>
+              <a:rPr lang="de-DE" dirty="0"/>
+              <a:t>QA</a:t>
+            </a:r>
+          </a:p>
+          <a:p>
+            <a:pPr algn="ctr"/>
+            <a:r>
+              <a:rPr lang="de-DE" dirty="0"/>
+              <a:t>Workstation</a:t>
+            </a:r>
+          </a:p>
+        </p:txBody>
+      </p:sp>
+      <p:cxnSp>
+        <p:nvCxnSpPr>
+          <p:cNvPr id="22" name="Gerade Verbindung mit Pfeil 21">
+            <a:extLst>
+              <a:ext uri="{FF2B5EF4-FFF2-40B4-BE49-F238E27FC236}">
+                <a16:creationId xmlns:a16="http://schemas.microsoft.com/office/drawing/2014/main" id="{18A75901-E06A-57BA-0826-D233AF06C8F1}"/>
+              </a:ext>
+            </a:extLst>
+          </p:cNvPr>
+          <p:cNvCxnSpPr>
+            <a:cxnSpLocks/>
+          </p:cNvCxnSpPr>
+          <p:nvPr/>
+        </p:nvCxnSpPr>
+        <p:spPr>
+          <a:xfrm flipH="1">
+            <a:off x="1827202" y="4285670"/>
+            <a:ext cx="427756" cy="50689"/>
+          </a:xfrm>
+          <a:prstGeom prst="straightConnector1">
+            <a:avLst/>
+          </a:prstGeom>
+          <a:ln w="25400">
+            <a:solidFill>
+              <a:srgbClr val="00FF00"/>
+            </a:solidFill>
+            <a:prstDash val="sysDot"/>
             <a:tailEnd type="triangle"/>
           </a:ln>
         </p:spPr>
@@ -6002,10 +6065,10 @@
       </p:cxnSp>
       <p:cxnSp>
         <p:nvCxnSpPr>
-          <p:cNvPr id="10" name="Gerade Verbindung mit Pfeil 9">
-            <a:extLst>
-              <a:ext uri="{FF2B5EF4-FFF2-40B4-BE49-F238E27FC236}">
-                <a16:creationId xmlns:a16="http://schemas.microsoft.com/office/drawing/2014/main" id="{51954C7B-F901-F892-F1BF-1C034AE3DEB0}"/>
+          <p:cNvPr id="27" name="Gerade Verbindung mit Pfeil 26">
+            <a:extLst>
+              <a:ext uri="{FF2B5EF4-FFF2-40B4-BE49-F238E27FC236}">
+                <a16:creationId xmlns:a16="http://schemas.microsoft.com/office/drawing/2014/main" id="{8A18EFB3-F57E-9178-152C-2939DCB86267}"/>
               </a:ext>
             </a:extLst>
           </p:cNvPr>
@@ -6015,97 +6078,18 @@
           <p:nvPr/>
         </p:nvCxnSpPr>
         <p:spPr>
-          <a:xfrm>
-            <a:off x="2105257" y="2060961"/>
-            <a:ext cx="591761" cy="0"/>
+          <a:xfrm flipH="1">
+            <a:off x="871817" y="4394938"/>
+            <a:ext cx="427756" cy="50689"/>
           </a:xfrm>
           <a:prstGeom prst="straightConnector1">
             <a:avLst/>
           </a:prstGeom>
-          <a:ln w="12700">
+          <a:ln w="25400">
             <a:solidFill>
-              <a:schemeClr val="tx1"/>
+              <a:srgbClr val="00FF00"/>
             </a:solidFill>
-            <a:tailEnd type="none"/>
-          </a:ln>
-        </p:spPr>
-        <p:style>
-          <a:lnRef idx="2">
-            <a:schemeClr val="accent1"/>
-          </a:lnRef>
-          <a:fillRef idx="0">
-            <a:schemeClr val="accent1"/>
-          </a:fillRef>
-          <a:effectRef idx="1">
-            <a:schemeClr val="accent1"/>
-          </a:effectRef>
-          <a:fontRef idx="minor">
-            <a:schemeClr val="tx1"/>
-          </a:fontRef>
-        </p:style>
-      </p:cxnSp>
-      <p:sp>
-        <p:nvSpPr>
-          <p:cNvPr id="13" name="Textfeld 12">
-            <a:extLst>
-              <a:ext uri="{FF2B5EF4-FFF2-40B4-BE49-F238E27FC236}">
-                <a16:creationId xmlns:a16="http://schemas.microsoft.com/office/drawing/2014/main" id="{077361E0-2EFF-D061-1E8C-F52D076B8DEB}"/>
-              </a:ext>
-            </a:extLst>
-          </p:cNvPr>
-          <p:cNvSpPr txBox="1"/>
-          <p:nvPr/>
-        </p:nvSpPr>
-        <p:spPr>
-          <a:xfrm>
-            <a:off x="2003313" y="1841481"/>
-            <a:ext cx="788075" cy="276999"/>
-          </a:xfrm>
-          <a:prstGeom prst="rect">
-            <a:avLst/>
-          </a:prstGeom>
-          <a:noFill/>
-        </p:spPr>
-        <p:txBody>
-          <a:bodyPr wrap="square" rtlCol="0">
-            <a:spAutoFit/>
-          </a:bodyPr>
-          <a:lstStyle/>
-          <a:p>
-            <a:pPr algn="r"/>
-            <a:r>
-              <a:rPr lang="de-DE" sz="1200" dirty="0"/>
-              <a:t>Priorität</a:t>
-            </a:r>
-          </a:p>
-        </p:txBody>
-      </p:sp>
-      <p:cxnSp>
-        <p:nvCxnSpPr>
-          <p:cNvPr id="14" name="Gerade Verbindung mit Pfeil 13">
-            <a:extLst>
-              <a:ext uri="{FF2B5EF4-FFF2-40B4-BE49-F238E27FC236}">
-                <a16:creationId xmlns:a16="http://schemas.microsoft.com/office/drawing/2014/main" id="{33688DFC-30F4-96D0-0C28-44D2C9CB831A}"/>
-              </a:ext>
-            </a:extLst>
-          </p:cNvPr>
-          <p:cNvCxnSpPr>
-            <a:cxnSpLocks/>
-          </p:cNvCxnSpPr>
-          <p:nvPr/>
-        </p:nvCxnSpPr>
-        <p:spPr>
-          <a:xfrm flipH="1">
-            <a:off x="1852286" y="2066023"/>
-            <a:ext cx="252971" cy="406234"/>
-          </a:xfrm>
-          <a:prstGeom prst="straightConnector1">
-            <a:avLst/>
-          </a:prstGeom>
-          <a:ln w="12700">
-            <a:solidFill>
-              <a:schemeClr val="tx1"/>
-            </a:solidFill>
+            <a:prstDash val="sysDot"/>
             <a:tailEnd type="triangle"/>
           </a:ln>
         </p:spPr>
@@ -6126,10 +6110,10 @@
       </p:cxnSp>
       <p:cxnSp>
         <p:nvCxnSpPr>
-          <p:cNvPr id="15" name="Gerade Verbindung mit Pfeil 14">
-            <a:extLst>
-              <a:ext uri="{FF2B5EF4-FFF2-40B4-BE49-F238E27FC236}">
-                <a16:creationId xmlns:a16="http://schemas.microsoft.com/office/drawing/2014/main" id="{2E8C97D5-0B8D-2039-5E41-3AACA9D66653}"/>
+          <p:cNvPr id="28" name="Gerade Verbindung mit Pfeil 27">
+            <a:extLst>
+              <a:ext uri="{FF2B5EF4-FFF2-40B4-BE49-F238E27FC236}">
+                <a16:creationId xmlns:a16="http://schemas.microsoft.com/office/drawing/2014/main" id="{F993F038-96B5-28AC-19DB-199A2015773E}"/>
               </a:ext>
             </a:extLst>
           </p:cNvPr>
@@ -6140,132 +6124,17 @@
         </p:nvCxnSpPr>
         <p:spPr>
           <a:xfrm>
-            <a:off x="2991763" y="2057397"/>
-            <a:ext cx="1229255" cy="0"/>
+            <a:off x="1399244" y="4587338"/>
+            <a:ext cx="0" cy="514266"/>
           </a:xfrm>
           <a:prstGeom prst="straightConnector1">
             <a:avLst/>
           </a:prstGeom>
-          <a:ln w="12700">
+          <a:ln w="25400">
             <a:solidFill>
-              <a:schemeClr val="tx1"/>
+              <a:srgbClr val="FF0000"/>
             </a:solidFill>
-            <a:tailEnd type="none"/>
-          </a:ln>
-        </p:spPr>
-        <p:style>
-          <a:lnRef idx="2">
-            <a:schemeClr val="accent1"/>
-          </a:lnRef>
-          <a:fillRef idx="0">
-            <a:schemeClr val="accent1"/>
-          </a:fillRef>
-          <a:effectRef idx="1">
-            <a:schemeClr val="accent1"/>
-          </a:effectRef>
-          <a:fontRef idx="minor">
-            <a:schemeClr val="tx1"/>
-          </a:fontRef>
-        </p:style>
-      </p:cxnSp>
-      <p:sp>
-        <p:nvSpPr>
-          <p:cNvPr id="20" name="Textfeld 19">
-            <a:extLst>
-              <a:ext uri="{FF2B5EF4-FFF2-40B4-BE49-F238E27FC236}">
-                <a16:creationId xmlns:a16="http://schemas.microsoft.com/office/drawing/2014/main" id="{CE283432-2F39-2D20-2620-8FDF4AE640DB}"/>
-              </a:ext>
-            </a:extLst>
-          </p:cNvPr>
-          <p:cNvSpPr txBox="1"/>
-          <p:nvPr/>
-        </p:nvSpPr>
-        <p:spPr>
-          <a:xfrm>
-            <a:off x="2723103" y="1832245"/>
-            <a:ext cx="1598937" cy="276999"/>
-          </a:xfrm>
-          <a:prstGeom prst="rect">
-            <a:avLst/>
-          </a:prstGeom>
-          <a:noFill/>
-        </p:spPr>
-        <p:txBody>
-          <a:bodyPr wrap="square" rtlCol="0">
-            <a:spAutoFit/>
-          </a:bodyPr>
-          <a:lstStyle/>
-          <a:p>
-            <a:pPr algn="r"/>
-            <a:r>
-              <a:rPr lang="de-DE" sz="1200" dirty="0"/>
-              <a:t>Maschinenbereich</a:t>
-            </a:r>
-          </a:p>
-        </p:txBody>
-      </p:sp>
-      <p:sp>
-        <p:nvSpPr>
-          <p:cNvPr id="25" name="Textfeld 24">
-            <a:extLst>
-              <a:ext uri="{FF2B5EF4-FFF2-40B4-BE49-F238E27FC236}">
-                <a16:creationId xmlns:a16="http://schemas.microsoft.com/office/drawing/2014/main" id="{7F34625A-A1DB-E985-D65C-25FC42083237}"/>
-              </a:ext>
-            </a:extLst>
-          </p:cNvPr>
-          <p:cNvSpPr txBox="1"/>
-          <p:nvPr/>
-        </p:nvSpPr>
-        <p:spPr>
-          <a:xfrm>
-            <a:off x="712684" y="1832245"/>
-            <a:ext cx="1052705" cy="276999"/>
-          </a:xfrm>
-          <a:prstGeom prst="rect">
-            <a:avLst/>
-          </a:prstGeom>
-          <a:noFill/>
-        </p:spPr>
-        <p:txBody>
-          <a:bodyPr wrap="square" rtlCol="0">
-            <a:spAutoFit/>
-          </a:bodyPr>
-          <a:lstStyle/>
-          <a:p>
-            <a:pPr algn="r"/>
-            <a:r>
-              <a:rPr lang="de-DE" sz="1200" dirty="0"/>
-              <a:t>Timestamp</a:t>
-            </a:r>
-          </a:p>
-        </p:txBody>
-      </p:sp>
-      <p:cxnSp>
-        <p:nvCxnSpPr>
-          <p:cNvPr id="27" name="Gerade Verbindung mit Pfeil 26">
-            <a:extLst>
-              <a:ext uri="{FF2B5EF4-FFF2-40B4-BE49-F238E27FC236}">
-                <a16:creationId xmlns:a16="http://schemas.microsoft.com/office/drawing/2014/main" id="{5C056274-23DB-B81C-3878-BEBCB9EB13A9}"/>
-              </a:ext>
-            </a:extLst>
-          </p:cNvPr>
-          <p:cNvCxnSpPr>
-            <a:cxnSpLocks/>
-          </p:cNvCxnSpPr>
-          <p:nvPr/>
-        </p:nvCxnSpPr>
-        <p:spPr>
-          <a:xfrm flipH="1">
-            <a:off x="1337395" y="2048161"/>
-            <a:ext cx="269732" cy="406234"/>
-          </a:xfrm>
-          <a:prstGeom prst="straightConnector1">
-            <a:avLst/>
-          </a:prstGeom>
-          <a:ln w="12700">
-            <a:solidFill>
-              <a:schemeClr val="tx1"/>
-            </a:solidFill>
+            <a:prstDash val="sysDot"/>
             <a:tailEnd type="triangle"/>
           </a:ln>
         </p:spPr>
@@ -6286,10 +6155,10 @@
       </p:cxnSp>
       <p:cxnSp>
         <p:nvCxnSpPr>
-          <p:cNvPr id="30" name="Gerade Verbindung mit Pfeil 29">
-            <a:extLst>
-              <a:ext uri="{FF2B5EF4-FFF2-40B4-BE49-F238E27FC236}">
-                <a16:creationId xmlns:a16="http://schemas.microsoft.com/office/drawing/2014/main" id="{0BF8638A-5F98-025B-0676-9BA18539D51D}"/>
+          <p:cNvPr id="31" name="Gerade Verbindung mit Pfeil 30">
+            <a:extLst>
+              <a:ext uri="{FF2B5EF4-FFF2-40B4-BE49-F238E27FC236}">
+                <a16:creationId xmlns:a16="http://schemas.microsoft.com/office/drawing/2014/main" id="{848B2089-9543-F77C-0072-AC9361385C6D}"/>
               </a:ext>
             </a:extLst>
           </p:cNvPr>
@@ -6300,17 +6169,17 @@
         </p:nvCxnSpPr>
         <p:spPr>
           <a:xfrm>
-            <a:off x="786572" y="2048161"/>
-            <a:ext cx="1005283" cy="0"/>
+            <a:off x="1425494" y="3789116"/>
+            <a:ext cx="0" cy="332235"/>
           </a:xfrm>
           <a:prstGeom prst="straightConnector1">
             <a:avLst/>
           </a:prstGeom>
-          <a:ln w="12700">
+          <a:ln>
             <a:solidFill>
-              <a:schemeClr val="tx1"/>
+              <a:srgbClr val="FF0000"/>
             </a:solidFill>
-            <a:tailEnd type="none"/>
+            <a:tailEnd type="triangle"/>
           </a:ln>
         </p:spPr>
         <p:style>
@@ -6328,144 +6197,12 @@
           </a:fontRef>
         </p:style>
       </p:cxnSp>
-      <p:cxnSp>
-        <p:nvCxnSpPr>
-          <p:cNvPr id="35" name="Gerade Verbindung mit Pfeil 34">
-            <a:extLst>
-              <a:ext uri="{FF2B5EF4-FFF2-40B4-BE49-F238E27FC236}">
-                <a16:creationId xmlns:a16="http://schemas.microsoft.com/office/drawing/2014/main" id="{DF4310CE-F542-FA9E-CBD9-BA723708539D}"/>
-              </a:ext>
-            </a:extLst>
-          </p:cNvPr>
-          <p:cNvCxnSpPr>
-            <a:cxnSpLocks/>
-          </p:cNvCxnSpPr>
-          <p:nvPr/>
-        </p:nvCxnSpPr>
-        <p:spPr>
-          <a:xfrm flipH="1">
-            <a:off x="2655666" y="2057397"/>
-            <a:ext cx="336916" cy="479445"/>
-          </a:xfrm>
-          <a:prstGeom prst="straightConnector1">
-            <a:avLst/>
-          </a:prstGeom>
-          <a:ln w="12700">
-            <a:solidFill>
-              <a:schemeClr val="tx1"/>
-            </a:solidFill>
-            <a:tailEnd type="triangle"/>
-          </a:ln>
-        </p:spPr>
-        <p:style>
-          <a:lnRef idx="2">
-            <a:schemeClr val="accent1"/>
-          </a:lnRef>
-          <a:fillRef idx="0">
-            <a:schemeClr val="accent1"/>
-          </a:fillRef>
-          <a:effectRef idx="1">
-            <a:schemeClr val="accent1"/>
-          </a:effectRef>
-          <a:fontRef idx="minor">
-            <a:schemeClr val="tx1"/>
-          </a:fontRef>
-        </p:style>
-      </p:cxnSp>
-      <p:cxnSp>
-        <p:nvCxnSpPr>
-          <p:cNvPr id="40" name="Gerade Verbindung mit Pfeil 39">
-            <a:extLst>
-              <a:ext uri="{FF2B5EF4-FFF2-40B4-BE49-F238E27FC236}">
-                <a16:creationId xmlns:a16="http://schemas.microsoft.com/office/drawing/2014/main" id="{DCC30585-3466-90EF-5E1D-7BF3B01C9673}"/>
-              </a:ext>
-            </a:extLst>
-          </p:cNvPr>
-          <p:cNvCxnSpPr>
-            <a:cxnSpLocks/>
-          </p:cNvCxnSpPr>
-          <p:nvPr/>
-        </p:nvCxnSpPr>
-        <p:spPr>
-          <a:xfrm flipH="1">
-            <a:off x="4052560" y="2081424"/>
-            <a:ext cx="334713" cy="529033"/>
-          </a:xfrm>
-          <a:prstGeom prst="straightConnector1">
-            <a:avLst/>
-          </a:prstGeom>
-          <a:ln w="12700">
-            <a:solidFill>
-              <a:schemeClr val="tx1"/>
-            </a:solidFill>
-            <a:tailEnd type="triangle"/>
-          </a:ln>
-        </p:spPr>
-        <p:style>
-          <a:lnRef idx="2">
-            <a:schemeClr val="accent1"/>
-          </a:lnRef>
-          <a:fillRef idx="0">
-            <a:schemeClr val="accent1"/>
-          </a:fillRef>
-          <a:effectRef idx="1">
-            <a:schemeClr val="accent1"/>
-          </a:effectRef>
-          <a:fontRef idx="minor">
-            <a:schemeClr val="tx1"/>
-          </a:fontRef>
-        </p:style>
-      </p:cxnSp>
-      <p:cxnSp>
-        <p:nvCxnSpPr>
-          <p:cNvPr id="41" name="Gerade Verbindung mit Pfeil 40">
-            <a:extLst>
-              <a:ext uri="{FF2B5EF4-FFF2-40B4-BE49-F238E27FC236}">
-                <a16:creationId xmlns:a16="http://schemas.microsoft.com/office/drawing/2014/main" id="{3399D439-86A4-19F6-50D2-7A472BD4038D}"/>
-              </a:ext>
-            </a:extLst>
-          </p:cNvPr>
-          <p:cNvCxnSpPr>
-            <a:cxnSpLocks/>
-          </p:cNvCxnSpPr>
-          <p:nvPr/>
-        </p:nvCxnSpPr>
-        <p:spPr>
-          <a:xfrm>
-            <a:off x="6293765" y="2075884"/>
-            <a:ext cx="5103908" cy="0"/>
-          </a:xfrm>
-          <a:prstGeom prst="straightConnector1">
-            <a:avLst/>
-          </a:prstGeom>
-          <a:ln w="12700">
-            <a:solidFill>
-              <a:schemeClr val="tx1"/>
-            </a:solidFill>
-            <a:tailEnd type="none"/>
-          </a:ln>
-        </p:spPr>
-        <p:style>
-          <a:lnRef idx="2">
-            <a:schemeClr val="accent1"/>
-          </a:lnRef>
-          <a:fillRef idx="0">
-            <a:schemeClr val="accent1"/>
-          </a:fillRef>
-          <a:effectRef idx="1">
-            <a:schemeClr val="accent1"/>
-          </a:effectRef>
-          <a:fontRef idx="minor">
-            <a:schemeClr val="tx1"/>
-          </a:fontRef>
-        </p:style>
-      </p:cxnSp>
-      <p:sp>
-        <p:nvSpPr>
-          <p:cNvPr id="42" name="Textfeld 41">
-            <a:extLst>
-              <a:ext uri="{FF2B5EF4-FFF2-40B4-BE49-F238E27FC236}">
-                <a16:creationId xmlns:a16="http://schemas.microsoft.com/office/drawing/2014/main" id="{F7664028-031C-EC25-49C7-F30529B1855C}"/>
+      <p:sp>
+        <p:nvSpPr>
+          <p:cNvPr id="33" name="Textfeld 32">
+            <a:extLst>
+              <a:ext uri="{FF2B5EF4-FFF2-40B4-BE49-F238E27FC236}">
+                <a16:creationId xmlns:a16="http://schemas.microsoft.com/office/drawing/2014/main" id="{06E67DA9-E8D0-3A40-DBB4-FC0438591899}"/>
               </a:ext>
             </a:extLst>
           </p:cNvPr>
@@ -6474,8 +6211,8 @@
         </p:nvSpPr>
         <p:spPr>
           <a:xfrm>
-            <a:off x="6289964" y="1827777"/>
-            <a:ext cx="5175895" cy="276999"/>
+            <a:off x="267232" y="2884262"/>
+            <a:ext cx="2115127" cy="923330"/>
           </a:xfrm>
           <a:prstGeom prst="rect">
             <a:avLst/>
@@ -6488,63 +6225,34 @@
           </a:bodyPr>
           <a:lstStyle/>
           <a:p>
-            <a:r>
-              <a:rPr lang="de-DE" sz="1200" dirty="0"/>
-              <a:t>Log-Details (hier Paket-, Scanner,- Gewichtsdaten)</a:t>
-            </a:r>
-          </a:p>
-        </p:txBody>
-      </p:sp>
-      <p:cxnSp>
-        <p:nvCxnSpPr>
-          <p:cNvPr id="43" name="Gerade Verbindung mit Pfeil 42">
-            <a:extLst>
-              <a:ext uri="{FF2B5EF4-FFF2-40B4-BE49-F238E27FC236}">
-                <a16:creationId xmlns:a16="http://schemas.microsoft.com/office/drawing/2014/main" id="{EA679DAB-6379-E91A-1158-20BCC0A650A0}"/>
-              </a:ext>
-            </a:extLst>
-          </p:cNvPr>
-          <p:cNvCxnSpPr>
-            <a:cxnSpLocks/>
-          </p:cNvCxnSpPr>
-          <p:nvPr/>
-        </p:nvCxnSpPr>
-        <p:spPr>
-          <a:xfrm>
-            <a:off x="4387273" y="2081424"/>
-            <a:ext cx="1679972" cy="0"/>
-          </a:xfrm>
-          <a:prstGeom prst="straightConnector1">
-            <a:avLst/>
-          </a:prstGeom>
-          <a:ln w="12700">
-            <a:solidFill>
-              <a:schemeClr val="tx1"/>
-            </a:solidFill>
-            <a:tailEnd type="none"/>
-          </a:ln>
-        </p:spPr>
-        <p:style>
-          <a:lnRef idx="2">
-            <a:schemeClr val="accent1"/>
-          </a:lnRef>
-          <a:fillRef idx="0">
-            <a:schemeClr val="accent1"/>
-          </a:fillRef>
-          <a:effectRef idx="1">
-            <a:schemeClr val="accent1"/>
-          </a:effectRef>
-          <a:fontRef idx="minor">
-            <a:schemeClr val="tx1"/>
-          </a:fontRef>
-        </p:style>
-      </p:cxnSp>
-      <p:sp>
-        <p:nvSpPr>
-          <p:cNvPr id="44" name="Textfeld 43">
-            <a:extLst>
-              <a:ext uri="{FF2B5EF4-FFF2-40B4-BE49-F238E27FC236}">
-                <a16:creationId xmlns:a16="http://schemas.microsoft.com/office/drawing/2014/main" id="{EF7C89CF-FA7C-8896-DB6B-598FFB4862FB}"/>
+            <a:pPr algn="ctr"/>
+            <a:r>
+              <a:rPr lang="de-DE" dirty="0"/>
+              <a:t>Kickout (KO)</a:t>
+            </a:r>
+          </a:p>
+          <a:p>
+            <a:pPr algn="ctr"/>
+            <a:r>
+              <a:rPr lang="de-DE" dirty="0"/>
+              <a:t>wenn weight:</a:t>
+            </a:r>
+          </a:p>
+          <a:p>
+            <a:pPr algn="ctr"/>
+            <a:r>
+              <a:rPr lang="de-DE" dirty="0"/>
+              <a:t>EXP  !=  ACT</a:t>
+            </a:r>
+          </a:p>
+        </p:txBody>
+      </p:sp>
+      <p:sp>
+        <p:nvSpPr>
+          <p:cNvPr id="35" name="Textfeld 34">
+            <a:extLst>
+              <a:ext uri="{FF2B5EF4-FFF2-40B4-BE49-F238E27FC236}">
+                <a16:creationId xmlns:a16="http://schemas.microsoft.com/office/drawing/2014/main" id="{94888D6D-EBE0-A4CF-E266-6CF6B03693F4}"/>
               </a:ext>
             </a:extLst>
           </p:cNvPr>
@@ -6553,8 +6261,8 @@
         </p:nvSpPr>
         <p:spPr>
           <a:xfrm>
-            <a:off x="4348125" y="1829125"/>
-            <a:ext cx="1736436" cy="276999"/>
+            <a:off x="481157" y="269571"/>
+            <a:ext cx="8047527" cy="584775"/>
           </a:xfrm>
           <a:prstGeom prst="rect">
             <a:avLst/>
@@ -6567,996 +6275,78 @@
           </a:bodyPr>
           <a:lstStyle/>
           <a:p>
-            <a:pPr algn="r"/>
-            <a:r>
-              <a:rPr lang="de-DE" sz="1200" dirty="0"/>
-              <a:t>IT Sytem der Logsource</a:t>
-            </a:r>
-          </a:p>
-        </p:txBody>
-      </p:sp>
-      <p:cxnSp>
-        <p:nvCxnSpPr>
-          <p:cNvPr id="48" name="Gerade Verbindung mit Pfeil 47">
-            <a:extLst>
-              <a:ext uri="{FF2B5EF4-FFF2-40B4-BE49-F238E27FC236}">
-                <a16:creationId xmlns:a16="http://schemas.microsoft.com/office/drawing/2014/main" id="{44DAC300-D027-93F7-F739-5C20810EE570}"/>
-              </a:ext>
-            </a:extLst>
-          </p:cNvPr>
-          <p:cNvCxnSpPr>
-            <a:cxnSpLocks/>
-          </p:cNvCxnSpPr>
-          <p:nvPr/>
-        </p:nvCxnSpPr>
-        <p:spPr>
-          <a:xfrm flipH="1">
-            <a:off x="5925830" y="2081424"/>
-            <a:ext cx="372760" cy="624745"/>
-          </a:xfrm>
-          <a:prstGeom prst="straightConnector1">
-            <a:avLst/>
-          </a:prstGeom>
-          <a:ln w="12700">
-            <a:solidFill>
-              <a:schemeClr val="tx1"/>
-            </a:solidFill>
-            <a:tailEnd type="triangle"/>
-          </a:ln>
-        </p:spPr>
-        <p:style>
-          <a:lnRef idx="2">
-            <a:schemeClr val="accent1"/>
-          </a:lnRef>
-          <a:fillRef idx="0">
-            <a:schemeClr val="accent1"/>
-          </a:fillRef>
-          <a:effectRef idx="1">
-            <a:schemeClr val="accent1"/>
-          </a:effectRef>
-          <a:fontRef idx="minor">
-            <a:schemeClr val="tx1"/>
-          </a:fontRef>
-        </p:style>
-      </p:cxnSp>
-      <p:pic>
-        <p:nvPicPr>
-          <p:cNvPr id="52" name="Grafik 51">
-            <a:extLst>
-              <a:ext uri="{FF2B5EF4-FFF2-40B4-BE49-F238E27FC236}">
-                <a16:creationId xmlns:a16="http://schemas.microsoft.com/office/drawing/2014/main" id="{62B0AEBD-0D4D-0C08-2A10-1A9F954BA836}"/>
-              </a:ext>
-            </a:extLst>
-          </p:cNvPr>
-          <p:cNvPicPr>
-            <a:picLocks noChangeAspect="1"/>
-          </p:cNvPicPr>
-          <p:nvPr/>
-        </p:nvPicPr>
-        <p:blipFill>
-          <a:blip r:embed="rId3"/>
-          <a:stretch>
-            <a:fillRect/>
-          </a:stretch>
-        </p:blipFill>
-        <p:spPr>
-          <a:xfrm>
-            <a:off x="1607127" y="4464952"/>
-            <a:ext cx="9975273" cy="1769450"/>
-          </a:xfrm>
-          <a:prstGeom prst="ellipse">
-            <a:avLst/>
-          </a:prstGeom>
-          <a:ln w="9525" cap="rnd">
-            <a:solidFill>
-              <a:srgbClr val="333333"/>
-            </a:solidFill>
-          </a:ln>
-          <a:effectLst>
-            <a:outerShdw blurRad="381000" dist="292100" dir="5400000" sx="-80000" sy="-18000" rotWithShape="0">
-              <a:srgbClr val="000000">
-                <a:alpha val="22000"/>
-              </a:srgbClr>
-            </a:outerShdw>
-          </a:effectLst>
-          <a:scene3d>
-            <a:camera prst="orthographicFront"/>
-            <a:lightRig rig="contrasting" dir="t">
-              <a:rot lat="0" lon="0" rev="3000000"/>
-            </a:lightRig>
-          </a:scene3d>
-          <a:sp3d contourW="7620">
-            <a:bevelT w="95250" h="31750"/>
-            <a:contourClr>
-              <a:srgbClr val="333333"/>
-            </a:contourClr>
-          </a:sp3d>
-        </p:spPr>
-      </p:pic>
-      <p:cxnSp>
-        <p:nvCxnSpPr>
-          <p:cNvPr id="53" name="Gerade Verbindung mit Pfeil 52">
-            <a:extLst>
-              <a:ext uri="{FF2B5EF4-FFF2-40B4-BE49-F238E27FC236}">
-                <a16:creationId xmlns:a16="http://schemas.microsoft.com/office/drawing/2014/main" id="{033F90DC-3DA5-A1B5-6B60-792A878FEBEB}"/>
-              </a:ext>
-            </a:extLst>
-          </p:cNvPr>
-          <p:cNvCxnSpPr>
-            <a:cxnSpLocks/>
-          </p:cNvCxnSpPr>
-          <p:nvPr/>
-        </p:nvCxnSpPr>
-        <p:spPr>
-          <a:xfrm flipH="1">
-            <a:off x="4554841" y="2872509"/>
-            <a:ext cx="3942614" cy="2189480"/>
-          </a:xfrm>
-          <a:prstGeom prst="straightConnector1">
-            <a:avLst/>
-          </a:prstGeom>
-          <a:ln w="12700">
-            <a:solidFill>
-              <a:schemeClr val="tx1"/>
-            </a:solidFill>
-            <a:tailEnd type="triangle"/>
-          </a:ln>
-        </p:spPr>
-        <p:style>
-          <a:lnRef idx="2">
-            <a:schemeClr val="accent1"/>
-          </a:lnRef>
-          <a:fillRef idx="0">
-            <a:schemeClr val="accent1"/>
-          </a:fillRef>
-          <a:effectRef idx="1">
-            <a:schemeClr val="accent1"/>
-          </a:effectRef>
-          <a:fontRef idx="minor">
-            <a:schemeClr val="tx1"/>
-          </a:fontRef>
-        </p:style>
-      </p:cxnSp>
-      <p:cxnSp>
-        <p:nvCxnSpPr>
-          <p:cNvPr id="55" name="Gerade Verbindung mit Pfeil 54">
-            <a:extLst>
-              <a:ext uri="{FF2B5EF4-FFF2-40B4-BE49-F238E27FC236}">
-                <a16:creationId xmlns:a16="http://schemas.microsoft.com/office/drawing/2014/main" id="{DD0AD0F0-7F62-1F4D-FC69-B6CBE32E429A}"/>
-              </a:ext>
-            </a:extLst>
-          </p:cNvPr>
-          <p:cNvCxnSpPr>
-            <a:cxnSpLocks/>
-          </p:cNvCxnSpPr>
-          <p:nvPr/>
-        </p:nvCxnSpPr>
-        <p:spPr>
-          <a:xfrm flipH="1">
-            <a:off x="3358732" y="2872509"/>
-            <a:ext cx="4501413" cy="2217188"/>
-          </a:xfrm>
-          <a:prstGeom prst="straightConnector1">
-            <a:avLst/>
-          </a:prstGeom>
-          <a:ln w="12700">
-            <a:solidFill>
-              <a:schemeClr val="tx1"/>
-            </a:solidFill>
-            <a:tailEnd type="triangle"/>
-          </a:ln>
-        </p:spPr>
-        <p:style>
-          <a:lnRef idx="2">
-            <a:schemeClr val="accent1"/>
-          </a:lnRef>
-          <a:fillRef idx="0">
-            <a:schemeClr val="accent1"/>
-          </a:fillRef>
-          <a:effectRef idx="1">
-            <a:schemeClr val="accent1"/>
-          </a:effectRef>
-          <a:fontRef idx="minor">
-            <a:schemeClr val="tx1"/>
-          </a:fontRef>
-        </p:style>
-      </p:cxnSp>
-      <p:cxnSp>
-        <p:nvCxnSpPr>
-          <p:cNvPr id="57" name="Gerade Verbindung mit Pfeil 56">
-            <a:extLst>
-              <a:ext uri="{FF2B5EF4-FFF2-40B4-BE49-F238E27FC236}">
-                <a16:creationId xmlns:a16="http://schemas.microsoft.com/office/drawing/2014/main" id="{BEC1B94E-CC4D-A246-E119-D8268372D6F5}"/>
-              </a:ext>
-            </a:extLst>
-          </p:cNvPr>
-          <p:cNvCxnSpPr>
-            <a:cxnSpLocks/>
-          </p:cNvCxnSpPr>
-          <p:nvPr/>
-        </p:nvCxnSpPr>
-        <p:spPr>
-          <a:xfrm flipH="1">
-            <a:off x="5917204" y="2912288"/>
-            <a:ext cx="3069778" cy="2131229"/>
-          </a:xfrm>
-          <a:prstGeom prst="straightConnector1">
-            <a:avLst/>
-          </a:prstGeom>
-          <a:ln w="12700">
-            <a:solidFill>
-              <a:schemeClr val="tx1"/>
-            </a:solidFill>
-            <a:tailEnd type="triangle"/>
-          </a:ln>
-        </p:spPr>
-        <p:style>
-          <a:lnRef idx="2">
-            <a:schemeClr val="accent1"/>
-          </a:lnRef>
-          <a:fillRef idx="0">
-            <a:schemeClr val="accent1"/>
-          </a:fillRef>
-          <a:effectRef idx="1">
-            <a:schemeClr val="accent1"/>
-          </a:effectRef>
-          <a:fontRef idx="minor">
-            <a:schemeClr val="tx1"/>
-          </a:fontRef>
-        </p:style>
-      </p:cxnSp>
-      <p:cxnSp>
-        <p:nvCxnSpPr>
-          <p:cNvPr id="60" name="Gerade Verbindung mit Pfeil 59">
-            <a:extLst>
-              <a:ext uri="{FF2B5EF4-FFF2-40B4-BE49-F238E27FC236}">
-                <a16:creationId xmlns:a16="http://schemas.microsoft.com/office/drawing/2014/main" id="{4AF5D3CC-026F-67A1-69CA-73FA136795BE}"/>
-              </a:ext>
-            </a:extLst>
-          </p:cNvPr>
-          <p:cNvCxnSpPr>
-            <a:cxnSpLocks/>
-          </p:cNvCxnSpPr>
-          <p:nvPr/>
-        </p:nvCxnSpPr>
-        <p:spPr>
-          <a:xfrm flipH="1">
-            <a:off x="7680475" y="2912288"/>
-            <a:ext cx="2013089" cy="2120575"/>
-          </a:xfrm>
-          <a:prstGeom prst="straightConnector1">
-            <a:avLst/>
-          </a:prstGeom>
-          <a:ln w="12700">
-            <a:solidFill>
-              <a:schemeClr val="tx1"/>
-            </a:solidFill>
-            <a:tailEnd type="triangle"/>
-          </a:ln>
-        </p:spPr>
-        <p:style>
-          <a:lnRef idx="2">
-            <a:schemeClr val="accent1"/>
-          </a:lnRef>
-          <a:fillRef idx="0">
-            <a:schemeClr val="accent1"/>
-          </a:fillRef>
-          <a:effectRef idx="1">
-            <a:schemeClr val="accent1"/>
-          </a:effectRef>
-          <a:fontRef idx="minor">
-            <a:schemeClr val="tx1"/>
-          </a:fontRef>
-        </p:style>
-      </p:cxnSp>
-      <p:cxnSp>
-        <p:nvCxnSpPr>
-          <p:cNvPr id="62" name="Gerade Verbindung mit Pfeil 61">
-            <a:extLst>
-              <a:ext uri="{FF2B5EF4-FFF2-40B4-BE49-F238E27FC236}">
-                <a16:creationId xmlns:a16="http://schemas.microsoft.com/office/drawing/2014/main" id="{E758D415-C2AC-69F9-C65A-F35D727E4BA6}"/>
-              </a:ext>
-            </a:extLst>
-          </p:cNvPr>
-          <p:cNvCxnSpPr>
-            <a:cxnSpLocks/>
-          </p:cNvCxnSpPr>
-          <p:nvPr/>
-        </p:nvCxnSpPr>
-        <p:spPr>
-          <a:xfrm flipH="1">
-            <a:off x="9019531" y="2901634"/>
-            <a:ext cx="1329814" cy="2141883"/>
-          </a:xfrm>
-          <a:prstGeom prst="straightConnector1">
-            <a:avLst/>
-          </a:prstGeom>
-          <a:ln w="12700">
-            <a:solidFill>
-              <a:schemeClr val="tx1"/>
-            </a:solidFill>
-            <a:tailEnd type="triangle"/>
-          </a:ln>
-        </p:spPr>
-        <p:style>
-          <a:lnRef idx="2">
-            <a:schemeClr val="accent1"/>
-          </a:lnRef>
-          <a:fillRef idx="0">
-            <a:schemeClr val="accent1"/>
-          </a:fillRef>
-          <a:effectRef idx="1">
-            <a:schemeClr val="accent1"/>
-          </a:effectRef>
-          <a:fontRef idx="minor">
-            <a:schemeClr val="tx1"/>
-          </a:fontRef>
-        </p:style>
-      </p:cxnSp>
-      <p:cxnSp>
-        <p:nvCxnSpPr>
-          <p:cNvPr id="64" name="Gerade Verbindung mit Pfeil 63">
-            <a:extLst>
-              <a:ext uri="{FF2B5EF4-FFF2-40B4-BE49-F238E27FC236}">
-                <a16:creationId xmlns:a16="http://schemas.microsoft.com/office/drawing/2014/main" id="{1633B7FC-212A-137A-641D-B4BFA9F0A36F}"/>
-              </a:ext>
-            </a:extLst>
-          </p:cNvPr>
-          <p:cNvCxnSpPr>
-            <a:cxnSpLocks/>
-          </p:cNvCxnSpPr>
-          <p:nvPr/>
-        </p:nvCxnSpPr>
-        <p:spPr>
-          <a:xfrm>
-            <a:off x="10871421" y="2912288"/>
-            <a:ext cx="46072" cy="2152291"/>
-          </a:xfrm>
-          <a:prstGeom prst="straightConnector1">
-            <a:avLst/>
-          </a:prstGeom>
-          <a:ln w="12700">
-            <a:solidFill>
-              <a:schemeClr val="tx1"/>
-            </a:solidFill>
-            <a:tailEnd type="triangle"/>
-          </a:ln>
-        </p:spPr>
-        <p:style>
-          <a:lnRef idx="2">
-            <a:schemeClr val="accent1"/>
-          </a:lnRef>
-          <a:fillRef idx="0">
-            <a:schemeClr val="accent1"/>
-          </a:fillRef>
-          <a:effectRef idx="1">
-            <a:schemeClr val="accent1"/>
-          </a:effectRef>
-          <a:fontRef idx="minor">
-            <a:schemeClr val="tx1"/>
-          </a:fontRef>
-        </p:style>
-      </p:cxnSp>
-      <p:sp>
-        <p:nvSpPr>
-          <p:cNvPr id="66" name="Rechteck 65">
-            <a:extLst>
-              <a:ext uri="{FF2B5EF4-FFF2-40B4-BE49-F238E27FC236}">
-                <a16:creationId xmlns:a16="http://schemas.microsoft.com/office/drawing/2014/main" id="{7033AD97-FC78-D9B8-AF95-65C8AAD24A3F}"/>
-              </a:ext>
-            </a:extLst>
-          </p:cNvPr>
-          <p:cNvSpPr/>
-          <p:nvPr/>
-        </p:nvSpPr>
-        <p:spPr>
-          <a:xfrm>
-            <a:off x="1710014" y="5055124"/>
-            <a:ext cx="2179920" cy="286501"/>
+            <a:r>
+              <a:rPr lang="de-DE" sz="3200" dirty="0"/>
+              <a:t>Label-Maschine &amp; </a:t>
+            </a:r>
+            <a:r>
+              <a:rPr lang="de-DE" sz="3200" dirty="0" err="1"/>
+              <a:t>Kickoutprocess</a:t>
+            </a:r>
+            <a:endParaRPr lang="de-DE" sz="3200" dirty="0"/>
+          </a:p>
+        </p:txBody>
+      </p:sp>
+      <p:sp>
+        <p:nvSpPr>
+          <p:cNvPr id="3" name="Textfeld 2">
+            <a:extLst>
+              <a:ext uri="{FF2B5EF4-FFF2-40B4-BE49-F238E27FC236}">
+                <a16:creationId xmlns:a16="http://schemas.microsoft.com/office/drawing/2014/main" id="{C00DEFC9-CC83-3A00-0632-55559A6839A9}"/>
+              </a:ext>
+            </a:extLst>
+          </p:cNvPr>
+          <p:cNvSpPr txBox="1"/>
+          <p:nvPr/>
+        </p:nvSpPr>
+        <p:spPr>
+          <a:xfrm>
+            <a:off x="361695" y="2294389"/>
+            <a:ext cx="2020664" cy="561692"/>
           </a:xfrm>
           <a:prstGeom prst="rect">
             <a:avLst/>
           </a:prstGeom>
           <a:solidFill>
-            <a:srgbClr val="FFFF00">
-              <a:alpha val="17000"/>
-            </a:srgbClr>
+            <a:srgbClr val="C00000"/>
           </a:solidFill>
-          <a:ln>
-            <a:noFill/>
-          </a:ln>
-        </p:spPr>
-        <p:style>
-          <a:lnRef idx="2">
-            <a:schemeClr val="accent1">
-              <a:shade val="15000"/>
-            </a:schemeClr>
-          </a:lnRef>
-          <a:fillRef idx="1">
-            <a:schemeClr val="accent1"/>
-          </a:fillRef>
-          <a:effectRef idx="0">
-            <a:schemeClr val="accent1"/>
-          </a:effectRef>
-          <a:fontRef idx="minor">
-            <a:schemeClr val="lt1"/>
-          </a:fontRef>
-        </p:style>
-        <p:txBody>
-          <a:bodyPr rtlCol="0" anchor="ctr"/>
-          <a:lstStyle/>
-          <a:p>
-            <a:pPr algn="ctr"/>
-            <a:endParaRPr lang="de-DE"/>
-          </a:p>
-        </p:txBody>
-      </p:sp>
-      <p:sp>
-        <p:nvSpPr>
-          <p:cNvPr id="67" name="Rechteck 66">
-            <a:extLst>
-              <a:ext uri="{FF2B5EF4-FFF2-40B4-BE49-F238E27FC236}">
-                <a16:creationId xmlns:a16="http://schemas.microsoft.com/office/drawing/2014/main" id="{59803A22-A8CB-B78E-3B88-4B4DD5D6C48B}"/>
-              </a:ext>
-            </a:extLst>
-          </p:cNvPr>
-          <p:cNvSpPr/>
-          <p:nvPr/>
-        </p:nvSpPr>
-        <p:spPr>
-          <a:xfrm>
-            <a:off x="7495069" y="2722460"/>
-            <a:ext cx="868791" cy="187962"/>
-          </a:xfrm>
-          <a:prstGeom prst="rect">
-            <a:avLst/>
-          </a:prstGeom>
-          <a:solidFill>
-            <a:srgbClr val="FFFF00">
-              <a:alpha val="17000"/>
-            </a:srgbClr>
-          </a:solidFill>
-          <a:ln>
-            <a:noFill/>
-          </a:ln>
-        </p:spPr>
-        <p:style>
-          <a:lnRef idx="2">
-            <a:schemeClr val="accent1">
-              <a:shade val="15000"/>
-            </a:schemeClr>
-          </a:lnRef>
-          <a:fillRef idx="1">
-            <a:schemeClr val="accent1"/>
-          </a:fillRef>
-          <a:effectRef idx="0">
-            <a:schemeClr val="accent1"/>
-          </a:effectRef>
-          <a:fontRef idx="minor">
-            <a:schemeClr val="lt1"/>
-          </a:fontRef>
-        </p:style>
-        <p:txBody>
-          <a:bodyPr rtlCol="0" anchor="ctr"/>
-          <a:lstStyle/>
-          <a:p>
-            <a:pPr algn="ctr"/>
-            <a:endParaRPr lang="de-DE"/>
-          </a:p>
-        </p:txBody>
-      </p:sp>
-      <p:sp>
-        <p:nvSpPr>
-          <p:cNvPr id="68" name="Rechteck 67">
-            <a:extLst>
-              <a:ext uri="{FF2B5EF4-FFF2-40B4-BE49-F238E27FC236}">
-                <a16:creationId xmlns:a16="http://schemas.microsoft.com/office/drawing/2014/main" id="{F266150B-A175-5798-5050-4E3F5C0D3AF2}"/>
-              </a:ext>
-            </a:extLst>
-          </p:cNvPr>
-          <p:cNvSpPr/>
-          <p:nvPr/>
-        </p:nvSpPr>
-        <p:spPr>
-          <a:xfrm>
-            <a:off x="4233689" y="5035869"/>
-            <a:ext cx="1304497" cy="286501"/>
-          </a:xfrm>
-          <a:prstGeom prst="rect">
-            <a:avLst/>
-          </a:prstGeom>
-          <a:solidFill>
-            <a:srgbClr val="0070C0">
-              <a:alpha val="17000"/>
-            </a:srgbClr>
-          </a:solidFill>
-          <a:ln>
-            <a:noFill/>
-          </a:ln>
-        </p:spPr>
-        <p:style>
-          <a:lnRef idx="2">
-            <a:schemeClr val="accent1">
-              <a:shade val="15000"/>
-            </a:schemeClr>
-          </a:lnRef>
-          <a:fillRef idx="1">
-            <a:schemeClr val="accent1"/>
-          </a:fillRef>
-          <a:effectRef idx="0">
-            <a:schemeClr val="accent1"/>
-          </a:effectRef>
-          <a:fontRef idx="minor">
-            <a:schemeClr val="lt1"/>
-          </a:fontRef>
-        </p:style>
-        <p:txBody>
-          <a:bodyPr rtlCol="0" anchor="ctr"/>
-          <a:lstStyle/>
-          <a:p>
-            <a:pPr algn="ctr"/>
-            <a:endParaRPr lang="de-DE"/>
-          </a:p>
-        </p:txBody>
-      </p:sp>
-      <p:sp>
-        <p:nvSpPr>
-          <p:cNvPr id="70" name="Rechteck 69">
-            <a:extLst>
-              <a:ext uri="{FF2B5EF4-FFF2-40B4-BE49-F238E27FC236}">
-                <a16:creationId xmlns:a16="http://schemas.microsoft.com/office/drawing/2014/main" id="{D3CD9437-45E8-6E21-E37F-91D30D3111A4}"/>
-              </a:ext>
-            </a:extLst>
-          </p:cNvPr>
-          <p:cNvSpPr/>
-          <p:nvPr/>
-        </p:nvSpPr>
-        <p:spPr>
-          <a:xfrm>
-            <a:off x="8478353" y="2724326"/>
-            <a:ext cx="480921" cy="187962"/>
-          </a:xfrm>
-          <a:prstGeom prst="rect">
-            <a:avLst/>
-          </a:prstGeom>
-          <a:solidFill>
-            <a:srgbClr val="0070C0">
-              <a:alpha val="17000"/>
-            </a:srgbClr>
-          </a:solidFill>
-          <a:ln>
-            <a:noFill/>
-          </a:ln>
-        </p:spPr>
-        <p:style>
-          <a:lnRef idx="2">
-            <a:schemeClr val="accent1">
-              <a:shade val="15000"/>
-            </a:schemeClr>
-          </a:lnRef>
-          <a:fillRef idx="1">
-            <a:schemeClr val="accent1"/>
-          </a:fillRef>
-          <a:effectRef idx="0">
-            <a:schemeClr val="accent1"/>
-          </a:effectRef>
-          <a:fontRef idx="minor">
-            <a:schemeClr val="lt1"/>
-          </a:fontRef>
-        </p:style>
-        <p:txBody>
-          <a:bodyPr rtlCol="0" anchor="ctr"/>
-          <a:lstStyle/>
-          <a:p>
-            <a:pPr algn="ctr"/>
-            <a:endParaRPr lang="de-DE"/>
-          </a:p>
-        </p:txBody>
-      </p:sp>
-      <p:sp>
-        <p:nvSpPr>
-          <p:cNvPr id="71" name="Rechteck 70">
-            <a:extLst>
-              <a:ext uri="{FF2B5EF4-FFF2-40B4-BE49-F238E27FC236}">
-                <a16:creationId xmlns:a16="http://schemas.microsoft.com/office/drawing/2014/main" id="{862AC418-ECC3-D210-EDD4-056BD9D4EF1F}"/>
-              </a:ext>
-            </a:extLst>
-          </p:cNvPr>
-          <p:cNvSpPr/>
-          <p:nvPr/>
-        </p:nvSpPr>
-        <p:spPr>
-          <a:xfrm>
-            <a:off x="8999879" y="2722299"/>
-            <a:ext cx="584163" cy="180753"/>
-          </a:xfrm>
-          <a:prstGeom prst="rect">
-            <a:avLst/>
-          </a:prstGeom>
-          <a:solidFill>
-            <a:srgbClr val="00B050">
-              <a:alpha val="17000"/>
-            </a:srgbClr>
-          </a:solidFill>
-          <a:ln>
-            <a:noFill/>
-          </a:ln>
-        </p:spPr>
-        <p:style>
-          <a:lnRef idx="2">
-            <a:schemeClr val="accent1">
-              <a:shade val="15000"/>
-            </a:schemeClr>
-          </a:lnRef>
-          <a:fillRef idx="1">
-            <a:schemeClr val="accent1"/>
-          </a:fillRef>
-          <a:effectRef idx="0">
-            <a:schemeClr val="accent1"/>
-          </a:effectRef>
-          <a:fontRef idx="minor">
-            <a:schemeClr val="lt1"/>
-          </a:fontRef>
-        </p:style>
-        <p:txBody>
-          <a:bodyPr rtlCol="0" anchor="ctr"/>
-          <a:lstStyle/>
-          <a:p>
-            <a:pPr algn="ctr"/>
-            <a:endParaRPr lang="de-DE"/>
-          </a:p>
-        </p:txBody>
-      </p:sp>
-      <p:sp>
-        <p:nvSpPr>
-          <p:cNvPr id="72" name="Rechteck 71">
-            <a:extLst>
-              <a:ext uri="{FF2B5EF4-FFF2-40B4-BE49-F238E27FC236}">
-                <a16:creationId xmlns:a16="http://schemas.microsoft.com/office/drawing/2014/main" id="{C33C31E2-50B9-D54C-3A37-0A1630DD3A5D}"/>
-              </a:ext>
-            </a:extLst>
-          </p:cNvPr>
-          <p:cNvSpPr/>
-          <p:nvPr/>
-        </p:nvSpPr>
-        <p:spPr>
-          <a:xfrm>
-            <a:off x="5693997" y="5032863"/>
-            <a:ext cx="1595794" cy="286501"/>
-          </a:xfrm>
-          <a:prstGeom prst="rect">
-            <a:avLst/>
-          </a:prstGeom>
-          <a:solidFill>
-            <a:srgbClr val="00B050">
-              <a:alpha val="17000"/>
-            </a:srgbClr>
-          </a:solidFill>
-          <a:ln>
-            <a:noFill/>
-          </a:ln>
-        </p:spPr>
-        <p:style>
-          <a:lnRef idx="2">
-            <a:schemeClr val="accent1">
-              <a:shade val="15000"/>
-            </a:schemeClr>
-          </a:lnRef>
-          <a:fillRef idx="1">
-            <a:schemeClr val="accent1"/>
-          </a:fillRef>
-          <a:effectRef idx="0">
-            <a:schemeClr val="accent1"/>
-          </a:effectRef>
-          <a:fontRef idx="minor">
-            <a:schemeClr val="lt1"/>
-          </a:fontRef>
-        </p:style>
-        <p:txBody>
-          <a:bodyPr rtlCol="0" anchor="ctr"/>
-          <a:lstStyle/>
-          <a:p>
-            <a:pPr algn="ctr"/>
-            <a:endParaRPr lang="de-DE"/>
-          </a:p>
-        </p:txBody>
-      </p:sp>
-      <p:sp>
-        <p:nvSpPr>
-          <p:cNvPr id="73" name="Rechteck 72">
-            <a:extLst>
-              <a:ext uri="{FF2B5EF4-FFF2-40B4-BE49-F238E27FC236}">
-                <a16:creationId xmlns:a16="http://schemas.microsoft.com/office/drawing/2014/main" id="{E6B6CE37-E01C-2AF7-A49E-037E3847D291}"/>
-              </a:ext>
-            </a:extLst>
-          </p:cNvPr>
-          <p:cNvSpPr/>
-          <p:nvPr/>
-        </p:nvSpPr>
-        <p:spPr>
-          <a:xfrm>
-            <a:off x="7353195" y="5032862"/>
-            <a:ext cx="1329814" cy="308763"/>
-          </a:xfrm>
-          <a:prstGeom prst="rect">
-            <a:avLst/>
-          </a:prstGeom>
-          <a:solidFill>
-            <a:schemeClr val="accent5">
-              <a:lumMod val="75000"/>
-              <a:alpha val="17000"/>
-            </a:schemeClr>
-          </a:solidFill>
-          <a:ln>
-            <a:noFill/>
-          </a:ln>
-        </p:spPr>
-        <p:style>
-          <a:lnRef idx="2">
-            <a:schemeClr val="accent1">
-              <a:shade val="15000"/>
-            </a:schemeClr>
-          </a:lnRef>
-          <a:fillRef idx="1">
-            <a:schemeClr val="accent1"/>
-          </a:fillRef>
-          <a:effectRef idx="0">
-            <a:schemeClr val="accent1"/>
-          </a:effectRef>
-          <a:fontRef idx="minor">
-            <a:schemeClr val="lt1"/>
-          </a:fontRef>
-        </p:style>
-        <p:txBody>
-          <a:bodyPr rtlCol="0" anchor="ctr"/>
-          <a:lstStyle/>
-          <a:p>
-            <a:pPr algn="ctr"/>
-            <a:endParaRPr lang="de-DE"/>
-          </a:p>
-        </p:txBody>
-      </p:sp>
-      <p:sp>
-        <p:nvSpPr>
-          <p:cNvPr id="74" name="Rechteck 73">
-            <a:extLst>
-              <a:ext uri="{FF2B5EF4-FFF2-40B4-BE49-F238E27FC236}">
-                <a16:creationId xmlns:a16="http://schemas.microsoft.com/office/drawing/2014/main" id="{5FA51906-F72B-A7F4-2F85-64EA087D453C}"/>
-              </a:ext>
-            </a:extLst>
-          </p:cNvPr>
-          <p:cNvSpPr/>
-          <p:nvPr/>
-        </p:nvSpPr>
-        <p:spPr>
-          <a:xfrm>
-            <a:off x="9608189" y="2717277"/>
-            <a:ext cx="483305" cy="195011"/>
-          </a:xfrm>
-          <a:prstGeom prst="rect">
-            <a:avLst/>
-          </a:prstGeom>
-          <a:solidFill>
-            <a:schemeClr val="accent5">
-              <a:lumMod val="75000"/>
-              <a:alpha val="17000"/>
-            </a:schemeClr>
-          </a:solidFill>
-          <a:ln>
-            <a:noFill/>
-          </a:ln>
-        </p:spPr>
-        <p:style>
-          <a:lnRef idx="2">
-            <a:schemeClr val="accent1">
-              <a:shade val="15000"/>
-            </a:schemeClr>
-          </a:lnRef>
-          <a:fillRef idx="1">
-            <a:schemeClr val="accent1"/>
-          </a:fillRef>
-          <a:effectRef idx="0">
-            <a:schemeClr val="accent1"/>
-          </a:effectRef>
-          <a:fontRef idx="minor">
-            <a:schemeClr val="lt1"/>
-          </a:fontRef>
-        </p:style>
-        <p:txBody>
-          <a:bodyPr rtlCol="0" anchor="ctr"/>
-          <a:lstStyle/>
-          <a:p>
-            <a:pPr algn="ctr"/>
-            <a:endParaRPr lang="de-DE"/>
-          </a:p>
-        </p:txBody>
-      </p:sp>
-      <p:sp>
-        <p:nvSpPr>
-          <p:cNvPr id="75" name="Rechteck 74">
-            <a:extLst>
-              <a:ext uri="{FF2B5EF4-FFF2-40B4-BE49-F238E27FC236}">
-                <a16:creationId xmlns:a16="http://schemas.microsoft.com/office/drawing/2014/main" id="{98A5C0D0-520B-55F1-FB22-241B4C510BC9}"/>
-              </a:ext>
-            </a:extLst>
-          </p:cNvPr>
-          <p:cNvSpPr/>
-          <p:nvPr/>
-        </p:nvSpPr>
-        <p:spPr>
-          <a:xfrm>
-            <a:off x="8735102" y="5040914"/>
-            <a:ext cx="1198344" cy="308763"/>
-          </a:xfrm>
-          <a:prstGeom prst="rect">
-            <a:avLst/>
-          </a:prstGeom>
-          <a:solidFill>
-            <a:schemeClr val="tx1">
-              <a:lumMod val="75000"/>
-              <a:lumOff val="25000"/>
-              <a:alpha val="17000"/>
-            </a:schemeClr>
-          </a:solidFill>
-          <a:ln>
-            <a:noFill/>
-          </a:ln>
-        </p:spPr>
-        <p:style>
-          <a:lnRef idx="2">
-            <a:schemeClr val="accent1">
-              <a:shade val="15000"/>
-            </a:schemeClr>
-          </a:lnRef>
-          <a:fillRef idx="1">
-            <a:schemeClr val="accent1"/>
-          </a:fillRef>
-          <a:effectRef idx="0">
-            <a:schemeClr val="accent1"/>
-          </a:effectRef>
-          <a:fontRef idx="minor">
-            <a:schemeClr val="lt1"/>
-          </a:fontRef>
-        </p:style>
-        <p:txBody>
-          <a:bodyPr rtlCol="0" anchor="ctr"/>
-          <a:lstStyle/>
-          <a:p>
-            <a:pPr algn="ctr"/>
-            <a:endParaRPr lang="de-DE"/>
-          </a:p>
-        </p:txBody>
-      </p:sp>
-      <p:sp>
-        <p:nvSpPr>
-          <p:cNvPr id="76" name="Rechteck 75">
-            <a:extLst>
-              <a:ext uri="{FF2B5EF4-FFF2-40B4-BE49-F238E27FC236}">
-                <a16:creationId xmlns:a16="http://schemas.microsoft.com/office/drawing/2014/main" id="{6BC5F6C8-93B1-8B07-92B2-FCFC1683F3F3}"/>
-              </a:ext>
-            </a:extLst>
-          </p:cNvPr>
-          <p:cNvSpPr/>
-          <p:nvPr/>
-        </p:nvSpPr>
-        <p:spPr>
-          <a:xfrm>
-            <a:off x="10109771" y="2718127"/>
-            <a:ext cx="483305" cy="183507"/>
-          </a:xfrm>
-          <a:prstGeom prst="rect">
-            <a:avLst/>
-          </a:prstGeom>
-          <a:solidFill>
-            <a:schemeClr val="tx1">
-              <a:lumMod val="75000"/>
-              <a:lumOff val="25000"/>
-              <a:alpha val="17000"/>
-            </a:schemeClr>
-          </a:solidFill>
-          <a:ln>
-            <a:noFill/>
-          </a:ln>
-        </p:spPr>
-        <p:style>
-          <a:lnRef idx="2">
-            <a:schemeClr val="accent1">
-              <a:shade val="15000"/>
-            </a:schemeClr>
-          </a:lnRef>
-          <a:fillRef idx="1">
-            <a:schemeClr val="accent1"/>
-          </a:fillRef>
-          <a:effectRef idx="0">
-            <a:schemeClr val="accent1"/>
-          </a:effectRef>
-          <a:fontRef idx="minor">
-            <a:schemeClr val="lt1"/>
-          </a:fontRef>
-        </p:style>
-        <p:txBody>
-          <a:bodyPr rtlCol="0" anchor="ctr"/>
-          <a:lstStyle/>
-          <a:p>
-            <a:pPr algn="ctr"/>
-            <a:endParaRPr lang="de-DE"/>
-          </a:p>
-        </p:txBody>
-      </p:sp>
-      <p:sp>
-        <p:nvSpPr>
-          <p:cNvPr id="77" name="Textfeld 76">
-            <a:extLst>
-              <a:ext uri="{FF2B5EF4-FFF2-40B4-BE49-F238E27FC236}">
-                <a16:creationId xmlns:a16="http://schemas.microsoft.com/office/drawing/2014/main" id="{A204432A-D197-8F90-8589-3A0AA14499AE}"/>
-              </a:ext>
-            </a:extLst>
-          </p:cNvPr>
-          <p:cNvSpPr txBox="1"/>
-          <p:nvPr/>
-        </p:nvSpPr>
-        <p:spPr>
-          <a:xfrm>
-            <a:off x="8557228" y="5600773"/>
-            <a:ext cx="3602292" cy="584775"/>
-          </a:xfrm>
-          <a:prstGeom prst="rect">
-            <a:avLst/>
-          </a:prstGeom>
-          <a:noFill/>
-        </p:spPr>
-        <p:txBody>
-          <a:bodyPr wrap="square" rtlCol="0">
+        </p:spPr>
+        <p:txBody>
+          <a:bodyPr wrap="square">
             <a:spAutoFit/>
           </a:bodyPr>
           <a:lstStyle/>
           <a:p>
             <a:r>
-              <a:rPr lang="de-DE" sz="3200" dirty="0"/>
-              <a:t>und vieles mehr …</a:t>
-            </a:r>
-          </a:p>
-        </p:txBody>
-      </p:sp>
-      <p:sp>
-        <p:nvSpPr>
-          <p:cNvPr id="3" name="Textfeld 2">
-            <a:extLst>
-              <a:ext uri="{FF2B5EF4-FFF2-40B4-BE49-F238E27FC236}">
-                <a16:creationId xmlns:a16="http://schemas.microsoft.com/office/drawing/2014/main" id="{6D807C81-ACEB-69C7-9172-82C4C9A1075B}"/>
-              </a:ext>
-            </a:extLst>
-          </p:cNvPr>
-          <p:cNvSpPr txBox="1"/>
-          <p:nvPr/>
-        </p:nvSpPr>
-        <p:spPr>
-          <a:xfrm>
-            <a:off x="9376912" y="241941"/>
-            <a:ext cx="2544565" cy="369332"/>
-          </a:xfrm>
-          <a:prstGeom prst="rect">
-            <a:avLst/>
-          </a:prstGeom>
-          <a:noFill/>
-        </p:spPr>
-        <p:txBody>
-          <a:bodyPr wrap="square" rtlCol="0">
-            <a:spAutoFit/>
-          </a:bodyPr>
-          <a:lstStyle/>
-          <a:p>
-            <a:pPr algn="r"/>
-            <a:r>
-              <a:rPr lang="de-DE" dirty="0">
+              <a:rPr lang="de-DE" sz="1250" dirty="0" err="1">
                 <a:solidFill>
                   <a:schemeClr val="bg1"/>
                 </a:solidFill>
-                <a:highlight>
-                  <a:srgbClr val="000080"/>
-                </a:highlight>
               </a:rPr>
-              <a:t>Machine-Log-Navigator</a:t>
+              <a:t>Packetproblemerkennung</a:t>
+            </a:r>
+            <a:endParaRPr lang="de-DE" sz="1250" dirty="0">
+              <a:solidFill>
+                <a:schemeClr val="bg1"/>
+              </a:solidFill>
+            </a:endParaRPr>
+          </a:p>
+          <a:p>
+            <a:r>
+              <a:rPr lang="de-DE" sz="1800" dirty="0" err="1">
+                <a:solidFill>
+                  <a:schemeClr val="bg1"/>
+                </a:solidFill>
+              </a:rPr>
+              <a:t>Machine</a:t>
+            </a:r>
+            <a:r>
+              <a:rPr lang="de-DE" sz="1800" dirty="0">
+                <a:solidFill>
+                  <a:schemeClr val="bg1"/>
+                </a:solidFill>
+              </a:rPr>
+              <a:t>-Learning</a:t>
             </a:r>
           </a:p>
         </p:txBody>
@@ -7564,7 +6354,7 @@
     </p:spTree>
     <p:extLst>
       <p:ext uri="{BB962C8B-B14F-4D97-AF65-F5344CB8AC3E}">
-        <p14:creationId xmlns:p14="http://schemas.microsoft.com/office/powerpoint/2010/main" val="2897287093"/>
+        <p14:creationId xmlns:p14="http://schemas.microsoft.com/office/powerpoint/2010/main" val="359237405"/>
       </p:ext>
     </p:extLst>
   </p:cSld>
@@ -7596,7 +6386,7 @@
           <p:cNvPr id="2" name="Titel 1">
             <a:extLst>
               <a:ext uri="{FF2B5EF4-FFF2-40B4-BE49-F238E27FC236}">
-                <a16:creationId xmlns:a16="http://schemas.microsoft.com/office/drawing/2014/main" id="{D45C41D8-6AC7-BBCD-7C37-953E44238EEB}"/>
+                <a16:creationId xmlns:a16="http://schemas.microsoft.com/office/drawing/2014/main" id="{AF5DA710-7168-EB00-79B6-37454B75FF5C}"/>
               </a:ext>
             </a:extLst>
           </p:cNvPr>
@@ -7609,29 +6399,269 @@
         </p:nvSpPr>
         <p:spPr>
           <a:xfrm>
-            <a:off x="330449" y="430190"/>
-            <a:ext cx="2887200" cy="300385"/>
-          </a:xfrm>
-        </p:spPr>
-        <p:txBody>
-          <a:bodyPr>
-            <a:normAutofit fontScale="90000"/>
+            <a:off x="437072" y="277771"/>
+            <a:ext cx="10515600" cy="1325563"/>
+          </a:xfrm>
+        </p:spPr>
+        <p:txBody>
+          <a:bodyPr/>
+          <a:lstStyle/>
+          <a:p>
+            <a:r>
+              <a:rPr lang="de-DE" dirty="0"/>
+              <a:t>Insight Log-Data</a:t>
+            </a:r>
+          </a:p>
+        </p:txBody>
+      </p:sp>
+      <p:pic>
+        <p:nvPicPr>
+          <p:cNvPr id="4" name="Grafik 3">
+            <a:extLst>
+              <a:ext uri="{FF2B5EF4-FFF2-40B4-BE49-F238E27FC236}">
+                <a16:creationId xmlns:a16="http://schemas.microsoft.com/office/drawing/2014/main" id="{DB5B1C7A-542E-D029-CEB3-F2F7C8509450}"/>
+              </a:ext>
+            </a:extLst>
+          </p:cNvPr>
+          <p:cNvPicPr>
+            <a:picLocks noChangeAspect="1"/>
+          </p:cNvPicPr>
+          <p:nvPr/>
+        </p:nvPicPr>
+        <p:blipFill>
+          <a:blip r:embed="rId2"/>
+          <a:stretch>
+            <a:fillRect/>
+          </a:stretch>
+        </p:blipFill>
+        <p:spPr>
+          <a:xfrm>
+            <a:off x="437072" y="2572115"/>
+            <a:ext cx="11260347" cy="1238209"/>
+          </a:xfrm>
+          <a:prstGeom prst="rect">
+            <a:avLst/>
+          </a:prstGeom>
+        </p:spPr>
+      </p:pic>
+      <p:cxnSp>
+        <p:nvCxnSpPr>
+          <p:cNvPr id="5" name="Gerade Verbindung mit Pfeil 4">
+            <a:extLst>
+              <a:ext uri="{FF2B5EF4-FFF2-40B4-BE49-F238E27FC236}">
+                <a16:creationId xmlns:a16="http://schemas.microsoft.com/office/drawing/2014/main" id="{DC667D10-A414-B0A9-80D8-C5E3C9163BFB}"/>
+              </a:ext>
+            </a:extLst>
+          </p:cNvPr>
+          <p:cNvCxnSpPr>
+            <a:cxnSpLocks/>
+          </p:cNvCxnSpPr>
+          <p:nvPr/>
+        </p:nvCxnSpPr>
+        <p:spPr>
+          <a:xfrm flipH="1">
+            <a:off x="726141" y="2048161"/>
+            <a:ext cx="271386" cy="393536"/>
+          </a:xfrm>
+          <a:prstGeom prst="straightConnector1">
+            <a:avLst/>
+          </a:prstGeom>
+          <a:ln w="12700">
+            <a:solidFill>
+              <a:schemeClr val="tx1"/>
+            </a:solidFill>
+            <a:tailEnd type="triangle"/>
+          </a:ln>
+        </p:spPr>
+        <p:style>
+          <a:lnRef idx="2">
+            <a:schemeClr val="accent1"/>
+          </a:lnRef>
+          <a:fillRef idx="0">
+            <a:schemeClr val="accent1"/>
+          </a:fillRef>
+          <a:effectRef idx="1">
+            <a:schemeClr val="accent1"/>
+          </a:effectRef>
+          <a:fontRef idx="minor">
+            <a:schemeClr val="tx1"/>
+          </a:fontRef>
+        </p:style>
+      </p:cxnSp>
+      <p:cxnSp>
+        <p:nvCxnSpPr>
+          <p:cNvPr id="10" name="Gerade Verbindung mit Pfeil 9">
+            <a:extLst>
+              <a:ext uri="{FF2B5EF4-FFF2-40B4-BE49-F238E27FC236}">
+                <a16:creationId xmlns:a16="http://schemas.microsoft.com/office/drawing/2014/main" id="{51954C7B-F901-F892-F1BF-1C034AE3DEB0}"/>
+              </a:ext>
+            </a:extLst>
+          </p:cNvPr>
+          <p:cNvCxnSpPr>
+            <a:cxnSpLocks/>
+          </p:cNvCxnSpPr>
+          <p:nvPr/>
+        </p:nvCxnSpPr>
+        <p:spPr>
+          <a:xfrm>
+            <a:off x="2105257" y="2060961"/>
+            <a:ext cx="591761" cy="0"/>
+          </a:xfrm>
+          <a:prstGeom prst="straightConnector1">
+            <a:avLst/>
+          </a:prstGeom>
+          <a:ln w="12700">
+            <a:solidFill>
+              <a:schemeClr val="tx1"/>
+            </a:solidFill>
+            <a:tailEnd type="none"/>
+          </a:ln>
+        </p:spPr>
+        <p:style>
+          <a:lnRef idx="2">
+            <a:schemeClr val="accent1"/>
+          </a:lnRef>
+          <a:fillRef idx="0">
+            <a:schemeClr val="accent1"/>
+          </a:fillRef>
+          <a:effectRef idx="1">
+            <a:schemeClr val="accent1"/>
+          </a:effectRef>
+          <a:fontRef idx="minor">
+            <a:schemeClr val="tx1"/>
+          </a:fontRef>
+        </p:style>
+      </p:cxnSp>
+      <p:sp>
+        <p:nvSpPr>
+          <p:cNvPr id="13" name="Textfeld 12">
+            <a:extLst>
+              <a:ext uri="{FF2B5EF4-FFF2-40B4-BE49-F238E27FC236}">
+                <a16:creationId xmlns:a16="http://schemas.microsoft.com/office/drawing/2014/main" id="{077361E0-2EFF-D061-1E8C-F52D076B8DEB}"/>
+              </a:ext>
+            </a:extLst>
+          </p:cNvPr>
+          <p:cNvSpPr txBox="1"/>
+          <p:nvPr/>
+        </p:nvSpPr>
+        <p:spPr>
+          <a:xfrm>
+            <a:off x="2003313" y="1841481"/>
+            <a:ext cx="788075" cy="276999"/>
+          </a:xfrm>
+          <a:prstGeom prst="rect">
+            <a:avLst/>
+          </a:prstGeom>
+          <a:noFill/>
+        </p:spPr>
+        <p:txBody>
+          <a:bodyPr wrap="square" rtlCol="0">
+            <a:spAutoFit/>
           </a:bodyPr>
           <a:lstStyle/>
           <a:p>
-            <a:r>
-              <a:rPr lang="de-DE" sz="2000" b="1" u="sng" dirty="0"/>
-              <a:t>Projekt-Ziel</a:t>
-            </a:r>
-          </a:p>
-        </p:txBody>
-      </p:sp>
-      <p:sp>
-        <p:nvSpPr>
-          <p:cNvPr id="4" name="Textfeld 3">
-            <a:extLst>
-              <a:ext uri="{FF2B5EF4-FFF2-40B4-BE49-F238E27FC236}">
-                <a16:creationId xmlns:a16="http://schemas.microsoft.com/office/drawing/2014/main" id="{1E970565-9AED-56BD-8E1B-32F49DEDA012}"/>
+            <a:pPr algn="r"/>
+            <a:r>
+              <a:rPr lang="de-DE" sz="1200" dirty="0"/>
+              <a:t>Priorität</a:t>
+            </a:r>
+          </a:p>
+        </p:txBody>
+      </p:sp>
+      <p:cxnSp>
+        <p:nvCxnSpPr>
+          <p:cNvPr id="14" name="Gerade Verbindung mit Pfeil 13">
+            <a:extLst>
+              <a:ext uri="{FF2B5EF4-FFF2-40B4-BE49-F238E27FC236}">
+                <a16:creationId xmlns:a16="http://schemas.microsoft.com/office/drawing/2014/main" id="{33688DFC-30F4-96D0-0C28-44D2C9CB831A}"/>
+              </a:ext>
+            </a:extLst>
+          </p:cNvPr>
+          <p:cNvCxnSpPr>
+            <a:cxnSpLocks/>
+          </p:cNvCxnSpPr>
+          <p:nvPr/>
+        </p:nvCxnSpPr>
+        <p:spPr>
+          <a:xfrm flipH="1">
+            <a:off x="1852286" y="2066023"/>
+            <a:ext cx="252971" cy="406234"/>
+          </a:xfrm>
+          <a:prstGeom prst="straightConnector1">
+            <a:avLst/>
+          </a:prstGeom>
+          <a:ln w="12700">
+            <a:solidFill>
+              <a:schemeClr val="tx1"/>
+            </a:solidFill>
+            <a:tailEnd type="triangle"/>
+          </a:ln>
+        </p:spPr>
+        <p:style>
+          <a:lnRef idx="2">
+            <a:schemeClr val="accent1"/>
+          </a:lnRef>
+          <a:fillRef idx="0">
+            <a:schemeClr val="accent1"/>
+          </a:fillRef>
+          <a:effectRef idx="1">
+            <a:schemeClr val="accent1"/>
+          </a:effectRef>
+          <a:fontRef idx="minor">
+            <a:schemeClr val="tx1"/>
+          </a:fontRef>
+        </p:style>
+      </p:cxnSp>
+      <p:cxnSp>
+        <p:nvCxnSpPr>
+          <p:cNvPr id="15" name="Gerade Verbindung mit Pfeil 14">
+            <a:extLst>
+              <a:ext uri="{FF2B5EF4-FFF2-40B4-BE49-F238E27FC236}">
+                <a16:creationId xmlns:a16="http://schemas.microsoft.com/office/drawing/2014/main" id="{2E8C97D5-0B8D-2039-5E41-3AACA9D66653}"/>
+              </a:ext>
+            </a:extLst>
+          </p:cNvPr>
+          <p:cNvCxnSpPr>
+            <a:cxnSpLocks/>
+          </p:cNvCxnSpPr>
+          <p:nvPr/>
+        </p:nvCxnSpPr>
+        <p:spPr>
+          <a:xfrm>
+            <a:off x="2991763" y="2057397"/>
+            <a:ext cx="1229255" cy="0"/>
+          </a:xfrm>
+          <a:prstGeom prst="straightConnector1">
+            <a:avLst/>
+          </a:prstGeom>
+          <a:ln w="12700">
+            <a:solidFill>
+              <a:schemeClr val="tx1"/>
+            </a:solidFill>
+            <a:tailEnd type="none"/>
+          </a:ln>
+        </p:spPr>
+        <p:style>
+          <a:lnRef idx="2">
+            <a:schemeClr val="accent1"/>
+          </a:lnRef>
+          <a:fillRef idx="0">
+            <a:schemeClr val="accent1"/>
+          </a:fillRef>
+          <a:effectRef idx="1">
+            <a:schemeClr val="accent1"/>
+          </a:effectRef>
+          <a:fontRef idx="minor">
+            <a:schemeClr val="tx1"/>
+          </a:fontRef>
+        </p:style>
+      </p:cxnSp>
+      <p:sp>
+        <p:nvSpPr>
+          <p:cNvPr id="20" name="Textfeld 19">
+            <a:extLst>
+              <a:ext uri="{FF2B5EF4-FFF2-40B4-BE49-F238E27FC236}">
+                <a16:creationId xmlns:a16="http://schemas.microsoft.com/office/drawing/2014/main" id="{CE283432-2F39-2D20-2620-8FDF4AE640DB}"/>
               </a:ext>
             </a:extLst>
           </p:cNvPr>
@@ -7640,7 +6670,1357 @@
         </p:nvSpPr>
         <p:spPr>
           <a:xfrm>
-            <a:off x="9263555" y="211050"/>
+            <a:off x="2723103" y="1832245"/>
+            <a:ext cx="1598937" cy="276999"/>
+          </a:xfrm>
+          <a:prstGeom prst="rect">
+            <a:avLst/>
+          </a:prstGeom>
+          <a:noFill/>
+        </p:spPr>
+        <p:txBody>
+          <a:bodyPr wrap="square" rtlCol="0">
+            <a:spAutoFit/>
+          </a:bodyPr>
+          <a:lstStyle/>
+          <a:p>
+            <a:pPr algn="r"/>
+            <a:r>
+              <a:rPr lang="de-DE" sz="1200" dirty="0"/>
+              <a:t>Maschinenbereich</a:t>
+            </a:r>
+          </a:p>
+        </p:txBody>
+      </p:sp>
+      <p:sp>
+        <p:nvSpPr>
+          <p:cNvPr id="25" name="Textfeld 24">
+            <a:extLst>
+              <a:ext uri="{FF2B5EF4-FFF2-40B4-BE49-F238E27FC236}">
+                <a16:creationId xmlns:a16="http://schemas.microsoft.com/office/drawing/2014/main" id="{7F34625A-A1DB-E985-D65C-25FC42083237}"/>
+              </a:ext>
+            </a:extLst>
+          </p:cNvPr>
+          <p:cNvSpPr txBox="1"/>
+          <p:nvPr/>
+        </p:nvSpPr>
+        <p:spPr>
+          <a:xfrm>
+            <a:off x="712684" y="1832245"/>
+            <a:ext cx="1052705" cy="276999"/>
+          </a:xfrm>
+          <a:prstGeom prst="rect">
+            <a:avLst/>
+          </a:prstGeom>
+          <a:noFill/>
+        </p:spPr>
+        <p:txBody>
+          <a:bodyPr wrap="square" rtlCol="0">
+            <a:spAutoFit/>
+          </a:bodyPr>
+          <a:lstStyle/>
+          <a:p>
+            <a:pPr algn="r"/>
+            <a:r>
+              <a:rPr lang="de-DE" sz="1200" dirty="0"/>
+              <a:t>Timestamp</a:t>
+            </a:r>
+          </a:p>
+        </p:txBody>
+      </p:sp>
+      <p:cxnSp>
+        <p:nvCxnSpPr>
+          <p:cNvPr id="27" name="Gerade Verbindung mit Pfeil 26">
+            <a:extLst>
+              <a:ext uri="{FF2B5EF4-FFF2-40B4-BE49-F238E27FC236}">
+                <a16:creationId xmlns:a16="http://schemas.microsoft.com/office/drawing/2014/main" id="{5C056274-23DB-B81C-3878-BEBCB9EB13A9}"/>
+              </a:ext>
+            </a:extLst>
+          </p:cNvPr>
+          <p:cNvCxnSpPr>
+            <a:cxnSpLocks/>
+          </p:cNvCxnSpPr>
+          <p:nvPr/>
+        </p:nvCxnSpPr>
+        <p:spPr>
+          <a:xfrm flipH="1">
+            <a:off x="1337395" y="2048161"/>
+            <a:ext cx="269732" cy="406234"/>
+          </a:xfrm>
+          <a:prstGeom prst="straightConnector1">
+            <a:avLst/>
+          </a:prstGeom>
+          <a:ln w="12700">
+            <a:solidFill>
+              <a:schemeClr val="tx1"/>
+            </a:solidFill>
+            <a:tailEnd type="triangle"/>
+          </a:ln>
+        </p:spPr>
+        <p:style>
+          <a:lnRef idx="2">
+            <a:schemeClr val="accent1"/>
+          </a:lnRef>
+          <a:fillRef idx="0">
+            <a:schemeClr val="accent1"/>
+          </a:fillRef>
+          <a:effectRef idx="1">
+            <a:schemeClr val="accent1"/>
+          </a:effectRef>
+          <a:fontRef idx="minor">
+            <a:schemeClr val="tx1"/>
+          </a:fontRef>
+        </p:style>
+      </p:cxnSp>
+      <p:cxnSp>
+        <p:nvCxnSpPr>
+          <p:cNvPr id="30" name="Gerade Verbindung mit Pfeil 29">
+            <a:extLst>
+              <a:ext uri="{FF2B5EF4-FFF2-40B4-BE49-F238E27FC236}">
+                <a16:creationId xmlns:a16="http://schemas.microsoft.com/office/drawing/2014/main" id="{0BF8638A-5F98-025B-0676-9BA18539D51D}"/>
+              </a:ext>
+            </a:extLst>
+          </p:cNvPr>
+          <p:cNvCxnSpPr>
+            <a:cxnSpLocks/>
+          </p:cNvCxnSpPr>
+          <p:nvPr/>
+        </p:nvCxnSpPr>
+        <p:spPr>
+          <a:xfrm>
+            <a:off x="786572" y="2048161"/>
+            <a:ext cx="1005283" cy="0"/>
+          </a:xfrm>
+          <a:prstGeom prst="straightConnector1">
+            <a:avLst/>
+          </a:prstGeom>
+          <a:ln w="12700">
+            <a:solidFill>
+              <a:schemeClr val="tx1"/>
+            </a:solidFill>
+            <a:tailEnd type="none"/>
+          </a:ln>
+        </p:spPr>
+        <p:style>
+          <a:lnRef idx="2">
+            <a:schemeClr val="accent1"/>
+          </a:lnRef>
+          <a:fillRef idx="0">
+            <a:schemeClr val="accent1"/>
+          </a:fillRef>
+          <a:effectRef idx="1">
+            <a:schemeClr val="accent1"/>
+          </a:effectRef>
+          <a:fontRef idx="minor">
+            <a:schemeClr val="tx1"/>
+          </a:fontRef>
+        </p:style>
+      </p:cxnSp>
+      <p:cxnSp>
+        <p:nvCxnSpPr>
+          <p:cNvPr id="35" name="Gerade Verbindung mit Pfeil 34">
+            <a:extLst>
+              <a:ext uri="{FF2B5EF4-FFF2-40B4-BE49-F238E27FC236}">
+                <a16:creationId xmlns:a16="http://schemas.microsoft.com/office/drawing/2014/main" id="{DF4310CE-F542-FA9E-CBD9-BA723708539D}"/>
+              </a:ext>
+            </a:extLst>
+          </p:cNvPr>
+          <p:cNvCxnSpPr>
+            <a:cxnSpLocks/>
+          </p:cNvCxnSpPr>
+          <p:nvPr/>
+        </p:nvCxnSpPr>
+        <p:spPr>
+          <a:xfrm flipH="1">
+            <a:off x="2655666" y="2057397"/>
+            <a:ext cx="336916" cy="479445"/>
+          </a:xfrm>
+          <a:prstGeom prst="straightConnector1">
+            <a:avLst/>
+          </a:prstGeom>
+          <a:ln w="12700">
+            <a:solidFill>
+              <a:schemeClr val="tx1"/>
+            </a:solidFill>
+            <a:tailEnd type="triangle"/>
+          </a:ln>
+        </p:spPr>
+        <p:style>
+          <a:lnRef idx="2">
+            <a:schemeClr val="accent1"/>
+          </a:lnRef>
+          <a:fillRef idx="0">
+            <a:schemeClr val="accent1"/>
+          </a:fillRef>
+          <a:effectRef idx="1">
+            <a:schemeClr val="accent1"/>
+          </a:effectRef>
+          <a:fontRef idx="minor">
+            <a:schemeClr val="tx1"/>
+          </a:fontRef>
+        </p:style>
+      </p:cxnSp>
+      <p:cxnSp>
+        <p:nvCxnSpPr>
+          <p:cNvPr id="40" name="Gerade Verbindung mit Pfeil 39">
+            <a:extLst>
+              <a:ext uri="{FF2B5EF4-FFF2-40B4-BE49-F238E27FC236}">
+                <a16:creationId xmlns:a16="http://schemas.microsoft.com/office/drawing/2014/main" id="{DCC30585-3466-90EF-5E1D-7BF3B01C9673}"/>
+              </a:ext>
+            </a:extLst>
+          </p:cNvPr>
+          <p:cNvCxnSpPr>
+            <a:cxnSpLocks/>
+          </p:cNvCxnSpPr>
+          <p:nvPr/>
+        </p:nvCxnSpPr>
+        <p:spPr>
+          <a:xfrm flipH="1">
+            <a:off x="4052560" y="2081424"/>
+            <a:ext cx="334713" cy="529033"/>
+          </a:xfrm>
+          <a:prstGeom prst="straightConnector1">
+            <a:avLst/>
+          </a:prstGeom>
+          <a:ln w="12700">
+            <a:solidFill>
+              <a:schemeClr val="tx1"/>
+            </a:solidFill>
+            <a:tailEnd type="triangle"/>
+          </a:ln>
+        </p:spPr>
+        <p:style>
+          <a:lnRef idx="2">
+            <a:schemeClr val="accent1"/>
+          </a:lnRef>
+          <a:fillRef idx="0">
+            <a:schemeClr val="accent1"/>
+          </a:fillRef>
+          <a:effectRef idx="1">
+            <a:schemeClr val="accent1"/>
+          </a:effectRef>
+          <a:fontRef idx="minor">
+            <a:schemeClr val="tx1"/>
+          </a:fontRef>
+        </p:style>
+      </p:cxnSp>
+      <p:cxnSp>
+        <p:nvCxnSpPr>
+          <p:cNvPr id="41" name="Gerade Verbindung mit Pfeil 40">
+            <a:extLst>
+              <a:ext uri="{FF2B5EF4-FFF2-40B4-BE49-F238E27FC236}">
+                <a16:creationId xmlns:a16="http://schemas.microsoft.com/office/drawing/2014/main" id="{3399D439-86A4-19F6-50D2-7A472BD4038D}"/>
+              </a:ext>
+            </a:extLst>
+          </p:cNvPr>
+          <p:cNvCxnSpPr>
+            <a:cxnSpLocks/>
+          </p:cNvCxnSpPr>
+          <p:nvPr/>
+        </p:nvCxnSpPr>
+        <p:spPr>
+          <a:xfrm>
+            <a:off x="6293765" y="2075884"/>
+            <a:ext cx="5103908" cy="0"/>
+          </a:xfrm>
+          <a:prstGeom prst="straightConnector1">
+            <a:avLst/>
+          </a:prstGeom>
+          <a:ln w="12700">
+            <a:solidFill>
+              <a:schemeClr val="tx1"/>
+            </a:solidFill>
+            <a:tailEnd type="none"/>
+          </a:ln>
+        </p:spPr>
+        <p:style>
+          <a:lnRef idx="2">
+            <a:schemeClr val="accent1"/>
+          </a:lnRef>
+          <a:fillRef idx="0">
+            <a:schemeClr val="accent1"/>
+          </a:fillRef>
+          <a:effectRef idx="1">
+            <a:schemeClr val="accent1"/>
+          </a:effectRef>
+          <a:fontRef idx="minor">
+            <a:schemeClr val="tx1"/>
+          </a:fontRef>
+        </p:style>
+      </p:cxnSp>
+      <p:sp>
+        <p:nvSpPr>
+          <p:cNvPr id="42" name="Textfeld 41">
+            <a:extLst>
+              <a:ext uri="{FF2B5EF4-FFF2-40B4-BE49-F238E27FC236}">
+                <a16:creationId xmlns:a16="http://schemas.microsoft.com/office/drawing/2014/main" id="{F7664028-031C-EC25-49C7-F30529B1855C}"/>
+              </a:ext>
+            </a:extLst>
+          </p:cNvPr>
+          <p:cNvSpPr txBox="1"/>
+          <p:nvPr/>
+        </p:nvSpPr>
+        <p:spPr>
+          <a:xfrm>
+            <a:off x="6289964" y="1827777"/>
+            <a:ext cx="5175895" cy="276999"/>
+          </a:xfrm>
+          <a:prstGeom prst="rect">
+            <a:avLst/>
+          </a:prstGeom>
+          <a:noFill/>
+        </p:spPr>
+        <p:txBody>
+          <a:bodyPr wrap="square" rtlCol="0">
+            <a:spAutoFit/>
+          </a:bodyPr>
+          <a:lstStyle/>
+          <a:p>
+            <a:r>
+              <a:rPr lang="de-DE" sz="1200" dirty="0"/>
+              <a:t>Log-Details (hier Paket-, Scanner,- Gewichtsdaten)</a:t>
+            </a:r>
+          </a:p>
+        </p:txBody>
+      </p:sp>
+      <p:cxnSp>
+        <p:nvCxnSpPr>
+          <p:cNvPr id="43" name="Gerade Verbindung mit Pfeil 42">
+            <a:extLst>
+              <a:ext uri="{FF2B5EF4-FFF2-40B4-BE49-F238E27FC236}">
+                <a16:creationId xmlns:a16="http://schemas.microsoft.com/office/drawing/2014/main" id="{EA679DAB-6379-E91A-1158-20BCC0A650A0}"/>
+              </a:ext>
+            </a:extLst>
+          </p:cNvPr>
+          <p:cNvCxnSpPr>
+            <a:cxnSpLocks/>
+          </p:cNvCxnSpPr>
+          <p:nvPr/>
+        </p:nvCxnSpPr>
+        <p:spPr>
+          <a:xfrm>
+            <a:off x="4387273" y="2081424"/>
+            <a:ext cx="1679972" cy="0"/>
+          </a:xfrm>
+          <a:prstGeom prst="straightConnector1">
+            <a:avLst/>
+          </a:prstGeom>
+          <a:ln w="12700">
+            <a:solidFill>
+              <a:schemeClr val="tx1"/>
+            </a:solidFill>
+            <a:tailEnd type="none"/>
+          </a:ln>
+        </p:spPr>
+        <p:style>
+          <a:lnRef idx="2">
+            <a:schemeClr val="accent1"/>
+          </a:lnRef>
+          <a:fillRef idx="0">
+            <a:schemeClr val="accent1"/>
+          </a:fillRef>
+          <a:effectRef idx="1">
+            <a:schemeClr val="accent1"/>
+          </a:effectRef>
+          <a:fontRef idx="minor">
+            <a:schemeClr val="tx1"/>
+          </a:fontRef>
+        </p:style>
+      </p:cxnSp>
+      <p:sp>
+        <p:nvSpPr>
+          <p:cNvPr id="44" name="Textfeld 43">
+            <a:extLst>
+              <a:ext uri="{FF2B5EF4-FFF2-40B4-BE49-F238E27FC236}">
+                <a16:creationId xmlns:a16="http://schemas.microsoft.com/office/drawing/2014/main" id="{EF7C89CF-FA7C-8896-DB6B-598FFB4862FB}"/>
+              </a:ext>
+            </a:extLst>
+          </p:cNvPr>
+          <p:cNvSpPr txBox="1"/>
+          <p:nvPr/>
+        </p:nvSpPr>
+        <p:spPr>
+          <a:xfrm>
+            <a:off x="4348125" y="1829125"/>
+            <a:ext cx="1736436" cy="276999"/>
+          </a:xfrm>
+          <a:prstGeom prst="rect">
+            <a:avLst/>
+          </a:prstGeom>
+          <a:noFill/>
+        </p:spPr>
+        <p:txBody>
+          <a:bodyPr wrap="square" rtlCol="0">
+            <a:spAutoFit/>
+          </a:bodyPr>
+          <a:lstStyle/>
+          <a:p>
+            <a:pPr algn="r"/>
+            <a:r>
+              <a:rPr lang="de-DE" sz="1200" dirty="0"/>
+              <a:t>IT Sytem der Logsource</a:t>
+            </a:r>
+          </a:p>
+        </p:txBody>
+      </p:sp>
+      <p:cxnSp>
+        <p:nvCxnSpPr>
+          <p:cNvPr id="48" name="Gerade Verbindung mit Pfeil 47">
+            <a:extLst>
+              <a:ext uri="{FF2B5EF4-FFF2-40B4-BE49-F238E27FC236}">
+                <a16:creationId xmlns:a16="http://schemas.microsoft.com/office/drawing/2014/main" id="{44DAC300-D027-93F7-F739-5C20810EE570}"/>
+              </a:ext>
+            </a:extLst>
+          </p:cNvPr>
+          <p:cNvCxnSpPr>
+            <a:cxnSpLocks/>
+          </p:cNvCxnSpPr>
+          <p:nvPr/>
+        </p:nvCxnSpPr>
+        <p:spPr>
+          <a:xfrm flipH="1">
+            <a:off x="5925830" y="2081424"/>
+            <a:ext cx="372760" cy="624745"/>
+          </a:xfrm>
+          <a:prstGeom prst="straightConnector1">
+            <a:avLst/>
+          </a:prstGeom>
+          <a:ln w="12700">
+            <a:solidFill>
+              <a:schemeClr val="tx1"/>
+            </a:solidFill>
+            <a:tailEnd type="triangle"/>
+          </a:ln>
+        </p:spPr>
+        <p:style>
+          <a:lnRef idx="2">
+            <a:schemeClr val="accent1"/>
+          </a:lnRef>
+          <a:fillRef idx="0">
+            <a:schemeClr val="accent1"/>
+          </a:fillRef>
+          <a:effectRef idx="1">
+            <a:schemeClr val="accent1"/>
+          </a:effectRef>
+          <a:fontRef idx="minor">
+            <a:schemeClr val="tx1"/>
+          </a:fontRef>
+        </p:style>
+      </p:cxnSp>
+      <p:pic>
+        <p:nvPicPr>
+          <p:cNvPr id="52" name="Grafik 51">
+            <a:extLst>
+              <a:ext uri="{FF2B5EF4-FFF2-40B4-BE49-F238E27FC236}">
+                <a16:creationId xmlns:a16="http://schemas.microsoft.com/office/drawing/2014/main" id="{62B0AEBD-0D4D-0C08-2A10-1A9F954BA836}"/>
+              </a:ext>
+            </a:extLst>
+          </p:cNvPr>
+          <p:cNvPicPr>
+            <a:picLocks noChangeAspect="1"/>
+          </p:cNvPicPr>
+          <p:nvPr/>
+        </p:nvPicPr>
+        <p:blipFill>
+          <a:blip r:embed="rId3"/>
+          <a:stretch>
+            <a:fillRect/>
+          </a:stretch>
+        </p:blipFill>
+        <p:spPr>
+          <a:xfrm>
+            <a:off x="1607127" y="4464952"/>
+            <a:ext cx="9975273" cy="1769450"/>
+          </a:xfrm>
+          <a:prstGeom prst="ellipse">
+            <a:avLst/>
+          </a:prstGeom>
+          <a:ln w="9525" cap="rnd">
+            <a:solidFill>
+              <a:srgbClr val="333333"/>
+            </a:solidFill>
+          </a:ln>
+          <a:effectLst>
+            <a:outerShdw blurRad="381000" dist="292100" dir="5400000" sx="-80000" sy="-18000" rotWithShape="0">
+              <a:srgbClr val="000000">
+                <a:alpha val="22000"/>
+              </a:srgbClr>
+            </a:outerShdw>
+          </a:effectLst>
+          <a:scene3d>
+            <a:camera prst="orthographicFront"/>
+            <a:lightRig rig="contrasting" dir="t">
+              <a:rot lat="0" lon="0" rev="3000000"/>
+            </a:lightRig>
+          </a:scene3d>
+          <a:sp3d contourW="7620">
+            <a:bevelT w="95250" h="31750"/>
+            <a:contourClr>
+              <a:srgbClr val="333333"/>
+            </a:contourClr>
+          </a:sp3d>
+        </p:spPr>
+      </p:pic>
+      <p:cxnSp>
+        <p:nvCxnSpPr>
+          <p:cNvPr id="53" name="Gerade Verbindung mit Pfeil 52">
+            <a:extLst>
+              <a:ext uri="{FF2B5EF4-FFF2-40B4-BE49-F238E27FC236}">
+                <a16:creationId xmlns:a16="http://schemas.microsoft.com/office/drawing/2014/main" id="{033F90DC-3DA5-A1B5-6B60-792A878FEBEB}"/>
+              </a:ext>
+            </a:extLst>
+          </p:cNvPr>
+          <p:cNvCxnSpPr>
+            <a:cxnSpLocks/>
+          </p:cNvCxnSpPr>
+          <p:nvPr/>
+        </p:nvCxnSpPr>
+        <p:spPr>
+          <a:xfrm flipH="1">
+            <a:off x="4554841" y="2872509"/>
+            <a:ext cx="3942614" cy="2189480"/>
+          </a:xfrm>
+          <a:prstGeom prst="straightConnector1">
+            <a:avLst/>
+          </a:prstGeom>
+          <a:ln w="12700">
+            <a:solidFill>
+              <a:schemeClr val="tx1"/>
+            </a:solidFill>
+            <a:tailEnd type="triangle"/>
+          </a:ln>
+        </p:spPr>
+        <p:style>
+          <a:lnRef idx="2">
+            <a:schemeClr val="accent1"/>
+          </a:lnRef>
+          <a:fillRef idx="0">
+            <a:schemeClr val="accent1"/>
+          </a:fillRef>
+          <a:effectRef idx="1">
+            <a:schemeClr val="accent1"/>
+          </a:effectRef>
+          <a:fontRef idx="minor">
+            <a:schemeClr val="tx1"/>
+          </a:fontRef>
+        </p:style>
+      </p:cxnSp>
+      <p:cxnSp>
+        <p:nvCxnSpPr>
+          <p:cNvPr id="55" name="Gerade Verbindung mit Pfeil 54">
+            <a:extLst>
+              <a:ext uri="{FF2B5EF4-FFF2-40B4-BE49-F238E27FC236}">
+                <a16:creationId xmlns:a16="http://schemas.microsoft.com/office/drawing/2014/main" id="{DD0AD0F0-7F62-1F4D-FC69-B6CBE32E429A}"/>
+              </a:ext>
+            </a:extLst>
+          </p:cNvPr>
+          <p:cNvCxnSpPr>
+            <a:cxnSpLocks/>
+          </p:cNvCxnSpPr>
+          <p:nvPr/>
+        </p:nvCxnSpPr>
+        <p:spPr>
+          <a:xfrm flipH="1">
+            <a:off x="3358732" y="2872509"/>
+            <a:ext cx="4501413" cy="2217188"/>
+          </a:xfrm>
+          <a:prstGeom prst="straightConnector1">
+            <a:avLst/>
+          </a:prstGeom>
+          <a:ln w="12700">
+            <a:solidFill>
+              <a:schemeClr val="tx1"/>
+            </a:solidFill>
+            <a:tailEnd type="triangle"/>
+          </a:ln>
+        </p:spPr>
+        <p:style>
+          <a:lnRef idx="2">
+            <a:schemeClr val="accent1"/>
+          </a:lnRef>
+          <a:fillRef idx="0">
+            <a:schemeClr val="accent1"/>
+          </a:fillRef>
+          <a:effectRef idx="1">
+            <a:schemeClr val="accent1"/>
+          </a:effectRef>
+          <a:fontRef idx="minor">
+            <a:schemeClr val="tx1"/>
+          </a:fontRef>
+        </p:style>
+      </p:cxnSp>
+      <p:cxnSp>
+        <p:nvCxnSpPr>
+          <p:cNvPr id="57" name="Gerade Verbindung mit Pfeil 56">
+            <a:extLst>
+              <a:ext uri="{FF2B5EF4-FFF2-40B4-BE49-F238E27FC236}">
+                <a16:creationId xmlns:a16="http://schemas.microsoft.com/office/drawing/2014/main" id="{BEC1B94E-CC4D-A246-E119-D8268372D6F5}"/>
+              </a:ext>
+            </a:extLst>
+          </p:cNvPr>
+          <p:cNvCxnSpPr>
+            <a:cxnSpLocks/>
+          </p:cNvCxnSpPr>
+          <p:nvPr/>
+        </p:nvCxnSpPr>
+        <p:spPr>
+          <a:xfrm flipH="1">
+            <a:off x="5917204" y="2912288"/>
+            <a:ext cx="3069778" cy="2131229"/>
+          </a:xfrm>
+          <a:prstGeom prst="straightConnector1">
+            <a:avLst/>
+          </a:prstGeom>
+          <a:ln w="12700">
+            <a:solidFill>
+              <a:schemeClr val="tx1"/>
+            </a:solidFill>
+            <a:tailEnd type="triangle"/>
+          </a:ln>
+        </p:spPr>
+        <p:style>
+          <a:lnRef idx="2">
+            <a:schemeClr val="accent1"/>
+          </a:lnRef>
+          <a:fillRef idx="0">
+            <a:schemeClr val="accent1"/>
+          </a:fillRef>
+          <a:effectRef idx="1">
+            <a:schemeClr val="accent1"/>
+          </a:effectRef>
+          <a:fontRef idx="minor">
+            <a:schemeClr val="tx1"/>
+          </a:fontRef>
+        </p:style>
+      </p:cxnSp>
+      <p:cxnSp>
+        <p:nvCxnSpPr>
+          <p:cNvPr id="60" name="Gerade Verbindung mit Pfeil 59">
+            <a:extLst>
+              <a:ext uri="{FF2B5EF4-FFF2-40B4-BE49-F238E27FC236}">
+                <a16:creationId xmlns:a16="http://schemas.microsoft.com/office/drawing/2014/main" id="{4AF5D3CC-026F-67A1-69CA-73FA136795BE}"/>
+              </a:ext>
+            </a:extLst>
+          </p:cNvPr>
+          <p:cNvCxnSpPr>
+            <a:cxnSpLocks/>
+          </p:cNvCxnSpPr>
+          <p:nvPr/>
+        </p:nvCxnSpPr>
+        <p:spPr>
+          <a:xfrm flipH="1">
+            <a:off x="7680475" y="2912288"/>
+            <a:ext cx="2013089" cy="2120575"/>
+          </a:xfrm>
+          <a:prstGeom prst="straightConnector1">
+            <a:avLst/>
+          </a:prstGeom>
+          <a:ln w="12700">
+            <a:solidFill>
+              <a:schemeClr val="tx1"/>
+            </a:solidFill>
+            <a:tailEnd type="triangle"/>
+          </a:ln>
+        </p:spPr>
+        <p:style>
+          <a:lnRef idx="2">
+            <a:schemeClr val="accent1"/>
+          </a:lnRef>
+          <a:fillRef idx="0">
+            <a:schemeClr val="accent1"/>
+          </a:fillRef>
+          <a:effectRef idx="1">
+            <a:schemeClr val="accent1"/>
+          </a:effectRef>
+          <a:fontRef idx="minor">
+            <a:schemeClr val="tx1"/>
+          </a:fontRef>
+        </p:style>
+      </p:cxnSp>
+      <p:cxnSp>
+        <p:nvCxnSpPr>
+          <p:cNvPr id="62" name="Gerade Verbindung mit Pfeil 61">
+            <a:extLst>
+              <a:ext uri="{FF2B5EF4-FFF2-40B4-BE49-F238E27FC236}">
+                <a16:creationId xmlns:a16="http://schemas.microsoft.com/office/drawing/2014/main" id="{E758D415-C2AC-69F9-C65A-F35D727E4BA6}"/>
+              </a:ext>
+            </a:extLst>
+          </p:cNvPr>
+          <p:cNvCxnSpPr>
+            <a:cxnSpLocks/>
+          </p:cNvCxnSpPr>
+          <p:nvPr/>
+        </p:nvCxnSpPr>
+        <p:spPr>
+          <a:xfrm flipH="1">
+            <a:off x="9019531" y="2901634"/>
+            <a:ext cx="1329814" cy="2141883"/>
+          </a:xfrm>
+          <a:prstGeom prst="straightConnector1">
+            <a:avLst/>
+          </a:prstGeom>
+          <a:ln w="12700">
+            <a:solidFill>
+              <a:schemeClr val="tx1"/>
+            </a:solidFill>
+            <a:tailEnd type="triangle"/>
+          </a:ln>
+        </p:spPr>
+        <p:style>
+          <a:lnRef idx="2">
+            <a:schemeClr val="accent1"/>
+          </a:lnRef>
+          <a:fillRef idx="0">
+            <a:schemeClr val="accent1"/>
+          </a:fillRef>
+          <a:effectRef idx="1">
+            <a:schemeClr val="accent1"/>
+          </a:effectRef>
+          <a:fontRef idx="minor">
+            <a:schemeClr val="tx1"/>
+          </a:fontRef>
+        </p:style>
+      </p:cxnSp>
+      <p:cxnSp>
+        <p:nvCxnSpPr>
+          <p:cNvPr id="64" name="Gerade Verbindung mit Pfeil 63">
+            <a:extLst>
+              <a:ext uri="{FF2B5EF4-FFF2-40B4-BE49-F238E27FC236}">
+                <a16:creationId xmlns:a16="http://schemas.microsoft.com/office/drawing/2014/main" id="{1633B7FC-212A-137A-641D-B4BFA9F0A36F}"/>
+              </a:ext>
+            </a:extLst>
+          </p:cNvPr>
+          <p:cNvCxnSpPr>
+            <a:cxnSpLocks/>
+          </p:cNvCxnSpPr>
+          <p:nvPr/>
+        </p:nvCxnSpPr>
+        <p:spPr>
+          <a:xfrm>
+            <a:off x="10871421" y="2912288"/>
+            <a:ext cx="46072" cy="2152291"/>
+          </a:xfrm>
+          <a:prstGeom prst="straightConnector1">
+            <a:avLst/>
+          </a:prstGeom>
+          <a:ln w="12700">
+            <a:solidFill>
+              <a:schemeClr val="tx1"/>
+            </a:solidFill>
+            <a:tailEnd type="triangle"/>
+          </a:ln>
+        </p:spPr>
+        <p:style>
+          <a:lnRef idx="2">
+            <a:schemeClr val="accent1"/>
+          </a:lnRef>
+          <a:fillRef idx="0">
+            <a:schemeClr val="accent1"/>
+          </a:fillRef>
+          <a:effectRef idx="1">
+            <a:schemeClr val="accent1"/>
+          </a:effectRef>
+          <a:fontRef idx="minor">
+            <a:schemeClr val="tx1"/>
+          </a:fontRef>
+        </p:style>
+      </p:cxnSp>
+      <p:sp>
+        <p:nvSpPr>
+          <p:cNvPr id="66" name="Rechteck 65">
+            <a:extLst>
+              <a:ext uri="{FF2B5EF4-FFF2-40B4-BE49-F238E27FC236}">
+                <a16:creationId xmlns:a16="http://schemas.microsoft.com/office/drawing/2014/main" id="{7033AD97-FC78-D9B8-AF95-65C8AAD24A3F}"/>
+              </a:ext>
+            </a:extLst>
+          </p:cNvPr>
+          <p:cNvSpPr/>
+          <p:nvPr/>
+        </p:nvSpPr>
+        <p:spPr>
+          <a:xfrm>
+            <a:off x="1710014" y="5055124"/>
+            <a:ext cx="2179920" cy="286501"/>
+          </a:xfrm>
+          <a:prstGeom prst="rect">
+            <a:avLst/>
+          </a:prstGeom>
+          <a:solidFill>
+            <a:srgbClr val="FFFF00">
+              <a:alpha val="17000"/>
+            </a:srgbClr>
+          </a:solidFill>
+          <a:ln>
+            <a:noFill/>
+          </a:ln>
+        </p:spPr>
+        <p:style>
+          <a:lnRef idx="2">
+            <a:schemeClr val="accent1">
+              <a:shade val="15000"/>
+            </a:schemeClr>
+          </a:lnRef>
+          <a:fillRef idx="1">
+            <a:schemeClr val="accent1"/>
+          </a:fillRef>
+          <a:effectRef idx="0">
+            <a:schemeClr val="accent1"/>
+          </a:effectRef>
+          <a:fontRef idx="minor">
+            <a:schemeClr val="lt1"/>
+          </a:fontRef>
+        </p:style>
+        <p:txBody>
+          <a:bodyPr rtlCol="0" anchor="ctr"/>
+          <a:lstStyle/>
+          <a:p>
+            <a:pPr algn="ctr"/>
+            <a:endParaRPr lang="de-DE"/>
+          </a:p>
+        </p:txBody>
+      </p:sp>
+      <p:sp>
+        <p:nvSpPr>
+          <p:cNvPr id="67" name="Rechteck 66">
+            <a:extLst>
+              <a:ext uri="{FF2B5EF4-FFF2-40B4-BE49-F238E27FC236}">
+                <a16:creationId xmlns:a16="http://schemas.microsoft.com/office/drawing/2014/main" id="{59803A22-A8CB-B78E-3B88-4B4DD5D6C48B}"/>
+              </a:ext>
+            </a:extLst>
+          </p:cNvPr>
+          <p:cNvSpPr/>
+          <p:nvPr/>
+        </p:nvSpPr>
+        <p:spPr>
+          <a:xfrm>
+            <a:off x="7495069" y="2722460"/>
+            <a:ext cx="868791" cy="187962"/>
+          </a:xfrm>
+          <a:prstGeom prst="rect">
+            <a:avLst/>
+          </a:prstGeom>
+          <a:solidFill>
+            <a:srgbClr val="FFFF00">
+              <a:alpha val="17000"/>
+            </a:srgbClr>
+          </a:solidFill>
+          <a:ln>
+            <a:noFill/>
+          </a:ln>
+        </p:spPr>
+        <p:style>
+          <a:lnRef idx="2">
+            <a:schemeClr val="accent1">
+              <a:shade val="15000"/>
+            </a:schemeClr>
+          </a:lnRef>
+          <a:fillRef idx="1">
+            <a:schemeClr val="accent1"/>
+          </a:fillRef>
+          <a:effectRef idx="0">
+            <a:schemeClr val="accent1"/>
+          </a:effectRef>
+          <a:fontRef idx="minor">
+            <a:schemeClr val="lt1"/>
+          </a:fontRef>
+        </p:style>
+        <p:txBody>
+          <a:bodyPr rtlCol="0" anchor="ctr"/>
+          <a:lstStyle/>
+          <a:p>
+            <a:pPr algn="ctr"/>
+            <a:endParaRPr lang="de-DE"/>
+          </a:p>
+        </p:txBody>
+      </p:sp>
+      <p:sp>
+        <p:nvSpPr>
+          <p:cNvPr id="68" name="Rechteck 67">
+            <a:extLst>
+              <a:ext uri="{FF2B5EF4-FFF2-40B4-BE49-F238E27FC236}">
+                <a16:creationId xmlns:a16="http://schemas.microsoft.com/office/drawing/2014/main" id="{F266150B-A175-5798-5050-4E3F5C0D3AF2}"/>
+              </a:ext>
+            </a:extLst>
+          </p:cNvPr>
+          <p:cNvSpPr/>
+          <p:nvPr/>
+        </p:nvSpPr>
+        <p:spPr>
+          <a:xfrm>
+            <a:off x="4233689" y="5035869"/>
+            <a:ext cx="1304497" cy="286501"/>
+          </a:xfrm>
+          <a:prstGeom prst="rect">
+            <a:avLst/>
+          </a:prstGeom>
+          <a:solidFill>
+            <a:srgbClr val="0070C0">
+              <a:alpha val="17000"/>
+            </a:srgbClr>
+          </a:solidFill>
+          <a:ln>
+            <a:noFill/>
+          </a:ln>
+        </p:spPr>
+        <p:style>
+          <a:lnRef idx="2">
+            <a:schemeClr val="accent1">
+              <a:shade val="15000"/>
+            </a:schemeClr>
+          </a:lnRef>
+          <a:fillRef idx="1">
+            <a:schemeClr val="accent1"/>
+          </a:fillRef>
+          <a:effectRef idx="0">
+            <a:schemeClr val="accent1"/>
+          </a:effectRef>
+          <a:fontRef idx="minor">
+            <a:schemeClr val="lt1"/>
+          </a:fontRef>
+        </p:style>
+        <p:txBody>
+          <a:bodyPr rtlCol="0" anchor="ctr"/>
+          <a:lstStyle/>
+          <a:p>
+            <a:pPr algn="ctr"/>
+            <a:endParaRPr lang="de-DE"/>
+          </a:p>
+        </p:txBody>
+      </p:sp>
+      <p:sp>
+        <p:nvSpPr>
+          <p:cNvPr id="70" name="Rechteck 69">
+            <a:extLst>
+              <a:ext uri="{FF2B5EF4-FFF2-40B4-BE49-F238E27FC236}">
+                <a16:creationId xmlns:a16="http://schemas.microsoft.com/office/drawing/2014/main" id="{D3CD9437-45E8-6E21-E37F-91D30D3111A4}"/>
+              </a:ext>
+            </a:extLst>
+          </p:cNvPr>
+          <p:cNvSpPr/>
+          <p:nvPr/>
+        </p:nvSpPr>
+        <p:spPr>
+          <a:xfrm>
+            <a:off x="8478353" y="2724326"/>
+            <a:ext cx="480921" cy="187962"/>
+          </a:xfrm>
+          <a:prstGeom prst="rect">
+            <a:avLst/>
+          </a:prstGeom>
+          <a:solidFill>
+            <a:srgbClr val="0070C0">
+              <a:alpha val="17000"/>
+            </a:srgbClr>
+          </a:solidFill>
+          <a:ln>
+            <a:noFill/>
+          </a:ln>
+        </p:spPr>
+        <p:style>
+          <a:lnRef idx="2">
+            <a:schemeClr val="accent1">
+              <a:shade val="15000"/>
+            </a:schemeClr>
+          </a:lnRef>
+          <a:fillRef idx="1">
+            <a:schemeClr val="accent1"/>
+          </a:fillRef>
+          <a:effectRef idx="0">
+            <a:schemeClr val="accent1"/>
+          </a:effectRef>
+          <a:fontRef idx="minor">
+            <a:schemeClr val="lt1"/>
+          </a:fontRef>
+        </p:style>
+        <p:txBody>
+          <a:bodyPr rtlCol="0" anchor="ctr"/>
+          <a:lstStyle/>
+          <a:p>
+            <a:pPr algn="ctr"/>
+            <a:endParaRPr lang="de-DE"/>
+          </a:p>
+        </p:txBody>
+      </p:sp>
+      <p:sp>
+        <p:nvSpPr>
+          <p:cNvPr id="71" name="Rechteck 70">
+            <a:extLst>
+              <a:ext uri="{FF2B5EF4-FFF2-40B4-BE49-F238E27FC236}">
+                <a16:creationId xmlns:a16="http://schemas.microsoft.com/office/drawing/2014/main" id="{862AC418-ECC3-D210-EDD4-056BD9D4EF1F}"/>
+              </a:ext>
+            </a:extLst>
+          </p:cNvPr>
+          <p:cNvSpPr/>
+          <p:nvPr/>
+        </p:nvSpPr>
+        <p:spPr>
+          <a:xfrm>
+            <a:off x="8999879" y="2722299"/>
+            <a:ext cx="584163" cy="180753"/>
+          </a:xfrm>
+          <a:prstGeom prst="rect">
+            <a:avLst/>
+          </a:prstGeom>
+          <a:solidFill>
+            <a:srgbClr val="00B050">
+              <a:alpha val="17000"/>
+            </a:srgbClr>
+          </a:solidFill>
+          <a:ln>
+            <a:noFill/>
+          </a:ln>
+        </p:spPr>
+        <p:style>
+          <a:lnRef idx="2">
+            <a:schemeClr val="accent1">
+              <a:shade val="15000"/>
+            </a:schemeClr>
+          </a:lnRef>
+          <a:fillRef idx="1">
+            <a:schemeClr val="accent1"/>
+          </a:fillRef>
+          <a:effectRef idx="0">
+            <a:schemeClr val="accent1"/>
+          </a:effectRef>
+          <a:fontRef idx="minor">
+            <a:schemeClr val="lt1"/>
+          </a:fontRef>
+        </p:style>
+        <p:txBody>
+          <a:bodyPr rtlCol="0" anchor="ctr"/>
+          <a:lstStyle/>
+          <a:p>
+            <a:pPr algn="ctr"/>
+            <a:endParaRPr lang="de-DE"/>
+          </a:p>
+        </p:txBody>
+      </p:sp>
+      <p:sp>
+        <p:nvSpPr>
+          <p:cNvPr id="72" name="Rechteck 71">
+            <a:extLst>
+              <a:ext uri="{FF2B5EF4-FFF2-40B4-BE49-F238E27FC236}">
+                <a16:creationId xmlns:a16="http://schemas.microsoft.com/office/drawing/2014/main" id="{C33C31E2-50B9-D54C-3A37-0A1630DD3A5D}"/>
+              </a:ext>
+            </a:extLst>
+          </p:cNvPr>
+          <p:cNvSpPr/>
+          <p:nvPr/>
+        </p:nvSpPr>
+        <p:spPr>
+          <a:xfrm>
+            <a:off x="5693997" y="5032863"/>
+            <a:ext cx="1595794" cy="286501"/>
+          </a:xfrm>
+          <a:prstGeom prst="rect">
+            <a:avLst/>
+          </a:prstGeom>
+          <a:solidFill>
+            <a:srgbClr val="00B050">
+              <a:alpha val="17000"/>
+            </a:srgbClr>
+          </a:solidFill>
+          <a:ln>
+            <a:noFill/>
+          </a:ln>
+        </p:spPr>
+        <p:style>
+          <a:lnRef idx="2">
+            <a:schemeClr val="accent1">
+              <a:shade val="15000"/>
+            </a:schemeClr>
+          </a:lnRef>
+          <a:fillRef idx="1">
+            <a:schemeClr val="accent1"/>
+          </a:fillRef>
+          <a:effectRef idx="0">
+            <a:schemeClr val="accent1"/>
+          </a:effectRef>
+          <a:fontRef idx="minor">
+            <a:schemeClr val="lt1"/>
+          </a:fontRef>
+        </p:style>
+        <p:txBody>
+          <a:bodyPr rtlCol="0" anchor="ctr"/>
+          <a:lstStyle/>
+          <a:p>
+            <a:pPr algn="ctr"/>
+            <a:endParaRPr lang="de-DE"/>
+          </a:p>
+        </p:txBody>
+      </p:sp>
+      <p:sp>
+        <p:nvSpPr>
+          <p:cNvPr id="73" name="Rechteck 72">
+            <a:extLst>
+              <a:ext uri="{FF2B5EF4-FFF2-40B4-BE49-F238E27FC236}">
+                <a16:creationId xmlns:a16="http://schemas.microsoft.com/office/drawing/2014/main" id="{E6B6CE37-E01C-2AF7-A49E-037E3847D291}"/>
+              </a:ext>
+            </a:extLst>
+          </p:cNvPr>
+          <p:cNvSpPr/>
+          <p:nvPr/>
+        </p:nvSpPr>
+        <p:spPr>
+          <a:xfrm>
+            <a:off x="7353195" y="5032862"/>
+            <a:ext cx="1329814" cy="308763"/>
+          </a:xfrm>
+          <a:prstGeom prst="rect">
+            <a:avLst/>
+          </a:prstGeom>
+          <a:solidFill>
+            <a:schemeClr val="accent5">
+              <a:lumMod val="75000"/>
+              <a:alpha val="17000"/>
+            </a:schemeClr>
+          </a:solidFill>
+          <a:ln>
+            <a:noFill/>
+          </a:ln>
+        </p:spPr>
+        <p:style>
+          <a:lnRef idx="2">
+            <a:schemeClr val="accent1">
+              <a:shade val="15000"/>
+            </a:schemeClr>
+          </a:lnRef>
+          <a:fillRef idx="1">
+            <a:schemeClr val="accent1"/>
+          </a:fillRef>
+          <a:effectRef idx="0">
+            <a:schemeClr val="accent1"/>
+          </a:effectRef>
+          <a:fontRef idx="minor">
+            <a:schemeClr val="lt1"/>
+          </a:fontRef>
+        </p:style>
+        <p:txBody>
+          <a:bodyPr rtlCol="0" anchor="ctr"/>
+          <a:lstStyle/>
+          <a:p>
+            <a:pPr algn="ctr"/>
+            <a:endParaRPr lang="de-DE"/>
+          </a:p>
+        </p:txBody>
+      </p:sp>
+      <p:sp>
+        <p:nvSpPr>
+          <p:cNvPr id="74" name="Rechteck 73">
+            <a:extLst>
+              <a:ext uri="{FF2B5EF4-FFF2-40B4-BE49-F238E27FC236}">
+                <a16:creationId xmlns:a16="http://schemas.microsoft.com/office/drawing/2014/main" id="{5FA51906-F72B-A7F4-2F85-64EA087D453C}"/>
+              </a:ext>
+            </a:extLst>
+          </p:cNvPr>
+          <p:cNvSpPr/>
+          <p:nvPr/>
+        </p:nvSpPr>
+        <p:spPr>
+          <a:xfrm>
+            <a:off x="9608189" y="2717277"/>
+            <a:ext cx="483305" cy="195011"/>
+          </a:xfrm>
+          <a:prstGeom prst="rect">
+            <a:avLst/>
+          </a:prstGeom>
+          <a:solidFill>
+            <a:schemeClr val="accent5">
+              <a:lumMod val="75000"/>
+              <a:alpha val="17000"/>
+            </a:schemeClr>
+          </a:solidFill>
+          <a:ln>
+            <a:noFill/>
+          </a:ln>
+        </p:spPr>
+        <p:style>
+          <a:lnRef idx="2">
+            <a:schemeClr val="accent1">
+              <a:shade val="15000"/>
+            </a:schemeClr>
+          </a:lnRef>
+          <a:fillRef idx="1">
+            <a:schemeClr val="accent1"/>
+          </a:fillRef>
+          <a:effectRef idx="0">
+            <a:schemeClr val="accent1"/>
+          </a:effectRef>
+          <a:fontRef idx="minor">
+            <a:schemeClr val="lt1"/>
+          </a:fontRef>
+        </p:style>
+        <p:txBody>
+          <a:bodyPr rtlCol="0" anchor="ctr"/>
+          <a:lstStyle/>
+          <a:p>
+            <a:pPr algn="ctr"/>
+            <a:endParaRPr lang="de-DE"/>
+          </a:p>
+        </p:txBody>
+      </p:sp>
+      <p:sp>
+        <p:nvSpPr>
+          <p:cNvPr id="75" name="Rechteck 74">
+            <a:extLst>
+              <a:ext uri="{FF2B5EF4-FFF2-40B4-BE49-F238E27FC236}">
+                <a16:creationId xmlns:a16="http://schemas.microsoft.com/office/drawing/2014/main" id="{98A5C0D0-520B-55F1-FB22-241B4C510BC9}"/>
+              </a:ext>
+            </a:extLst>
+          </p:cNvPr>
+          <p:cNvSpPr/>
+          <p:nvPr/>
+        </p:nvSpPr>
+        <p:spPr>
+          <a:xfrm>
+            <a:off x="8735102" y="5040914"/>
+            <a:ext cx="1198344" cy="308763"/>
+          </a:xfrm>
+          <a:prstGeom prst="rect">
+            <a:avLst/>
+          </a:prstGeom>
+          <a:solidFill>
+            <a:schemeClr val="tx1">
+              <a:lumMod val="75000"/>
+              <a:lumOff val="25000"/>
+              <a:alpha val="17000"/>
+            </a:schemeClr>
+          </a:solidFill>
+          <a:ln>
+            <a:noFill/>
+          </a:ln>
+        </p:spPr>
+        <p:style>
+          <a:lnRef idx="2">
+            <a:schemeClr val="accent1">
+              <a:shade val="15000"/>
+            </a:schemeClr>
+          </a:lnRef>
+          <a:fillRef idx="1">
+            <a:schemeClr val="accent1"/>
+          </a:fillRef>
+          <a:effectRef idx="0">
+            <a:schemeClr val="accent1"/>
+          </a:effectRef>
+          <a:fontRef idx="minor">
+            <a:schemeClr val="lt1"/>
+          </a:fontRef>
+        </p:style>
+        <p:txBody>
+          <a:bodyPr rtlCol="0" anchor="ctr"/>
+          <a:lstStyle/>
+          <a:p>
+            <a:pPr algn="ctr"/>
+            <a:endParaRPr lang="de-DE"/>
+          </a:p>
+        </p:txBody>
+      </p:sp>
+      <p:sp>
+        <p:nvSpPr>
+          <p:cNvPr id="76" name="Rechteck 75">
+            <a:extLst>
+              <a:ext uri="{FF2B5EF4-FFF2-40B4-BE49-F238E27FC236}">
+                <a16:creationId xmlns:a16="http://schemas.microsoft.com/office/drawing/2014/main" id="{6BC5F6C8-93B1-8B07-92B2-FCFC1683F3F3}"/>
+              </a:ext>
+            </a:extLst>
+          </p:cNvPr>
+          <p:cNvSpPr/>
+          <p:nvPr/>
+        </p:nvSpPr>
+        <p:spPr>
+          <a:xfrm>
+            <a:off x="10109771" y="2718127"/>
+            <a:ext cx="483305" cy="183507"/>
+          </a:xfrm>
+          <a:prstGeom prst="rect">
+            <a:avLst/>
+          </a:prstGeom>
+          <a:solidFill>
+            <a:schemeClr val="tx1">
+              <a:lumMod val="75000"/>
+              <a:lumOff val="25000"/>
+              <a:alpha val="17000"/>
+            </a:schemeClr>
+          </a:solidFill>
+          <a:ln>
+            <a:noFill/>
+          </a:ln>
+        </p:spPr>
+        <p:style>
+          <a:lnRef idx="2">
+            <a:schemeClr val="accent1">
+              <a:shade val="15000"/>
+            </a:schemeClr>
+          </a:lnRef>
+          <a:fillRef idx="1">
+            <a:schemeClr val="accent1"/>
+          </a:fillRef>
+          <a:effectRef idx="0">
+            <a:schemeClr val="accent1"/>
+          </a:effectRef>
+          <a:fontRef idx="minor">
+            <a:schemeClr val="lt1"/>
+          </a:fontRef>
+        </p:style>
+        <p:txBody>
+          <a:bodyPr rtlCol="0" anchor="ctr"/>
+          <a:lstStyle/>
+          <a:p>
+            <a:pPr algn="ctr"/>
+            <a:endParaRPr lang="de-DE"/>
+          </a:p>
+        </p:txBody>
+      </p:sp>
+      <p:sp>
+        <p:nvSpPr>
+          <p:cNvPr id="77" name="Textfeld 76">
+            <a:extLst>
+              <a:ext uri="{FF2B5EF4-FFF2-40B4-BE49-F238E27FC236}">
+                <a16:creationId xmlns:a16="http://schemas.microsoft.com/office/drawing/2014/main" id="{A204432A-D197-8F90-8589-3A0AA14499AE}"/>
+              </a:ext>
+            </a:extLst>
+          </p:cNvPr>
+          <p:cNvSpPr txBox="1"/>
+          <p:nvPr/>
+        </p:nvSpPr>
+        <p:spPr>
+          <a:xfrm>
+            <a:off x="8557228" y="5600773"/>
+            <a:ext cx="3602292" cy="584775"/>
+          </a:xfrm>
+          <a:prstGeom prst="rect">
+            <a:avLst/>
+          </a:prstGeom>
+          <a:noFill/>
+        </p:spPr>
+        <p:txBody>
+          <a:bodyPr wrap="square" rtlCol="0">
+            <a:spAutoFit/>
+          </a:bodyPr>
+          <a:lstStyle/>
+          <a:p>
+            <a:r>
+              <a:rPr lang="de-DE" sz="3200" dirty="0"/>
+              <a:t>und vieles mehr …</a:t>
+            </a:r>
+          </a:p>
+        </p:txBody>
+      </p:sp>
+      <p:sp>
+        <p:nvSpPr>
+          <p:cNvPr id="3" name="Textfeld 2">
+            <a:extLst>
+              <a:ext uri="{FF2B5EF4-FFF2-40B4-BE49-F238E27FC236}">
+                <a16:creationId xmlns:a16="http://schemas.microsoft.com/office/drawing/2014/main" id="{6D807C81-ACEB-69C7-9172-82C4C9A1075B}"/>
+              </a:ext>
+            </a:extLst>
+          </p:cNvPr>
+          <p:cNvSpPr txBox="1"/>
+          <p:nvPr/>
+        </p:nvSpPr>
+        <p:spPr>
+          <a:xfrm>
+            <a:off x="9376912" y="241941"/>
             <a:ext cx="2544565" cy="369332"/>
           </a:xfrm>
           <a:prstGeom prst="rect">
@@ -7669,6 +8049,79 @@
           </a:p>
         </p:txBody>
       </p:sp>
+    </p:spTree>
+    <p:extLst>
+      <p:ext uri="{BB962C8B-B14F-4D97-AF65-F5344CB8AC3E}">
+        <p14:creationId xmlns:p14="http://schemas.microsoft.com/office/powerpoint/2010/main" val="2897287093"/>
+      </p:ext>
+    </p:extLst>
+  </p:cSld>
+  <p:clrMapOvr>
+    <a:masterClrMapping/>
+  </p:clrMapOvr>
+</p:sld>
+</file>
+
+<file path=ppt/slides/slide7.xml><?xml version="1.0" encoding="utf-8"?>
+<p:sld xmlns:a="http://schemas.openxmlformats.org/drawingml/2006/main" xmlns:r="http://schemas.openxmlformats.org/officeDocument/2006/relationships" xmlns:p="http://schemas.openxmlformats.org/presentationml/2006/main">
+  <p:cSld>
+    <p:spTree>
+      <p:nvGrpSpPr>
+        <p:cNvPr id="1" name=""/>
+        <p:cNvGrpSpPr/>
+        <p:nvPr/>
+      </p:nvGrpSpPr>
+      <p:grpSpPr>
+        <a:xfrm>
+          <a:off x="0" y="0"/>
+          <a:ext cx="0" cy="0"/>
+          <a:chOff x="0" y="0"/>
+          <a:chExt cx="0" cy="0"/>
+        </a:xfrm>
+      </p:grpSpPr>
+      <p:sp>
+        <p:nvSpPr>
+          <p:cNvPr id="4" name="Textfeld 3">
+            <a:extLst>
+              <a:ext uri="{FF2B5EF4-FFF2-40B4-BE49-F238E27FC236}">
+                <a16:creationId xmlns:a16="http://schemas.microsoft.com/office/drawing/2014/main" id="{1E970565-9AED-56BD-8E1B-32F49DEDA012}"/>
+              </a:ext>
+            </a:extLst>
+          </p:cNvPr>
+          <p:cNvSpPr txBox="1"/>
+          <p:nvPr/>
+        </p:nvSpPr>
+        <p:spPr>
+          <a:xfrm>
+            <a:off x="9263555" y="211050"/>
+            <a:ext cx="2544565" cy="369332"/>
+          </a:xfrm>
+          <a:prstGeom prst="rect">
+            <a:avLst/>
+          </a:prstGeom>
+          <a:noFill/>
+        </p:spPr>
+        <p:txBody>
+          <a:bodyPr wrap="square" rtlCol="0">
+            <a:spAutoFit/>
+          </a:bodyPr>
+          <a:lstStyle/>
+          <a:p>
+            <a:pPr algn="r"/>
+            <a:r>
+              <a:rPr lang="de-DE" dirty="0">
+                <a:solidFill>
+                  <a:schemeClr val="bg1"/>
+                </a:solidFill>
+                <a:highlight>
+                  <a:srgbClr val="000080"/>
+                </a:highlight>
+              </a:rPr>
+              <a:t>Machine-Log-Navigator</a:t>
+            </a:r>
+          </a:p>
+        </p:txBody>
+      </p:sp>
       <p:sp>
         <p:nvSpPr>
           <p:cNvPr id="6" name="Textfeld 5">
@@ -7683,8 +8136,8 @@
         </p:nvSpPr>
         <p:spPr>
           <a:xfrm>
-            <a:off x="638351" y="4208831"/>
-            <a:ext cx="11169769" cy="630942"/>
+            <a:off x="638352" y="3866009"/>
+            <a:ext cx="11169769" cy="815608"/>
           </a:xfrm>
           <a:prstGeom prst="rect">
             <a:avLst/>
@@ -7781,7 +8234,57 @@
           <a:p>
             <a:r>
               <a:rPr lang="de-DE" sz="1200" dirty="0"/>
-              <a:t>Erstellen eines Automatismus/ML-Modell, der die richtige Balance zu Kickouts (manuelle QA Nachbearbeitung) und Non-Kickouts trifft (QA-Produktivität) </a:t>
+              <a:t>Erstellen eines Automatismus/ML-Modell, der die richtige Balance zu Kickouts (manuelle QA Nachbearbeitung) und Non-Kickouts trifft (QA-Produktivität)</a:t>
+            </a:r>
+          </a:p>
+          <a:p>
+            <a:r>
+              <a:rPr lang="de-DE" sz="1200" i="1" dirty="0">
+                <a:solidFill>
+                  <a:schemeClr val="bg1">
+                    <a:lumMod val="50000"/>
+                  </a:schemeClr>
+                </a:solidFill>
+              </a:rPr>
+              <a:t>Die aktuelle Erfolgsquote von tatsächlichen Inhaltsfehlern der Pakete liegt bei </a:t>
+            </a:r>
+            <a:r>
+              <a:rPr lang="de-DE" sz="1200" i="1" dirty="0">
+                <a:solidFill>
+                  <a:srgbClr val="C00000"/>
+                </a:solidFill>
+              </a:rPr>
+              <a:t>16%</a:t>
+            </a:r>
+            <a:r>
+              <a:rPr lang="de-DE" sz="1200" i="1" dirty="0">
+                <a:solidFill>
+                  <a:schemeClr val="bg1">
+                    <a:lumMod val="50000"/>
+                  </a:schemeClr>
+                </a:solidFill>
+              </a:rPr>
+              <a:t> (von 100 manuell geprüften Paketen hat nur jedes 16. ein </a:t>
+            </a:r>
+            <a:r>
+              <a:rPr lang="de-DE" sz="1200" i="1" dirty="0" err="1">
+                <a:solidFill>
+                  <a:schemeClr val="bg1">
+                    <a:lumMod val="50000"/>
+                  </a:schemeClr>
+                </a:solidFill>
+              </a:rPr>
+              <a:t>Inhaltsprobem</a:t>
+            </a:r>
+            <a:r>
+              <a:rPr lang="de-DE" sz="1200" i="1" dirty="0">
+                <a:solidFill>
+                  <a:schemeClr val="bg1">
+                    <a:lumMod val="50000"/>
+                  </a:schemeClr>
+                </a:solidFill>
+              </a:rPr>
+              <a:t>) </a:t>
             </a:r>
           </a:p>
         </p:txBody>
@@ -7800,7 +8303,7 @@
         </p:nvSpPr>
         <p:spPr>
           <a:xfrm>
-            <a:off x="638352" y="2305102"/>
+            <a:off x="638352" y="1830650"/>
             <a:ext cx="11042532" cy="1738938"/>
           </a:xfrm>
           <a:prstGeom prst="rect">
@@ -7941,7 +8444,7 @@
         </p:nvSpPr>
         <p:spPr>
           <a:xfrm>
-            <a:off x="638352" y="5064298"/>
+            <a:off x="638352" y="4999034"/>
             <a:ext cx="11042532" cy="630942"/>
           </a:xfrm>
           <a:prstGeom prst="rect">
@@ -8066,207 +8569,6 @@
       </p:sp>
       <p:sp>
         <p:nvSpPr>
-          <p:cNvPr id="11" name="Textfeld 10">
-            <a:extLst>
-              <a:ext uri="{FF2B5EF4-FFF2-40B4-BE49-F238E27FC236}">
-                <a16:creationId xmlns:a16="http://schemas.microsoft.com/office/drawing/2014/main" id="{38F5A2E4-2576-3FC1-B559-62A766EEE8C6}"/>
-              </a:ext>
-            </a:extLst>
-          </p:cNvPr>
-          <p:cNvSpPr txBox="1"/>
-          <p:nvPr/>
-        </p:nvSpPr>
-        <p:spPr>
-          <a:xfrm>
-            <a:off x="511115" y="748719"/>
-            <a:ext cx="11297005" cy="969496"/>
-          </a:xfrm>
-          <a:prstGeom prst="rect">
-            <a:avLst/>
-          </a:prstGeom>
-          <a:noFill/>
-        </p:spPr>
-        <p:txBody>
-          <a:bodyPr wrap="square">
-            <a:spAutoFit/>
-          </a:bodyPr>
-          <a:lstStyle/>
-          <a:p>
-            <a:r>
-              <a:rPr lang="de-DE" sz="1600" b="1" dirty="0">
-                <a:solidFill>
-                  <a:schemeClr val="tx2">
-                    <a:lumMod val="75000"/>
-                    <a:lumOff val="25000"/>
-                  </a:schemeClr>
-                </a:solidFill>
-              </a:rPr>
-              <a:t>Ein </a:t>
-            </a:r>
-            <a:r>
-              <a:rPr lang="de-DE" sz="1600" b="1" u="sng" dirty="0">
-                <a:solidFill>
-                  <a:srgbClr val="00B050"/>
-                </a:solidFill>
-              </a:rPr>
-              <a:t>Web-Portal</a:t>
-            </a:r>
-            <a:r>
-              <a:rPr lang="de-DE" sz="1600" b="1" dirty="0">
-                <a:solidFill>
-                  <a:schemeClr val="tx2">
-                    <a:lumMod val="75000"/>
-                    <a:lumOff val="25000"/>
-                  </a:schemeClr>
-                </a:solidFill>
-              </a:rPr>
-              <a:t> für </a:t>
-            </a:r>
-            <a:r>
-              <a:rPr lang="de-DE" sz="1600" b="1" dirty="0">
-                <a:solidFill>
-                  <a:srgbClr val="00B050"/>
-                </a:solidFill>
-              </a:rPr>
-              <a:t>Logdaten-Uploads</a:t>
-            </a:r>
-            <a:r>
-              <a:rPr lang="de-DE" sz="1600" b="1" dirty="0">
-                <a:solidFill>
-                  <a:schemeClr val="tx2">
-                    <a:lumMod val="75000"/>
-                    <a:lumOff val="25000"/>
-                  </a:schemeClr>
-                </a:solidFill>
-              </a:rPr>
-              <a:t> + </a:t>
-            </a:r>
-            <a:r>
-              <a:rPr lang="de-DE" sz="1600" b="1" dirty="0">
-                <a:solidFill>
-                  <a:srgbClr val="00B050"/>
-                </a:solidFill>
-              </a:rPr>
-              <a:t>Dashboard</a:t>
-            </a:r>
-          </a:p>
-          <a:p>
-            <a:endParaRPr lang="de-DE" sz="500" b="1" dirty="0">
-              <a:solidFill>
-                <a:schemeClr val="tx2">
-                  <a:lumMod val="75000"/>
-                  <a:lumOff val="25000"/>
-                </a:schemeClr>
-              </a:solidFill>
-            </a:endParaRPr>
-          </a:p>
-          <a:p>
-            <a:r>
-              <a:rPr lang="de-DE" sz="1200" dirty="0">
-                <a:solidFill>
-                  <a:schemeClr val="tx2">
-                    <a:lumMod val="75000"/>
-                    <a:lumOff val="25000"/>
-                  </a:schemeClr>
-                </a:solidFill>
-              </a:rPr>
-              <a:t>1) Anzeigen von </a:t>
-            </a:r>
-            <a:r>
-              <a:rPr lang="de-DE" sz="1200" b="1" dirty="0"/>
-              <a:t>Statistiken</a:t>
-            </a:r>
-            <a:r>
-              <a:rPr lang="de-DE" sz="1200" dirty="0">
-                <a:solidFill>
-                  <a:schemeClr val="tx2">
-                    <a:lumMod val="75000"/>
-                    <a:lumOff val="25000"/>
-                  </a:schemeClr>
-                </a:solidFill>
-              </a:rPr>
-              <a:t> und </a:t>
-            </a:r>
-            <a:r>
-              <a:rPr lang="de-DE" sz="1200" b="1" dirty="0"/>
-              <a:t>Auffälligkeiten</a:t>
-            </a:r>
-            <a:r>
-              <a:rPr lang="de-DE" sz="1200" dirty="0">
-                <a:solidFill>
-                  <a:schemeClr val="tx2">
-                    <a:lumMod val="75000"/>
-                    <a:lumOff val="25000"/>
-                  </a:schemeClr>
-                </a:solidFill>
-              </a:rPr>
-              <a:t> aus dem log-upload zum Verhalten von Versand-Label-Maschinen  </a:t>
-            </a:r>
-            <a:r>
-              <a:rPr lang="de-DE" sz="1200" b="1" dirty="0"/>
-              <a:t>(Maschinenbau → Logistik)</a:t>
-            </a:r>
-          </a:p>
-          <a:p>
-            <a:r>
-              <a:rPr lang="de-DE" sz="1200" dirty="0">
-                <a:solidFill>
-                  <a:schemeClr val="tx2">
-                    <a:lumMod val="75000"/>
-                    <a:lumOff val="25000"/>
-                  </a:schemeClr>
-                </a:solidFill>
-              </a:rPr>
-              <a:t>2) Bereitstellen normalisierter Daten zum Download zur </a:t>
-            </a:r>
-            <a:r>
-              <a:rPr lang="de-DE" sz="1200" b="1" dirty="0"/>
-              <a:t>Daten-Transparenz</a:t>
-            </a:r>
-            <a:r>
-              <a:rPr lang="de-DE" sz="1200" dirty="0">
-                <a:solidFill>
-                  <a:schemeClr val="tx2">
-                    <a:lumMod val="75000"/>
-                    <a:lumOff val="25000"/>
-                  </a:schemeClr>
-                </a:solidFill>
-              </a:rPr>
-              <a:t> zur Nachvollziehbarkeit für Softwareentwickler &amp; Produktionsleiter</a:t>
-            </a:r>
-          </a:p>
-          <a:p>
-            <a:r>
-              <a:rPr lang="de-DE" sz="1200" dirty="0">
-                <a:solidFill>
-                  <a:schemeClr val="tx2">
-                    <a:lumMod val="75000"/>
-                    <a:lumOff val="25000"/>
-                  </a:schemeClr>
-                </a:solidFill>
-              </a:rPr>
-              <a:t>3) </a:t>
-            </a:r>
-            <a:r>
-              <a:rPr lang="de-DE" sz="1200" b="1" dirty="0"/>
-              <a:t>Algorithmus</a:t>
-            </a:r>
-            <a:r>
-              <a:rPr lang="de-DE" sz="1200" dirty="0">
-                <a:solidFill>
-                  <a:schemeClr val="tx2">
-                    <a:lumMod val="75000"/>
-                    <a:lumOff val="25000"/>
-                  </a:schemeClr>
-                </a:solidFill>
-              </a:rPr>
-              <a:t> entwickeln/bereitstellen zur Performance-Optimierung der Maschine zwecks Steigerung der QA-Produktivität (Kosteneinsparung) </a:t>
-            </a:r>
-          </a:p>
-        </p:txBody>
-      </p:sp>
-      <p:sp>
-        <p:nvSpPr>
           <p:cNvPr id="12" name="Titel 1">
             <a:extLst>
               <a:ext uri="{FF2B5EF4-FFF2-40B4-BE49-F238E27FC236}">
@@ -8281,8 +8583,8 @@
         </p:nvSpPr>
         <p:spPr>
           <a:xfrm>
-            <a:off x="330449" y="1924667"/>
-            <a:ext cx="2706045" cy="342822"/>
+            <a:off x="494351" y="733920"/>
+            <a:ext cx="5207709" cy="815608"/>
           </a:xfrm>
           <a:prstGeom prst="rect">
             <a:avLst/>
@@ -8290,7 +8592,7 @@
         </p:spPr>
         <p:txBody>
           <a:bodyPr vert="horz" lIns="91440" tIns="45720" rIns="91440" bIns="45720" rtlCol="0" anchor="ctr">
-            <a:normAutofit/>
+            <a:noAutofit/>
           </a:bodyPr>
           <a:lstStyle>
             <a:lvl1pPr>
@@ -8310,48 +8612,8 @@
           </a:lstStyle>
           <a:p>
             <a:r>
-              <a:rPr lang="de-DE" sz="1800" dirty="0"/>
+              <a:rPr lang="de-DE" sz="3600" dirty="0"/>
               <a:t>DSI-Lernanwendungen</a:t>
-            </a:r>
-          </a:p>
-        </p:txBody>
-      </p:sp>
-      <p:sp>
-        <p:nvSpPr>
-          <p:cNvPr id="3" name="Textfeld 2">
-            <a:extLst>
-              <a:ext uri="{FF2B5EF4-FFF2-40B4-BE49-F238E27FC236}">
-                <a16:creationId xmlns:a16="http://schemas.microsoft.com/office/drawing/2014/main" id="{F916F535-508F-940F-8F39-451F1915FFA3}"/>
-              </a:ext>
-            </a:extLst>
-          </p:cNvPr>
-          <p:cNvSpPr txBox="1"/>
-          <p:nvPr/>
-        </p:nvSpPr>
-        <p:spPr>
-          <a:xfrm>
-            <a:off x="5348377" y="6540615"/>
-            <a:ext cx="6754483" cy="261610"/>
-          </a:xfrm>
-          <a:prstGeom prst="rect">
-            <a:avLst/>
-          </a:prstGeom>
-          <a:noFill/>
-        </p:spPr>
-        <p:txBody>
-          <a:bodyPr wrap="square" rtlCol="0">
-            <a:spAutoFit/>
-          </a:bodyPr>
-          <a:lstStyle/>
-          <a:p>
-            <a:pPr algn="r"/>
-            <a:r>
-              <a:rPr lang="de-DE" sz="1100" b="1" i="1" dirty="0"/>
-              <a:t>DSI - Abschlußprojekt Team:   </a:t>
-            </a:r>
-            <a:r>
-              <a:rPr lang="de-DE" sz="1100" i="1" dirty="0"/>
-              <a:t>Michael Schipper, Mohamad Esber, Marco Michaelis | Date: May 2026</a:t>
             </a:r>
           </a:p>
         </p:txBody>
